--- a/_implementation-notes/evening-series/FotH Evening Session 8 Slides DRAFT v1.pptx
+++ b/_implementation-notes/evening-series/FotH Evening Session 8 Slides DRAFT v1.pptx
@@ -10,6 +10,7 @@
   <p:sldIdLst>
     <p:sldId id="256" r:id="rId2"/>
     <p:sldId id="281" r:id="rId102"/>
+    <p:sldId id="532" r:id="rId23"/>
     <p:sldId id="282" r:id="rId103"/>
     <p:sldId id="391" r:id="rId104"/>
     <p:sldId id="392" r:id="rId105"/>
@@ -19,7 +20,8 @@
     <p:sldId id="396" r:id="rId109"/>
     <p:sldId id="397" r:id="rId110"/>
     <p:sldId id="398" r:id="rId111"/>
-    <p:sldId id="531" r:id="rId112"/>
+    <p:sldId id="533" r:id="rId24"/>
+    <p:sldId id="534" r:id="rId25"/>
     <p:sldId id="399" r:id="rId113"/>
     <p:sldId id="400" r:id="rId114"/>
   </p:sldIdLst>
@@ -896,20 +898,22 @@
           <a:lstStyle/>
           <a:p>
             <a:r>
-              <a:rPr lang="en-US" sz="1200"/>
               <a:t>S8 · 7:00–7:08 · LEAD: CONTAINER HOLDER</a:t>
             </a:r>
           </a:p>
           <a:p>
             <a:r>
-              <a:rPr lang="en-US" sz="1200"/>
               <a:t>BEATS: 1. The senior speaks the Aaronic blessing and restates the container: Safe, Present, Clear, Intentional. 2. Their frame: seven weeks ago most of us walked in not knowing what this was; today one of us is leading it — that is the design. 3. 'The team is here. But the practice is ours now.'</a:t>
             </a:r>
           </a:p>
           <a:p>
             <a:r>
-              <a:rPr lang="en-US" sz="1200"/>
               <a:t>CUES: Adults sit back from the senior's first word. A ten-second stumble the senior recovers from is worth more than a smooth block an adult saved.</a:t>
+            </a:r>
+          </a:p>
+          <a:p>
+            <a:r>
+              <a:t>PAIR LEAD: name the leading pair in the welcome — two leaders hold tonight, and the room will see the evening handed back and forth between them; that is the design. The pair practices the session together beforehand.</a:t>
             </a:r>
           </a:p>
         </p:txBody>
@@ -1323,59 +1327,6 @@
 </p:notes>
 </file>
 
-<file path=ppt/notesSlides/notesSlide110.xml><?xml version="1.0" encoding="utf-8"?>
-<p:notes xmlns:a="http://schemas.openxmlformats.org/drawingml/2006/main" xmlns:r="http://schemas.openxmlformats.org/officeDocument/2006/relationships" xmlns:p="http://schemas.openxmlformats.org/presentationml/2006/main">
-  <p:cSld>
-    <p:spTree>
-      <p:nvGrpSpPr>
-        <p:cNvPr id="1" name=""/>
-        <p:cNvGrpSpPr/>
-        <p:nvPr/>
-      </p:nvGrpSpPr>
-      <p:grpSpPr>
-        <a:xfrm>
-          <a:off x="0" y="0"/>
-          <a:ext cx="0" cy="0"/>
-          <a:chOff x="0" y="0"/>
-          <a:chExt cx="0" cy="0"/>
-        </a:xfrm>
-      </p:grpSpPr>
-      <p:sp>
-        <p:nvSpPr>
-          <p:cNvPr id="2" name="Notes Placeholder 1"/>
-          <p:cNvSpPr>
-            <a:spLocks noGrp="1"/>
-          </p:cNvSpPr>
-          <p:nvPr>
-            <p:ph type="body" idx="1"/>
-          </p:nvPr>
-        </p:nvSpPr>
-        <p:spPr/>
-        <p:txBody>
-          <a:bodyPr/>
-          <a:lstStyle/>
-          <a:p>
-            <a:r>
-              <a:rPr lang="en-US" sz="1200"/>
-              <a:t>S8 · 8:17–8:20 · LEAD: CONTENT PRESENTER</a:t>
-            </a:r>
-          </a:p>
-          <a:p>
-            <a:r>
-              <a:rPr lang="en-US" sz="1200"/>
-              <a:t>BEATS: 1. Check-off card home: daily PROAPT, morning question, evening note, Five-Minute Examen. 2. A missed box is an invitation to return, never a failure. 3. Keep this brief — the card explains itself; today's message was the senior's lead.</a:t>
-            </a:r>
-          </a:p>
-        </p:txBody>
-      </p:sp>
-    </p:spTree>
-  </p:cSld>
-  <p:clrMapOvr>
-    <a:masterClrMapping/>
-  </p:clrMapOvr>
-</p:notes>
-</file>
-
 <file path=ppt/notesSlides/notesSlide111.xml><?xml version="1.0" encoding="utf-8"?>
 <p:notes xmlns:a="http://schemas.openxmlformats.org/drawingml/2006/main" xmlns:r="http://schemas.openxmlformats.org/officeDocument/2006/relationships" xmlns:p="http://schemas.openxmlformats.org/presentationml/2006/main">
   <p:cSld>
@@ -1470,6 +1421,214 @@
             <a:r>
               <a:rPr lang="en-US" sz="1200"/>
               <a:t>BEATS: 1. The senior closes: seven weeks ago none of us had done this; when we gather we go deeper, into the Garden — today's skill of hearing Him is what the Garden depends on. 2. 'Keep the daily practice alive this week. It's the hinge.' 3. Aaronic blessing, spoken by the senior — its own quiet milestone. 4. 'PROAPT one passage tomorrow. See you evenings.'</a:t>
+            </a:r>
+          </a:p>
+        </p:txBody>
+      </p:sp>
+    </p:spTree>
+  </p:cSld>
+  <p:clrMapOvr>
+    <a:masterClrMapping/>
+  </p:clrMapOvr>
+</p:notes>
+</file>
+
+<file path=ppt/notesSlides/notesSlide15.xml><?xml version="1.0" encoding="utf-8"?>
+<p:notes xmlns:a="http://schemas.openxmlformats.org/drawingml/2006/main" xmlns:p="http://schemas.openxmlformats.org/presentationml/2006/main" xmlns:r="http://schemas.openxmlformats.org/officeDocument/2006/relationships">
+  <p:cSld>
+    <p:spTree>
+      <p:nvGrpSpPr>
+        <p:cNvPr id="1" name=""/>
+        <p:cNvGrpSpPr/>
+        <p:nvPr/>
+      </p:nvGrpSpPr>
+      <p:grpSpPr>
+        <a:xfrm>
+          <a:off x="0" y="0"/>
+          <a:ext cx="0" cy="0"/>
+          <a:chOff x="0" y="0"/>
+          <a:chExt cx="0" cy="0"/>
+        </a:xfrm>
+      </p:grpSpPr>
+      <p:sp>
+        <p:nvSpPr>
+          <p:cNvPr id="2" name="Notes Placeholder 1"/>
+          <p:cNvSpPr>
+            <a:spLocks noGrp="1"/>
+          </p:cNvSpPr>
+          <p:nvPr>
+            <p:ph type="body" idx="1"/>
+          </p:nvPr>
+        </p:nvSpPr>
+        <p:spPr/>
+        <p:txBody>
+          <a:bodyPr/>
+          <a:lstStyle/>
+          <a:p>
+            <a:r>
+              <a:t>S8 · WELCOME · LEAD: CONTAINER HOLDER · GROUNDING — every session opens on this map</a:t>
+            </a:r>
+          </a:p>
+          <a:p>
+            <a:r>
+              <a:t>BEATS:</a:t>
+            </a:r>
+          </a:p>
+          <a:p>
+            <a:r>
+              <a:t>1. Locate tonight on the map, plainly: Session 8 stands in the third box — Connect with God — walked again, teen-led. Each connection makes the next one real (Matt. 22:37–40).</a:t>
+            </a:r>
+          </a:p>
+          <a:p>
+            <a:r>
+              <a:t>2. The four boxes are one journey — each connection makes the next one real — rooted in the two great commandments: love God, love neighbor (Matt 22:37–40).</a:t>
+            </a:r>
+          </a:p>
+          <a:p>
+            <a:r>
+              <a:t>3. This is also the 'where we are on the map' minute the welcome owes any newcomer.</a:t>
+            </a:r>
+          </a:p>
+          <a:p>
+            <a:r>
+              <a:t>CUES: Two minutes at most; then tonight's road.</a:t>
+            </a:r>
+          </a:p>
+        </p:txBody>
+      </p:sp>
+    </p:spTree>
+  </p:cSld>
+  <p:clrMapOvr>
+    <a:masterClrMapping/>
+  </p:clrMapOvr>
+</p:notes>
+</file>
+
+<file path=ppt/notesSlides/notesSlide16.xml><?xml version="1.0" encoding="utf-8"?>
+<p:notes xmlns:a="http://schemas.openxmlformats.org/drawingml/2006/main" xmlns:p="http://schemas.openxmlformats.org/presentationml/2006/main" xmlns:r="http://schemas.openxmlformats.org/officeDocument/2006/relationships">
+  <p:cSld>
+    <p:spTree>
+      <p:nvGrpSpPr>
+        <p:cNvPr id="1" name=""/>
+        <p:cNvGrpSpPr/>
+        <p:nvPr/>
+      </p:nvGrpSpPr>
+      <p:grpSpPr>
+        <a:xfrm>
+          <a:off x="0" y="0"/>
+          <a:ext cx="0" cy="0"/>
+          <a:chOff x="0" y="0"/>
+          <a:chExt cx="0" cy="0"/>
+        </a:xfrm>
+      </p:grpSpPr>
+      <p:sp>
+        <p:nvSpPr>
+          <p:cNvPr id="2" name="Notes Placeholder 1"/>
+          <p:cNvSpPr>
+            <a:spLocks noGrp="1"/>
+          </p:cNvSpPr>
+          <p:nvPr>
+            <p:ph type="body" idx="1"/>
+          </p:nvPr>
+        </p:nvSpPr>
+        <p:spPr/>
+        <p:txBody>
+          <a:bodyPr/>
+          <a:lstStyle/>
+          <a:p>
+            <a:r>
+              <a:t>S8 · COMMISSIONING · LEAD: CONTENT PRESENTER</a:t>
+            </a:r>
+          </a:p>
+          <a:p>
+            <a:r>
+              <a:t>BEATS:</a:t>
+            </a:r>
+          </a:p>
+          <a:p>
+            <a:r>
+              <a:t>1. The sheet on the screen is the sheet in their hands — walk it, don't read it.</a:t>
+            </a:r>
+          </a:p>
+          <a:p>
+            <a:r>
+              <a:t>2. The standing rhythm first: the morning question, the evening journal line — one box per day on the week-grids.</a:t>
+            </a:r>
+          </a:p>
+          <a:p>
+            <a:r>
+              <a:t>3. A missed box is never a failure — it is an invitation to return.</a:t>
+            </a:r>
+          </a:p>
+          <a:p>
+            <a:r>
+              <a:t>CUES: The four parts are the next slide.</a:t>
+            </a:r>
+          </a:p>
+        </p:txBody>
+      </p:sp>
+    </p:spTree>
+  </p:cSld>
+  <p:clrMapOvr>
+    <a:masterClrMapping/>
+  </p:clrMapOvr>
+</p:notes>
+</file>
+
+<file path=ppt/notesSlides/notesSlide17.xml><?xml version="1.0" encoding="utf-8"?>
+<p:notes xmlns:a="http://schemas.openxmlformats.org/drawingml/2006/main" xmlns:p="http://schemas.openxmlformats.org/presentationml/2006/main" xmlns:r="http://schemas.openxmlformats.org/officeDocument/2006/relationships">
+  <p:cSld>
+    <p:spTree>
+      <p:nvGrpSpPr>
+        <p:cNvPr id="1" name=""/>
+        <p:cNvGrpSpPr/>
+        <p:nvPr/>
+      </p:nvGrpSpPr>
+      <p:grpSpPr>
+        <a:xfrm>
+          <a:off x="0" y="0"/>
+          <a:ext cx="0" cy="0"/>
+          <a:chOff x="0" y="0"/>
+          <a:chExt cx="0" cy="0"/>
+        </a:xfrm>
+      </p:grpSpPr>
+      <p:sp>
+        <p:nvSpPr>
+          <p:cNvPr id="2" name="Notes Placeholder 1"/>
+          <p:cNvSpPr>
+            <a:spLocks noGrp="1"/>
+          </p:cNvSpPr>
+          <p:nvPr>
+            <p:ph type="body" idx="1"/>
+          </p:nvPr>
+        </p:nvSpPr>
+        <p:spPr/>
+        <p:txBody>
+          <a:bodyPr/>
+          <a:lstStyle/>
+          <a:p>
+            <a:r>
+              <a:t>S8 · COMMISSIONING · LEAD: CONTENT PRESENTER</a:t>
+            </a:r>
+          </a:p>
+          <a:p>
+            <a:r>
+              <a:t>BEATS:</a:t>
+            </a:r>
+          </a:p>
+          <a:p>
+            <a:r>
+              <a:t>1. The four parts, in order: the homework practice, week one; the end-of-week-one check-in; the homework practice, week two; one sentence of preparation.</a:t>
+            </a:r>
+          </a:p>
+          <a:p>
+            <a:r>
+              <a:t>2. Check-in partners are named aloud before leaving this slide — the sheet has the line to write the name.</a:t>
+            </a:r>
+          </a:p>
+          <a:p>
+            <a:r>
+              <a:t>GUARD: The sheet-walk, not a re-teach.</a:t>
             </a:r>
           </a:p>
         </p:txBody>
@@ -4681,7 +4840,1893 @@
 </p:sld>
 </file>
 
-<file path=ppt/slides/slide101.xml><?xml version="1.0" encoding="utf-8"?>
+<file path=ppt/slides/slide10.xml><?xml version="1.0" encoding="utf-8"?>
+<p:sld xmlns:a="http://schemas.openxmlformats.org/drawingml/2006/main" xmlns:r="http://schemas.openxmlformats.org/officeDocument/2006/relationships" xmlns:p="http://schemas.openxmlformats.org/presentationml/2006/main">
+  <p:cSld>
+    <p:spTree>
+      <p:nvGrpSpPr>
+        <p:cNvPr id="1" name=""/>
+        <p:cNvGrpSpPr/>
+        <p:nvPr/>
+      </p:nvGrpSpPr>
+      <p:grpSpPr>
+        <a:xfrm>
+          <a:off x="0" y="0"/>
+          <a:ext cx="0" cy="0"/>
+          <a:chOff x="0" y="0"/>
+          <a:chExt cx="0" cy="0"/>
+        </a:xfrm>
+      </p:grpSpPr>
+      <p:sp>
+        <p:nvSpPr>
+          <p:cNvPr id="2" name="Rectangle 1"/>
+          <p:cNvSpPr/>
+          <p:nvPr/>
+        </p:nvSpPr>
+        <p:spPr>
+          <a:xfrm>
+            <a:off x="0" y="0"/>
+            <a:ext cx="12191695" cy="6858000"/>
+          </a:xfrm>
+          <a:prstGeom prst="rect">
+            <a:avLst/>
+          </a:prstGeom>
+          <a:solidFill>
+            <a:srgbClr val="FFFFFF"/>
+          </a:solidFill>
+          <a:ln>
+            <a:noFill/>
+          </a:ln>
+        </p:spPr>
+        <p:txBody>
+          <a:bodyPr/>
+          <a:lstStyle/>
+          <a:p>
+            <a:endParaRPr/>
+          </a:p>
+        </p:txBody>
+      </p:sp>
+      <p:sp>
+        <p:nvSpPr>
+          <p:cNvPr id="3" name="TextBox 2"/>
+          <p:cNvSpPr txBox="1"/>
+          <p:nvPr/>
+        </p:nvSpPr>
+        <p:spPr>
+          <a:xfrm>
+            <a:off x="822960" y="502920"/>
+            <a:ext cx="10515600" cy="822960"/>
+          </a:xfrm>
+          <a:prstGeom prst="rect">
+            <a:avLst/>
+          </a:prstGeom>
+          <a:noFill/>
+        </p:spPr>
+        <p:txBody>
+          <a:bodyPr wrap="square">
+            <a:spAutoFit/>
+          </a:bodyPr>
+          <a:lstStyle/>
+          <a:p>
+            <a:pPr algn="l">
+              <a:spcAft>
+                <a:spcPts val="600"/>
+              </a:spcAft>
+            </a:pPr>
+            <a:r>
+              <a:rPr sz="2800" b="1" i="0">
+                <a:solidFill>
+                  <a:srgbClr val="2C5F2D"/>
+                </a:solidFill>
+                <a:latin typeface="Cambria"/>
+              </a:rPr>
+              <a:t>Tell Step — Sharing in the pair</a:t>
+            </a:r>
+          </a:p>
+        </p:txBody>
+      </p:sp>
+      <p:sp>
+        <p:nvSpPr>
+          <p:cNvPr id="4" name="TextBox 4"/>
+          <p:cNvSpPr txBox="1"/>
+          <p:nvPr/>
+        </p:nvSpPr>
+        <p:spPr>
+          <a:xfrm>
+            <a:off x="822960" y="1554480"/>
+            <a:ext cx="10515600" cy="4892040"/>
+          </a:xfrm>
+          <a:prstGeom prst="rect">
+            <a:avLst/>
+          </a:prstGeom>
+          <a:noFill/>
+        </p:spPr>
+        <p:txBody>
+          <a:bodyPr wrap="square" lIns="91440" tIns="91440" rIns="91440" bIns="91440"/>
+          <a:lstStyle/>
+          <a:p>
+            <a:pPr marL="274320" indent="-274320">
+              <a:spcAft>
+                <a:spcPts val="750"/>
+              </a:spcAft>
+            </a:pPr>
+            <a:r>
+              <a:rPr sz="2400" b="1" i="0">
+                <a:solidFill>
+                  <a:srgbClr val="97BC62"/>
+                </a:solidFill>
+                <a:latin typeface="Calibri"/>
+              </a:rPr>
+              <a:t>•  </a:t>
+            </a:r>
+            <a:r>
+              <a:rPr sz="2400" b="0" i="0">
+                <a:solidFill>
+                  <a:srgbClr val="222B22"/>
+                </a:solidFill>
+                <a:latin typeface="Calibri"/>
+              </a:rPr>
+              <a:t>“The Tell step — second time in the pair, so you know the shape.”</a:t>
+            </a:r>
+          </a:p>
+          <a:p>
+            <a:pPr marL="274320" indent="-274320">
+              <a:spcAft>
+                <a:spcPts val="750"/>
+              </a:spcAft>
+            </a:pPr>
+            <a:r>
+              <a:rPr sz="2400" b="1" i="0">
+                <a:solidFill>
+                  <a:srgbClr val="97BC62"/>
+                </a:solidFill>
+                <a:latin typeface="Calibri"/>
+              </a:rPr>
+              <a:t>•  </a:t>
+            </a:r>
+            <a:r>
+              <a:rPr sz="2400" b="0" i="0">
+                <a:solidFill>
+                  <a:srgbClr val="222B22"/>
+                </a:solidFill>
+                <a:latin typeface="Calibri"/>
+              </a:rPr>
+              <a:t>One specific thing you heard tonight — one sentence — “We listen to receive.”</a:t>
+            </a:r>
+          </a:p>
+          <a:p>
+            <a:pPr marL="274320" indent="-274320">
+              <a:spcAft>
+                <a:spcPts val="750"/>
+              </a:spcAft>
+            </a:pPr>
+            <a:r>
+              <a:rPr sz="2400" b="1" i="0">
+                <a:solidFill>
+                  <a:srgbClr val="97BC62"/>
+                </a:solidFill>
+                <a:latin typeface="Calibri"/>
+              </a:rPr>
+              <a:t>•  </a:t>
+            </a:r>
+            <a:r>
+              <a:rPr sz="2400" b="0" i="0">
+                <a:solidFill>
+                  <a:srgbClr val="222B22"/>
+                </a:solidFill>
+                <a:latin typeface="Calibri"/>
+              </a:rPr>
+              <a:t>A parent opens the round — arranged beforehand, never a cold call on a teen</a:t>
+            </a:r>
+          </a:p>
+          <a:p>
+            <a:pPr marL="274320" indent="-274320">
+              <a:spcAft>
+                <a:spcPts val="750"/>
+              </a:spcAft>
+            </a:pPr>
+            <a:r>
+              <a:rPr sz="2400" b="1" i="0">
+                <a:solidFill>
+                  <a:srgbClr val="97BC62"/>
+                </a:solidFill>
+                <a:latin typeface="Calibri"/>
+              </a:rPr>
+              <a:t>•  </a:t>
+            </a:r>
+            <a:r>
+              <a:rPr sz="2400" b="0" i="0">
+                <a:solidFill>
+                  <a:srgbClr val="222B22"/>
+                </a:solidFill>
+                <a:latin typeface="Calibri"/>
+              </a:rPr>
+              <a:t>Teens choose their own depth; pass-anytime holds</a:t>
+            </a:r>
+          </a:p>
+          <a:p>
+            <a:pPr marL="274320" indent="-274320">
+              <a:spcAft>
+                <a:spcPts val="750"/>
+              </a:spcAft>
+            </a:pPr>
+            <a:r>
+              <a:rPr sz="2400" b="1" i="0">
+                <a:solidFill>
+                  <a:srgbClr val="97BC62"/>
+                </a:solidFill>
+                <a:latin typeface="Calibri"/>
+              </a:rPr>
+              <a:t>•  </a:t>
+            </a:r>
+            <a:r>
+              <a:rPr sz="2400" b="0" i="0">
+                <a:solidFill>
+                  <a:srgbClr val="222B22"/>
+                </a:solidFill>
+                <a:latin typeface="Calibri"/>
+              </a:rPr>
+              <a:t>Receive without preaching — “We hear that.” “Thank you for naming that.”</a:t>
+            </a:r>
+          </a:p>
+          <a:p>
+            <a:pPr marL="274320" indent="-274320">
+              <a:spcAft>
+                <a:spcPts val="750"/>
+              </a:spcAft>
+            </a:pPr>
+            <a:r>
+              <a:rPr sz="2400" b="1" i="0">
+                <a:solidFill>
+                  <a:srgbClr val="97BC62"/>
+                </a:solidFill>
+                <a:latin typeface="Calibri"/>
+              </a:rPr>
+              <a:t>•  </a:t>
+            </a:r>
+            <a:r>
+              <a:rPr sz="2400" b="0" i="0">
+                <a:solidFill>
+                  <a:srgbClr val="222B22"/>
+                </a:solidFill>
+                <a:latin typeface="Calibri"/>
+              </a:rPr>
+              <a:t>“Take what you heard with you. It was given to be walked out.”</a:t>
+            </a:r>
+          </a:p>
+        </p:txBody>
+      </p:sp>
+      <p:sp>
+        <p:nvSpPr>
+          <p:cNvPr id="90" name="SlideNum"/>
+          <p:cNvSpPr txBox="1"/>
+          <p:nvPr/>
+        </p:nvSpPr>
+        <p:spPr>
+          <a:xfrm>
+            <a:off x="11384280" y="6446520"/>
+            <a:ext cx="640080" cy="292608"/>
+          </a:xfrm>
+          <a:prstGeom prst="rect">
+            <a:avLst/>
+          </a:prstGeom>
+          <a:noFill/>
+        </p:spPr>
+        <p:txBody>
+          <a:bodyPr wrap="none" lIns="0" tIns="0" rIns="45720" bIns="0" anchor="ctr"/>
+          <a:lstStyle/>
+          <a:p>
+            <a:pPr algn="r"/>
+            <a:r>
+              <a:t>109</a:t>
+            </a:r>
+            <a:endParaRPr sz="1000" b="1">
+              <a:solidFill>
+                <a:srgbClr val="7A8A6E"/>
+              </a:solidFill>
+              <a:latin typeface="Calibri"/>
+            </a:endParaRPr>
+          </a:p>
+        </p:txBody>
+      </p:sp>
+    </p:spTree>
+  </p:cSld>
+  <p:clrMapOvr>
+    <a:masterClrMapping/>
+  </p:clrMapOvr>
+</p:sld>
+</file>
+
+<file path=ppt/slides/slide11.xml><?xml version="1.0" encoding="utf-8"?>
+<p:sld xmlns:a="http://schemas.openxmlformats.org/drawingml/2006/main" xmlns:r="http://schemas.openxmlformats.org/officeDocument/2006/relationships" xmlns:p="http://schemas.openxmlformats.org/presentationml/2006/main">
+  <p:cSld>
+    <p:spTree>
+      <p:nvGrpSpPr>
+        <p:cNvPr id="1" name=""/>
+        <p:cNvGrpSpPr/>
+        <p:nvPr/>
+      </p:nvGrpSpPr>
+      <p:grpSpPr>
+        <a:xfrm>
+          <a:off x="0" y="0"/>
+          <a:ext cx="0" cy="0"/>
+          <a:chOff x="0" y="0"/>
+          <a:chExt cx="0" cy="0"/>
+        </a:xfrm>
+      </p:grpSpPr>
+      <p:sp>
+        <p:nvSpPr>
+          <p:cNvPr id="2" name="Rectangle 1"/>
+          <p:cNvSpPr/>
+          <p:nvPr/>
+        </p:nvSpPr>
+        <p:spPr>
+          <a:xfrm>
+            <a:off x="0" y="0"/>
+            <a:ext cx="12191695" cy="6858000"/>
+          </a:xfrm>
+          <a:prstGeom prst="rect">
+            <a:avLst/>
+          </a:prstGeom>
+          <a:solidFill>
+            <a:srgbClr val="FFFFFF"/>
+          </a:solidFill>
+          <a:ln>
+            <a:noFill/>
+          </a:ln>
+        </p:spPr>
+        <p:txBody>
+          <a:bodyPr/>
+          <a:lstStyle/>
+          <a:p>
+            <a:endParaRPr/>
+          </a:p>
+        </p:txBody>
+      </p:sp>
+      <p:sp>
+        <p:nvSpPr>
+          <p:cNvPr id="3" name="TextBox 2"/>
+          <p:cNvSpPr txBox="1"/>
+          <p:nvPr/>
+        </p:nvSpPr>
+        <p:spPr>
+          <a:xfrm>
+            <a:off x="822960" y="502920"/>
+            <a:ext cx="10515600" cy="822960"/>
+          </a:xfrm>
+          <a:prstGeom prst="rect">
+            <a:avLst/>
+          </a:prstGeom>
+          <a:noFill/>
+        </p:spPr>
+        <p:txBody>
+          <a:bodyPr wrap="square">
+            <a:spAutoFit/>
+          </a:bodyPr>
+          <a:lstStyle/>
+          <a:p>
+            <a:pPr algn="l">
+              <a:spcAft>
+                <a:spcPts val="600"/>
+              </a:spcAft>
+            </a:pPr>
+            <a:r>
+              <a:rPr sz="2800" b="1" i="0">
+                <a:solidFill>
+                  <a:srgbClr val="2C5F2D"/>
+                </a:solidFill>
+                <a:latin typeface="Cambria"/>
+              </a:rPr>
+              <a:t>Merge and Homework Practice</a:t>
+            </a:r>
+          </a:p>
+        </p:txBody>
+      </p:sp>
+      <p:sp>
+        <p:nvSpPr>
+          <p:cNvPr id="4" name="TextBox 4"/>
+          <p:cNvSpPr txBox="1"/>
+          <p:nvPr/>
+        </p:nvSpPr>
+        <p:spPr>
+          <a:xfrm>
+            <a:off x="822960" y="1554480"/>
+            <a:ext cx="6675120" cy="4892040"/>
+          </a:xfrm>
+          <a:prstGeom prst="rect">
+            <a:avLst/>
+          </a:prstGeom>
+          <a:noFill/>
+        </p:spPr>
+        <p:txBody>
+          <a:bodyPr wrap="square" lIns="91440" tIns="91440" rIns="91440" bIns="91440"/>
+          <a:lstStyle/>
+          <a:p>
+            <a:pPr marL="274320" indent="-274320">
+              <a:spcAft>
+                <a:spcPts val="900"/>
+              </a:spcAft>
+            </a:pPr>
+            <a:r>
+              <a:rPr sz="2800" b="1" i="0">
+                <a:solidFill>
+                  <a:srgbClr val="97BC62"/>
+                </a:solidFill>
+                <a:latin typeface="Calibri"/>
+              </a:rPr>
+              <a:t>•  </a:t>
+            </a:r>
+            <a:r>
+              <a:rPr sz="2800" b="0" i="0">
+                <a:solidFill>
+                  <a:srgbClr val="222B22"/>
+                </a:solidFill>
+                <a:latin typeface="Calibri"/>
+              </a:rPr>
+              <a:t>Daily PROAPT continues — one passage, five to fifteen minutes, every day (journal Week 7–8 pages)</a:t>
+            </a:r>
+          </a:p>
+          <a:p>
+            <a:pPr marL="274320" indent="-274320">
+              <a:spcAft>
+                <a:spcPts val="900"/>
+              </a:spcAft>
+            </a:pPr>
+            <a:r>
+              <a:rPr sz="2800" b="1" i="0">
+                <a:solidFill>
+                  <a:srgbClr val="97BC62"/>
+                </a:solidFill>
+                <a:latin typeface="Calibri"/>
+              </a:rPr>
+              <a:t>•  </a:t>
+            </a:r>
+            <a:r>
+              <a:rPr sz="2800" b="0" i="0">
+                <a:solidFill>
+                  <a:srgbClr val="222B22"/>
+                </a:solidFill>
+                <a:latin typeface="Calibri"/>
+              </a:rPr>
+              <a:t>“If last week thinned out, restart tomorrow. No guilt, no doubling up.”</a:t>
+            </a:r>
+          </a:p>
+          <a:p>
+            <a:pPr marL="274320" indent="-274320">
+              <a:spcAft>
+                <a:spcPts val="900"/>
+              </a:spcAft>
+            </a:pPr>
+            <a:r>
+              <a:rPr sz="2800" b="1" i="0">
+                <a:solidFill>
+                  <a:srgbClr val="97BC62"/>
+                </a:solidFill>
+                <a:latin typeface="Calibri"/>
+              </a:rPr>
+              <a:t>•  </a:t>
+            </a:r>
+            <a:r>
+              <a:rPr sz="2800" b="0" i="0">
+                <a:solidFill>
+                  <a:srgbClr val="222B22"/>
+                </a:solidFill>
+                <a:latin typeface="Calibri"/>
+              </a:rPr>
+              <a:t>“Take a moment on the way home to notice what just happened in this room. One of our own led the whole practice tonight. That is the design working.”</a:t>
+            </a:r>
+          </a:p>
+        </p:txBody>
+      </p:sp>
+      <p:sp>
+        <p:nvSpPr>
+          <p:cNvPr id="90" name="SlideNum"/>
+          <p:cNvSpPr txBox="1"/>
+          <p:nvPr/>
+        </p:nvSpPr>
+        <p:spPr>
+          <a:xfrm>
+            <a:off x="11384280" y="6446520"/>
+            <a:ext cx="640080" cy="292608"/>
+          </a:xfrm>
+          <a:prstGeom prst="rect">
+            <a:avLst/>
+          </a:prstGeom>
+          <a:noFill/>
+        </p:spPr>
+        <p:txBody>
+          <a:bodyPr wrap="none" lIns="0" tIns="0" rIns="45720" bIns="0" anchor="ctr"/>
+          <a:lstStyle/>
+          <a:p>
+            <a:pPr algn="r"/>
+            <a:r>
+              <a:t>110</a:t>
+            </a:r>
+            <a:endParaRPr sz="1000" b="1">
+              <a:solidFill>
+                <a:srgbClr val="7A8A6E"/>
+              </a:solidFill>
+              <a:latin typeface="Calibri"/>
+            </a:endParaRPr>
+          </a:p>
+        </p:txBody>
+      </p:sp>
+      <p:pic>
+        <p:nvPicPr>
+          <p:cNvPr id="34" name="Picture 34" descr="seedling - what grows between Wednesdays"/>
+          <p:cNvPicPr>
+            <a:picLocks noChangeAspect="1"/>
+          </p:cNvPicPr>
+          <p:nvPr/>
+        </p:nvPicPr>
+        <p:blipFill>
+          <a:blip r:embed="rId3"/>
+          <a:stretch>
+            <a:fillRect/>
+          </a:stretch>
+        </p:blipFill>
+        <p:spPr>
+          <a:xfrm>
+            <a:off x="8103612" y="1463040"/>
+            <a:ext cx="3262379" cy="4892040"/>
+          </a:xfrm>
+          <a:prstGeom prst="rect">
+            <a:avLst/>
+          </a:prstGeom>
+          <a:ln w="76200">
+            <a:solidFill>
+              <a:srgbClr val="FFFFFF"/>
+            </a:solidFill>
+          </a:ln>
+          <a:effectLst>
+            <a:outerShdw blurRad="63500" dist="25400" dir="5400000" rotWithShape="0">
+              <a:srgbClr val="000000">
+                <a:alpha val="35000"/>
+              </a:srgbClr>
+            </a:outerShdw>
+          </a:effectLst>
+        </p:spPr>
+      </p:pic>
+    </p:spTree>
+  </p:cSld>
+  <p:clrMapOvr>
+    <a:masterClrMapping/>
+  </p:clrMapOvr>
+</p:sld>
+</file>
+
+<file path=ppt/slides/slide13.xml><?xml version="1.0" encoding="utf-8"?>
+<p:sld xmlns:a="http://schemas.openxmlformats.org/drawingml/2006/main" xmlns:r="http://schemas.openxmlformats.org/officeDocument/2006/relationships" xmlns:p="http://schemas.openxmlformats.org/presentationml/2006/main">
+  <p:cSld>
+    <p:spTree>
+      <p:nvGrpSpPr>
+        <p:cNvPr id="1" name=""/>
+        <p:cNvGrpSpPr/>
+        <p:nvPr/>
+      </p:nvGrpSpPr>
+      <p:grpSpPr>
+        <a:xfrm>
+          <a:off x="0" y="0"/>
+          <a:ext cx="0" cy="0"/>
+          <a:chOff x="0" y="0"/>
+          <a:chExt cx="0" cy="0"/>
+        </a:xfrm>
+      </p:grpSpPr>
+      <p:sp>
+        <p:nvSpPr>
+          <p:cNvPr id="2" name="Rectangle 1"/>
+          <p:cNvSpPr/>
+          <p:nvPr/>
+        </p:nvSpPr>
+        <p:spPr>
+          <a:xfrm>
+            <a:off x="0" y="0"/>
+            <a:ext cx="12191695" cy="6858000"/>
+          </a:xfrm>
+          <a:prstGeom prst="rect">
+            <a:avLst/>
+          </a:prstGeom>
+          <a:solidFill>
+            <a:srgbClr val="FFFFFF"/>
+          </a:solidFill>
+          <a:ln>
+            <a:noFill/>
+          </a:ln>
+        </p:spPr>
+        <p:txBody>
+          <a:bodyPr/>
+          <a:lstStyle/>
+          <a:p>
+            <a:endParaRPr/>
+          </a:p>
+        </p:txBody>
+      </p:sp>
+      <p:sp>
+        <p:nvSpPr>
+          <p:cNvPr id="3" name="TextBox 2"/>
+          <p:cNvSpPr txBox="1"/>
+          <p:nvPr/>
+        </p:nvSpPr>
+        <p:spPr>
+          <a:xfrm>
+            <a:off x="822960" y="502920"/>
+            <a:ext cx="10515600" cy="822960"/>
+          </a:xfrm>
+          <a:prstGeom prst="rect">
+            <a:avLst/>
+          </a:prstGeom>
+          <a:noFill/>
+        </p:spPr>
+        <p:txBody>
+          <a:bodyPr wrap="square">
+            <a:spAutoFit/>
+          </a:bodyPr>
+          <a:lstStyle/>
+          <a:p>
+            <a:pPr algn="l">
+              <a:spcAft>
+                <a:spcPts val="600"/>
+              </a:spcAft>
+            </a:pPr>
+            <a:r>
+              <a:rPr sz="2800" b="1" i="0">
+                <a:solidFill>
+                  <a:srgbClr val="2C5F2D"/>
+                </a:solidFill>
+                <a:latin typeface="Cambria"/>
+              </a:rPr>
+              <a:t>The Leader Feedback Round</a:t>
+            </a:r>
+          </a:p>
+        </p:txBody>
+      </p:sp>
+      <p:sp>
+        <p:nvSpPr>
+          <p:cNvPr id="4" name="TextBox 4"/>
+          <p:cNvSpPr txBox="1"/>
+          <p:nvPr/>
+        </p:nvSpPr>
+        <p:spPr>
+          <a:xfrm>
+            <a:off x="822960" y="1554480"/>
+            <a:ext cx="6675120" cy="4892040"/>
+          </a:xfrm>
+          <a:prstGeom prst="rect">
+            <a:avLst/>
+          </a:prstGeom>
+          <a:noFill/>
+        </p:spPr>
+        <p:txBody>
+          <a:bodyPr wrap="square" lIns="91440" tIns="91440" rIns="91440" bIns="91440"/>
+          <a:lstStyle/>
+          <a:p>
+            <a:pPr marL="274320" indent="-274320">
+              <a:spcAft>
+                <a:spcPts val="900"/>
+              </a:spcAft>
+            </a:pPr>
+            <a:r>
+              <a:rPr sz="2800" b="1" i="0">
+                <a:solidFill>
+                  <a:srgbClr val="97BC62"/>
+                </a:solidFill>
+                <a:latin typeface="Calibri"/>
+              </a:rPr>
+              <a:t>•  </a:t>
+            </a:r>
+            <a:r>
+              <a:rPr sz="2800" b="0" i="0">
+                <a:solidFill>
+                  <a:srgbClr val="222B22"/>
+                </a:solidFill>
+                <a:latin typeface="Calibri"/>
+              </a:rPr>
+              <a:t>Two rounds, same as every session — the container holder first, then the content presenter: three things each</a:t>
+            </a:r>
+          </a:p>
+          <a:p>
+            <a:pPr marL="685800" indent="-274320">
+              <a:spcAft>
+                <a:spcPts val="700"/>
+              </a:spcAft>
+            </a:pPr>
+            <a:r>
+              <a:rPr sz="2000" b="1" i="0">
+                <a:solidFill>
+                  <a:srgbClr val="97BC62"/>
+                </a:solidFill>
+                <a:latin typeface="Calibri"/>
+              </a:rPr>
+              <a:t>–  </a:t>
+            </a:r>
+            <a:r>
+              <a:rPr sz="2000" b="0" i="1">
+                <a:solidFill>
+                  <a:srgbClr val="222B22"/>
+                </a:solidFill>
+                <a:latin typeface="Calibri"/>
+              </a:rPr>
+              <a:t>“What I think went well tonight: ______”</a:t>
+            </a:r>
+          </a:p>
+          <a:p>
+            <a:pPr marL="685800" indent="-274320">
+              <a:spcAft>
+                <a:spcPts val="700"/>
+              </a:spcAft>
+            </a:pPr>
+            <a:r>
+              <a:rPr sz="2000" b="1" i="0">
+                <a:solidFill>
+                  <a:srgbClr val="97BC62"/>
+                </a:solidFill>
+                <a:latin typeface="Calibri"/>
+              </a:rPr>
+              <a:t>–  </a:t>
+            </a:r>
+            <a:r>
+              <a:rPr sz="2000" b="0" i="1">
+                <a:solidFill>
+                  <a:srgbClr val="222B22"/>
+                </a:solidFill>
+                <a:latin typeface="Calibri"/>
+              </a:rPr>
+              <a:t>“What I’d do differently next time: ______”</a:t>
+            </a:r>
+          </a:p>
+          <a:p>
+            <a:pPr marL="685800" indent="-274320">
+              <a:spcAft>
+                <a:spcPts val="700"/>
+              </a:spcAft>
+            </a:pPr>
+            <a:r>
+              <a:rPr sz="2000" b="1" i="0">
+                <a:solidFill>
+                  <a:srgbClr val="97BC62"/>
+                </a:solidFill>
+                <a:latin typeface="Calibri"/>
+              </a:rPr>
+              <a:t>–  </a:t>
+            </a:r>
+            <a:r>
+              <a:rPr sz="2000" b="0" i="1">
+                <a:solidFill>
+                  <a:srgbClr val="222B22"/>
+                </a:solidFill>
+                <a:latin typeface="Calibri"/>
+              </a:rPr>
+              <a:t>“If I were to teach tonight’s process to someone, I would tell them: ______”</a:t>
+            </a:r>
+          </a:p>
+          <a:p>
+            <a:pPr marL="274320" indent="-274320">
+              <a:spcAft>
+                <a:spcPts val="900"/>
+              </a:spcAft>
+            </a:pPr>
+            <a:r>
+              <a:rPr sz="2800" b="1" i="0">
+                <a:solidFill>
+                  <a:srgbClr val="97BC62"/>
+                </a:solidFill>
+                <a:latin typeface="Calibri"/>
+              </a:rPr>
+              <a:t>•  </a:t>
+            </a:r>
+            <a:r>
+              <a:rPr sz="2800" b="0" i="0">
+                <a:solidFill>
+                  <a:srgbClr val="222B22"/>
+                </a:solidFill>
+                <a:latin typeface="Calibri"/>
+              </a:rPr>
+              <a:t>Then the room — the same two questions about tonight</a:t>
+            </a:r>
+          </a:p>
+          <a:p>
+            <a:pPr marL="274320" indent="-274320">
+              <a:spcAft>
+                <a:spcPts val="900"/>
+              </a:spcAft>
+            </a:pPr>
+            <a:r>
+              <a:rPr sz="2800" b="1" i="0">
+                <a:solidFill>
+                  <a:srgbClr val="97BC62"/>
+                </a:solidFill>
+                <a:latin typeface="Calibri"/>
+              </a:rPr>
+              <a:t>•  </a:t>
+            </a:r>
+            <a:r>
+              <a:rPr sz="2800" b="0" i="0">
+                <a:solidFill>
+                  <a:srgbClr val="222B22"/>
+                </a:solidFill>
+                <a:latin typeface="Calibri"/>
+              </a:rPr>
+              <a:t>The leaders receive without defending — “thank you” is the whole response</a:t>
+            </a:r>
+          </a:p>
+        </p:txBody>
+      </p:sp>
+      <p:sp>
+        <p:nvSpPr>
+          <p:cNvPr id="90" name="SlideNum"/>
+          <p:cNvSpPr txBox="1"/>
+          <p:nvPr/>
+        </p:nvSpPr>
+        <p:spPr>
+          <a:xfrm>
+            <a:off x="11384280" y="6446520"/>
+            <a:ext cx="640080" cy="292608"/>
+          </a:xfrm>
+          <a:prstGeom prst="rect">
+            <a:avLst/>
+          </a:prstGeom>
+          <a:noFill/>
+        </p:spPr>
+        <p:txBody>
+          <a:bodyPr wrap="none" lIns="0" tIns="0" rIns="45720" bIns="0" anchor="ctr"/>
+          <a:lstStyle/>
+          <a:p>
+            <a:pPr algn="r"/>
+            <a:r>
+              <a:t>112</a:t>
+            </a:r>
+            <a:endParaRPr sz="1000" b="1">
+              <a:solidFill>
+                <a:srgbClr val="7A8A6E"/>
+              </a:solidFill>
+              <a:latin typeface="Calibri"/>
+            </a:endParaRPr>
+          </a:p>
+        </p:txBody>
+      </p:sp>
+      <p:pic>
+        <p:nvPicPr>
+          <p:cNvPr id="33" name="Picture 33" descr="compass on the trail - the weekly bearing check"/>
+          <p:cNvPicPr>
+            <a:picLocks noChangeAspect="1"/>
+          </p:cNvPicPr>
+          <p:nvPr/>
+        </p:nvPicPr>
+        <p:blipFill>
+          <a:blip r:embed="rId3"/>
+          <a:stretch>
+            <a:fillRect/>
+          </a:stretch>
+        </p:blipFill>
+        <p:spPr>
+          <a:xfrm>
+            <a:off x="8106160" y="1463040"/>
+            <a:ext cx="3259831" cy="4892040"/>
+          </a:xfrm>
+          <a:prstGeom prst="rect">
+            <a:avLst/>
+          </a:prstGeom>
+          <a:ln w="76200">
+            <a:solidFill>
+              <a:srgbClr val="FFFFFF"/>
+            </a:solidFill>
+          </a:ln>
+          <a:effectLst>
+            <a:outerShdw blurRad="63500" dist="25400" dir="5400000" rotWithShape="0">
+              <a:srgbClr val="000000">
+                <a:alpha val="35000"/>
+              </a:srgbClr>
+            </a:outerShdw>
+          </a:effectLst>
+        </p:spPr>
+      </p:pic>
+    </p:spTree>
+  </p:cSld>
+  <p:clrMapOvr>
+    <a:masterClrMapping/>
+  </p:clrMapOvr>
+</p:sld>
+</file>
+
+<file path=ppt/slides/slide14.xml><?xml version="1.0" encoding="utf-8"?>
+<p:sld xmlns:a="http://schemas.openxmlformats.org/drawingml/2006/main" xmlns:r="http://schemas.openxmlformats.org/officeDocument/2006/relationships" xmlns:p="http://schemas.openxmlformats.org/presentationml/2006/main">
+  <p:cSld>
+    <p:spTree>
+      <p:nvGrpSpPr>
+        <p:cNvPr id="1" name=""/>
+        <p:cNvGrpSpPr/>
+        <p:nvPr/>
+      </p:nvGrpSpPr>
+      <p:grpSpPr>
+        <a:xfrm>
+          <a:off x="0" y="0"/>
+          <a:ext cx="0" cy="0"/>
+          <a:chOff x="0" y="0"/>
+          <a:chExt cx="0" cy="0"/>
+        </a:xfrm>
+      </p:grpSpPr>
+      <p:sp>
+        <p:nvSpPr>
+          <p:cNvPr id="2" name="Rectangle 1"/>
+          <p:cNvSpPr/>
+          <p:nvPr/>
+        </p:nvSpPr>
+        <p:spPr>
+          <a:xfrm>
+            <a:off x="0" y="0"/>
+            <a:ext cx="12191695" cy="6858000"/>
+          </a:xfrm>
+          <a:prstGeom prst="rect">
+            <a:avLst/>
+          </a:prstGeom>
+          <a:solidFill>
+            <a:srgbClr val="FFFFFF"/>
+          </a:solidFill>
+          <a:ln>
+            <a:noFill/>
+          </a:ln>
+        </p:spPr>
+        <p:txBody>
+          <a:bodyPr/>
+          <a:lstStyle/>
+          <a:p>
+            <a:endParaRPr/>
+          </a:p>
+        </p:txBody>
+      </p:sp>
+      <p:sp>
+        <p:nvSpPr>
+          <p:cNvPr id="3" name="TextBox 2"/>
+          <p:cNvSpPr txBox="1"/>
+          <p:nvPr/>
+        </p:nvSpPr>
+        <p:spPr>
+          <a:xfrm>
+            <a:off x="822960" y="502920"/>
+            <a:ext cx="10515600" cy="822960"/>
+          </a:xfrm>
+          <a:prstGeom prst="rect">
+            <a:avLst/>
+          </a:prstGeom>
+          <a:noFill/>
+        </p:spPr>
+        <p:txBody>
+          <a:bodyPr wrap="square">
+            <a:spAutoFit/>
+          </a:bodyPr>
+          <a:lstStyle/>
+          <a:p>
+            <a:pPr algn="l">
+              <a:spcAft>
+                <a:spcPts val="600"/>
+              </a:spcAft>
+            </a:pPr>
+            <a:r>
+              <a:rPr sz="2800" b="1" i="0">
+                <a:solidFill>
+                  <a:srgbClr val="2C5F2D"/>
+                </a:solidFill>
+                <a:latin typeface="Cambria"/>
+              </a:rPr>
+              <a:t>Closing the Container + Aaronic Blessing</a:t>
+            </a:r>
+          </a:p>
+        </p:txBody>
+      </p:sp>
+      <p:sp>
+        <p:nvSpPr>
+          <p:cNvPr id="4" name="TextBox 4"/>
+          <p:cNvSpPr txBox="1"/>
+          <p:nvPr/>
+        </p:nvSpPr>
+        <p:spPr>
+          <a:xfrm>
+            <a:off x="822960" y="1600200"/>
+            <a:ext cx="5669280" cy="4572000"/>
+          </a:xfrm>
+          <a:prstGeom prst="rect">
+            <a:avLst/>
+          </a:prstGeom>
+          <a:noFill/>
+        </p:spPr>
+        <p:txBody>
+          <a:bodyPr wrap="square" lIns="91440" tIns="91440" rIns="91440" bIns="91440"/>
+          <a:lstStyle/>
+          <a:p>
+            <a:pPr marL="274320" indent="-274320">
+              <a:spcAft>
+                <a:spcPts val="900"/>
+              </a:spcAft>
+            </a:pPr>
+            <a:r>
+              <a:rPr sz="2200" b="1" i="0">
+                <a:solidFill>
+                  <a:srgbClr val="97BC62"/>
+                </a:solidFill>
+                <a:latin typeface="Calibri"/>
+              </a:rPr>
+              <a:t>•  </a:t>
+            </a:r>
+            <a:r>
+              <a:rPr sz="2200" b="0" i="0">
+                <a:solidFill>
+                  <a:srgbClr val="222B22"/>
+                </a:solidFill>
+                <a:latin typeface="Calibri"/>
+              </a:rPr>
+              <a:t>We close the way we opened — the container, six steps:</a:t>
+            </a:r>
+          </a:p>
+          <a:p>
+            <a:pPr marL="685800" indent="-274320">
+              <a:spcAft>
+                <a:spcPts val="700"/>
+              </a:spcAft>
+            </a:pPr>
+            <a:r>
+              <a:rPr sz="2000" b="1" i="0">
+                <a:solidFill>
+                  <a:srgbClr val="97BC62"/>
+                </a:solidFill>
+                <a:latin typeface="Calibri"/>
+              </a:rPr>
+              <a:t>1   </a:t>
+            </a:r>
+            <a:r>
+              <a:rPr sz="2000" b="0" i="0">
+                <a:solidFill>
+                  <a:srgbClr val="222B22"/>
+                </a:solidFill>
+                <a:latin typeface="Calibri"/>
+              </a:rPr>
+              <a:t>Stand again — same circle, same posture as the open</a:t>
+            </a:r>
+          </a:p>
+          <a:p>
+            <a:pPr marL="685800" indent="-274320">
+              <a:spcAft>
+                <a:spcPts val="700"/>
+              </a:spcAft>
+            </a:pPr>
+            <a:r>
+              <a:rPr sz="2000" b="1" i="0">
+                <a:solidFill>
+                  <a:srgbClr val="97BC62"/>
+                </a:solidFill>
+                <a:latin typeface="Calibri"/>
+              </a:rPr>
+              <a:t>2   </a:t>
+            </a:r>
+            <a:r>
+              <a:rPr sz="2000" b="0" i="0">
+                <a:solidFill>
+                  <a:srgbClr val="222B22"/>
+                </a:solidFill>
+                <a:latin typeface="Calibri"/>
+              </a:rPr>
+              <a:t>One-word landing — compare it to your opening word</a:t>
+            </a:r>
+          </a:p>
+          <a:p>
+            <a:pPr marL="685800" indent="-274320">
+              <a:spcAft>
+                <a:spcPts val="700"/>
+              </a:spcAft>
+            </a:pPr>
+            <a:r>
+              <a:rPr sz="2000" b="1" i="0">
+                <a:solidFill>
+                  <a:srgbClr val="97BC62"/>
+                </a:solidFill>
+                <a:latin typeface="Calibri"/>
+              </a:rPr>
+              <a:t>3   </a:t>
+            </a:r>
+            <a:r>
+              <a:rPr sz="2000" b="0" i="0">
+                <a:solidFill>
+                  <a:srgbClr val="222B22"/>
+                </a:solidFill>
+                <a:latin typeface="Calibri"/>
+              </a:rPr>
+              <a:t>The one thing you are taking from tonight</a:t>
+            </a:r>
+          </a:p>
+          <a:p>
+            <a:pPr marL="685800" indent="-274320">
+              <a:spcAft>
+                <a:spcPts val="700"/>
+              </a:spcAft>
+            </a:pPr>
+            <a:r>
+              <a:rPr sz="2000" b="1" i="0">
+                <a:solidFill>
+                  <a:srgbClr val="97BC62"/>
+                </a:solidFill>
+                <a:latin typeface="Calibri"/>
+              </a:rPr>
+              <a:t>4   </a:t>
+            </a:r>
+            <a:r>
+              <a:rPr sz="2000" b="0" i="0">
+                <a:solidFill>
+                  <a:srgbClr val="222B22"/>
+                </a:solidFill>
+                <a:latin typeface="Calibri"/>
+              </a:rPr>
+              <a:t>The one practice — committed aloud, or modified to one you will actually keep</a:t>
+            </a:r>
+          </a:p>
+          <a:p>
+            <a:pPr marL="685800" indent="-274320">
+              <a:spcAft>
+                <a:spcPts val="700"/>
+              </a:spcAft>
+            </a:pPr>
+            <a:r>
+              <a:rPr sz="2000" b="1" i="0">
+                <a:solidFill>
+                  <a:srgbClr val="97BC62"/>
+                </a:solidFill>
+                <a:latin typeface="Calibri"/>
+              </a:rPr>
+              <a:t>5   </a:t>
+            </a:r>
+            <a:r>
+              <a:rPr sz="2000" b="0" i="0">
+                <a:solidFill>
+                  <a:srgbClr val="222B22"/>
+                </a:solidFill>
+                <a:latin typeface="Calibri"/>
+              </a:rPr>
+              <a:t>Blessings — specific, witnessed, short</a:t>
+            </a:r>
+          </a:p>
+          <a:p>
+            <a:pPr marL="685800" indent="-274320">
+              <a:spcAft>
+                <a:spcPts val="700"/>
+              </a:spcAft>
+            </a:pPr>
+            <a:r>
+              <a:rPr sz="2000" b="1" i="0">
+                <a:solidFill>
+                  <a:srgbClr val="97BC62"/>
+                </a:solidFill>
+                <a:latin typeface="Calibri"/>
+              </a:rPr>
+              <a:t>6   </a:t>
+            </a:r>
+            <a:r>
+              <a:rPr sz="2000" b="0" i="0">
+                <a:solidFill>
+                  <a:srgbClr val="222B22"/>
+                </a:solidFill>
+                <a:latin typeface="Calibri"/>
+              </a:rPr>
+              <a:t>Closing prayer — and the Aaronic blessing, spoken over each other, face to face</a:t>
+            </a:r>
+          </a:p>
+        </p:txBody>
+      </p:sp>
+      <p:sp>
+        <p:nvSpPr>
+          <p:cNvPr id="6" name="TextBox 6"/>
+          <p:cNvSpPr txBox="1"/>
+          <p:nvPr/>
+        </p:nvSpPr>
+        <p:spPr>
+          <a:xfrm>
+            <a:off x="6766560" y="1737360"/>
+            <a:ext cx="4663440" cy="2926080"/>
+          </a:xfrm>
+          <a:prstGeom prst="rect">
+            <a:avLst/>
+          </a:prstGeom>
+          <a:solidFill>
+            <a:srgbClr val="F1F6EC"/>
+          </a:solidFill>
+        </p:spPr>
+        <p:txBody>
+          <a:bodyPr wrap="square" lIns="91440" tIns="91440" rIns="91440" bIns="91440" anchor="ctr"/>
+          <a:lstStyle/>
+          <a:p>
+            <a:pPr>
+              <a:spcAft>
+                <a:spcPts val="900"/>
+              </a:spcAft>
+            </a:pPr>
+            <a:r>
+              <a:rPr sz="1200" b="1" i="0">
+                <a:solidFill>
+                  <a:srgbClr val="97BC62"/>
+                </a:solidFill>
+                <a:latin typeface="Calibri"/>
+              </a:rPr>
+              <a:t>THE AARONIC BLESSING — NUMBERS 6:24–26</a:t>
+            </a:r>
+          </a:p>
+          <a:p>
+            <a:pPr>
+              <a:spcAft>
+                <a:spcPts val="600"/>
+              </a:spcAft>
+            </a:pPr>
+            <a:r>
+              <a:rPr sz="2400" b="0" i="1">
+                <a:solidFill>
+                  <a:srgbClr val="222B22"/>
+                </a:solidFill>
+                <a:latin typeface="Cambria"/>
+              </a:rPr>
+              <a:t>“The Lord bless you and keep you;</a:t>
+            </a:r>
+          </a:p>
+          <a:p>
+            <a:pPr>
+              <a:spcAft>
+                <a:spcPts val="600"/>
+              </a:spcAft>
+            </a:pPr>
+            <a:r>
+              <a:rPr sz="2400" b="0" i="1">
+                <a:solidFill>
+                  <a:srgbClr val="222B22"/>
+                </a:solidFill>
+                <a:latin typeface="Cambria"/>
+              </a:rPr>
+              <a:t>the Lord make his face to shine upon you, and be gracious to you;</a:t>
+            </a:r>
+          </a:p>
+          <a:p>
+            <a:pPr>
+              <a:spcAft>
+                <a:spcPts val="600"/>
+              </a:spcAft>
+            </a:pPr>
+            <a:r>
+              <a:rPr sz="2400" b="0" i="1">
+                <a:solidFill>
+                  <a:srgbClr val="222B22"/>
+                </a:solidFill>
+                <a:latin typeface="Cambria"/>
+              </a:rPr>
+              <a:t>the Lord lift up his countenance upon you, and give you peace.”</a:t>
+            </a:r>
+          </a:p>
+        </p:txBody>
+      </p:sp>
+      <p:sp>
+        <p:nvSpPr>
+          <p:cNvPr id="90" name="SlideNum"/>
+          <p:cNvSpPr txBox="1"/>
+          <p:nvPr/>
+        </p:nvSpPr>
+        <p:spPr>
+          <a:xfrm>
+            <a:off x="11384280" y="6446520"/>
+            <a:ext cx="640080" cy="292608"/>
+          </a:xfrm>
+          <a:prstGeom prst="rect">
+            <a:avLst/>
+          </a:prstGeom>
+          <a:noFill/>
+        </p:spPr>
+        <p:txBody>
+          <a:bodyPr wrap="none" lIns="0" tIns="0" rIns="45720" bIns="0" anchor="ctr"/>
+          <a:lstStyle/>
+          <a:p>
+            <a:pPr algn="r"/>
+            <a:r>
+              <a:t>113</a:t>
+            </a:r>
+            <a:endParaRPr sz="1000" b="1">
+              <a:solidFill>
+                <a:srgbClr val="7A8A6E"/>
+              </a:solidFill>
+              <a:latin typeface="Calibri"/>
+            </a:endParaRPr>
+          </a:p>
+        </p:txBody>
+      </p:sp>
+    </p:spTree>
+  </p:cSld>
+  <p:clrMapOvr>
+    <a:masterClrMapping/>
+  </p:clrMapOvr>
+</p:sld>
+</file>
+
+<file path=ppt/slides/slide15.xml><?xml version="1.0" encoding="utf-8"?>
+<p:sld xmlns:a="http://schemas.openxmlformats.org/drawingml/2006/main" xmlns:p="http://schemas.openxmlformats.org/presentationml/2006/main" xmlns:r="http://schemas.openxmlformats.org/officeDocument/2006/relationships">
+  <p:cSld>
+    <p:spTree>
+      <p:nvGrpSpPr>
+        <p:cNvPr id="1" name=""/>
+        <p:cNvGrpSpPr/>
+        <p:nvPr/>
+      </p:nvGrpSpPr>
+      <p:grpSpPr/>
+      <p:sp>
+        <p:nvSpPr>
+          <p:cNvPr id="2" name="Rectangle 1"/>
+          <p:cNvSpPr/>
+          <p:nvPr/>
+        </p:nvSpPr>
+        <p:spPr>
+          <a:xfrm>
+            <a:off x="0" y="0"/>
+            <a:ext cx="12192000" cy="6858000"/>
+          </a:xfrm>
+          <a:prstGeom prst="rect">
+            <a:avLst/>
+          </a:prstGeom>
+          <a:solidFill>
+            <a:srgbClr val="FFFFFF"/>
+          </a:solidFill>
+          <a:ln>
+            <a:noFill/>
+          </a:ln>
+          <a:effectLst/>
+        </p:spPr>
+        <p:style>
+          <a:lnRef idx="1">
+            <a:schemeClr val="accent1"/>
+          </a:lnRef>
+          <a:fillRef idx="3">
+            <a:schemeClr val="accent1"/>
+          </a:fillRef>
+          <a:effectRef idx="2">
+            <a:schemeClr val="accent1"/>
+          </a:effectRef>
+          <a:fontRef idx="minor">
+            <a:schemeClr val="lt1"/>
+          </a:fontRef>
+        </p:style>
+        <p:txBody>
+          <a:bodyPr rtlCol="0" anchor="ctr"/>
+          <a:lstStyle/>
+          <a:p>
+            <a:pPr algn="ctr"/>
+          </a:p>
+        </p:txBody>
+      </p:sp>
+      <p:sp>
+        <p:nvSpPr>
+          <p:cNvPr id="3" name="TextBox 2"/>
+          <p:cNvSpPr txBox="1"/>
+          <p:nvPr/>
+        </p:nvSpPr>
+        <p:spPr>
+          <a:xfrm>
+            <a:off x="822960" y="502920"/>
+            <a:ext cx="10515600" cy="822960"/>
+          </a:xfrm>
+          <a:prstGeom prst="rect">
+            <a:avLst/>
+          </a:prstGeom>
+          <a:noFill/>
+        </p:spPr>
+        <p:txBody>
+          <a:bodyPr wrap="square">
+            <a:spAutoFit/>
+          </a:bodyPr>
+          <a:lstStyle/>
+          <a:p>
+            <a:r>
+              <a:rPr sz="2800" b="1">
+                <a:solidFill>
+                  <a:srgbClr val="2C5F2D"/>
+                </a:solidFill>
+                <a:latin typeface="Cambria"/>
+              </a:rPr>
+              <a:t>Where We Are — the Four Connects</a:t>
+            </a:r>
+          </a:p>
+        </p:txBody>
+      </p:sp>
+      <p:pic>
+        <p:nvPicPr>
+          <p:cNvPr id="4" name="Picture 3" descr="four-connects.png"/>
+          <p:cNvPicPr>
+            <a:picLocks noChangeAspect="1"/>
+          </p:cNvPicPr>
+          <p:nvPr/>
+        </p:nvPicPr>
+        <p:blipFill>
+          <a:blip r:embed="rId2"/>
+          <a:stretch>
+            <a:fillRect/>
+          </a:stretch>
+        </p:blipFill>
+        <p:spPr>
+          <a:xfrm>
+            <a:off x="932688" y="1645920"/>
+            <a:ext cx="10332720" cy="3708663"/>
+          </a:xfrm>
+          <a:prstGeom prst="rect">
+            <a:avLst/>
+          </a:prstGeom>
+        </p:spPr>
+      </p:pic>
+      <p:sp>
+        <p:nvSpPr>
+          <p:cNvPr id="5" name="TextBox 4"/>
+          <p:cNvSpPr txBox="1"/>
+          <p:nvPr/>
+        </p:nvSpPr>
+        <p:spPr>
+          <a:xfrm>
+            <a:off x="822960" y="5623560"/>
+            <a:ext cx="10515600" cy="914400"/>
+          </a:xfrm>
+          <a:prstGeom prst="rect">
+            <a:avLst/>
+          </a:prstGeom>
+          <a:noFill/>
+        </p:spPr>
+        <p:txBody>
+          <a:bodyPr wrap="square">
+            <a:spAutoFit/>
+          </a:bodyPr>
+          <a:lstStyle/>
+          <a:p>
+            <a:r>
+              <a:rPr sz="1800" b="0">
+                <a:solidFill>
+                  <a:srgbClr val="222B22"/>
+                </a:solidFill>
+                <a:latin typeface="Calibri"/>
+              </a:rPr>
+              <a:t>Session 8 stands in the third box — </a:t>
+            </a:r>
+            <a:r>
+              <a:rPr sz="1800" b="1">
+                <a:solidFill>
+                  <a:srgbClr val="2C5F2D"/>
+                </a:solidFill>
+                <a:latin typeface="Calibri"/>
+              </a:rPr>
+              <a:t>Connect with God</a:t>
+            </a:r>
+            <a:r>
+              <a:rPr sz="1800" b="0">
+                <a:solidFill>
+                  <a:srgbClr val="222B22"/>
+                </a:solidFill>
+                <a:latin typeface="Calibri"/>
+              </a:rPr>
+              <a:t> — walked again, teen-led. Each connection makes the next one real (Matt. 22:37–40).</a:t>
+            </a:r>
+          </a:p>
+        </p:txBody>
+      </p:sp>
+      <p:sp>
+        <p:nvSpPr>
+          <p:cNvPr id="90" name="SlideNum"/>
+          <p:cNvSpPr txBox="1"/>
+          <p:nvPr/>
+        </p:nvSpPr>
+        <p:spPr>
+          <a:xfrm>
+            <a:off x="11384280" y="6446520"/>
+            <a:ext cx="640080" cy="292608"/>
+          </a:xfrm>
+          <a:prstGeom prst="rect">
+            <a:avLst/>
+          </a:prstGeom>
+          <a:noFill/>
+        </p:spPr>
+        <p:txBody>
+          <a:bodyPr wrap="none" lIns="0" tIns="0" rIns="45720" bIns="0" anchor="ctr"/>
+          <a:lstStyle/>
+          <a:p>
+            <a:pPr algn="r"/>
+            <a:r>
+              <a:t>101a</a:t>
+            </a:r>
+            <a:endParaRPr sz="1000" b="1">
+              <a:solidFill>
+                <a:srgbClr val="7A8A6E"/>
+              </a:solidFill>
+              <a:latin typeface="Calibri"/>
+            </a:endParaRPr>
+          </a:p>
+        </p:txBody>
+      </p:sp>
+    </p:spTree>
+  </p:cSld>
+  <p:clrMapOvr>
+    <a:masterClrMapping/>
+  </p:clrMapOvr>
+</p:sld>
+</file>
+
+<file path=ppt/slides/slide16.xml><?xml version="1.0" encoding="utf-8"?>
+<p:sld xmlns:a="http://schemas.openxmlformats.org/drawingml/2006/main" xmlns:p="http://schemas.openxmlformats.org/presentationml/2006/main" xmlns:r="http://schemas.openxmlformats.org/officeDocument/2006/relationships">
+  <p:cSld>
+    <p:spTree>
+      <p:nvGrpSpPr>
+        <p:cNvPr id="1" name=""/>
+        <p:cNvGrpSpPr/>
+        <p:nvPr/>
+      </p:nvGrpSpPr>
+      <p:grpSpPr/>
+      <p:sp>
+        <p:nvSpPr>
+          <p:cNvPr id="2" name="Rectangle 1"/>
+          <p:cNvSpPr/>
+          <p:nvPr/>
+        </p:nvSpPr>
+        <p:spPr>
+          <a:xfrm>
+            <a:off x="0" y="0"/>
+            <a:ext cx="12192000" cy="6858000"/>
+          </a:xfrm>
+          <a:prstGeom prst="rect">
+            <a:avLst/>
+          </a:prstGeom>
+          <a:solidFill>
+            <a:srgbClr val="FFFFFF"/>
+          </a:solidFill>
+          <a:ln>
+            <a:noFill/>
+          </a:ln>
+          <a:effectLst/>
+        </p:spPr>
+        <p:style>
+          <a:lnRef idx="1">
+            <a:schemeClr val="accent1"/>
+          </a:lnRef>
+          <a:fillRef idx="3">
+            <a:schemeClr val="accent1"/>
+          </a:fillRef>
+          <a:effectRef idx="2">
+            <a:schemeClr val="accent1"/>
+          </a:effectRef>
+          <a:fontRef idx="minor">
+            <a:schemeClr val="lt1"/>
+          </a:fontRef>
+        </p:style>
+        <p:txBody>
+          <a:bodyPr rtlCol="0" anchor="ctr"/>
+          <a:lstStyle/>
+          <a:p>
+            <a:pPr algn="ctr"/>
+          </a:p>
+        </p:txBody>
+      </p:sp>
+      <p:sp>
+        <p:nvSpPr>
+          <p:cNvPr id="3" name="TextBox 2"/>
+          <p:cNvSpPr txBox="1"/>
+          <p:nvPr/>
+        </p:nvSpPr>
+        <p:spPr>
+          <a:xfrm>
+            <a:off x="822960" y="502920"/>
+            <a:ext cx="10515600" cy="822960"/>
+          </a:xfrm>
+          <a:prstGeom prst="rect">
+            <a:avLst/>
+          </a:prstGeom>
+          <a:noFill/>
+        </p:spPr>
+        <p:txBody>
+          <a:bodyPr wrap="square">
+            <a:spAutoFit/>
+          </a:bodyPr>
+          <a:lstStyle/>
+          <a:p>
+            <a:r>
+              <a:rPr sz="2800" b="1">
+                <a:solidFill>
+                  <a:srgbClr val="2C5F2D"/>
+                </a:solidFill>
+                <a:latin typeface="Cambria"/>
+              </a:rPr>
+              <a:t>The Take-Home Sheet — the Daily Rhythm</a:t>
+            </a:r>
+          </a:p>
+        </p:txBody>
+      </p:sp>
+      <p:pic>
+        <p:nvPicPr>
+          <p:cNvPr id="4" name="Picture 3" descr="s8_part1.png"/>
+          <p:cNvPicPr>
+            <a:picLocks noChangeAspect="1"/>
+          </p:cNvPicPr>
+          <p:nvPr/>
+        </p:nvPicPr>
+        <p:blipFill>
+          <a:blip r:embed="rId2"/>
+          <a:stretch>
+            <a:fillRect/>
+          </a:stretch>
+        </p:blipFill>
+        <p:spPr>
+          <a:xfrm>
+            <a:off x="1798167" y="1463040"/>
+            <a:ext cx="8595360" cy="4039819"/>
+          </a:xfrm>
+          <a:prstGeom prst="rect">
+            <a:avLst/>
+          </a:prstGeom>
+          <a:ln w="12700">
+            <a:solidFill>
+              <a:srgbClr val="C8C8C8"/>
+            </a:solidFill>
+          </a:ln>
+        </p:spPr>
+      </p:pic>
+      <p:sp>
+        <p:nvSpPr>
+          <p:cNvPr id="5" name="TextBox 4"/>
+          <p:cNvSpPr txBox="1"/>
+          <p:nvPr/>
+        </p:nvSpPr>
+        <p:spPr>
+          <a:xfrm>
+            <a:off x="822960" y="6355080"/>
+            <a:ext cx="10515600" cy="411480"/>
+          </a:xfrm>
+          <a:prstGeom prst="rect">
+            <a:avLst/>
+          </a:prstGeom>
+          <a:noFill/>
+        </p:spPr>
+        <p:txBody>
+          <a:bodyPr wrap="square">
+            <a:spAutoFit/>
+          </a:bodyPr>
+          <a:lstStyle/>
+          <a:p>
+            <a:r>
+              <a:rPr sz="1400" i="1">
+                <a:solidFill>
+                  <a:srgbClr val="595959"/>
+                </a:solidFill>
+                <a:latin typeface="Calibri"/>
+              </a:rPr>
+              <a:t>Handed out now — this is the sheet in your hands.</a:t>
+            </a:r>
+          </a:p>
+        </p:txBody>
+      </p:sp>
+      <p:sp>
+        <p:nvSpPr>
+          <p:cNvPr id="90" name="SlideNum"/>
+          <p:cNvSpPr txBox="1"/>
+          <p:nvPr/>
+        </p:nvSpPr>
+        <p:spPr>
+          <a:xfrm>
+            <a:off x="11384280" y="6446520"/>
+            <a:ext cx="640080" cy="292608"/>
+          </a:xfrm>
+          <a:prstGeom prst="rect">
+            <a:avLst/>
+          </a:prstGeom>
+          <a:noFill/>
+        </p:spPr>
+        <p:txBody>
+          <a:bodyPr wrap="none" lIns="0" tIns="0" rIns="45720" bIns="0" anchor="ctr"/>
+          <a:lstStyle/>
+          <a:p>
+            <a:pPr algn="r"/>
+            <a:r>
+              <a:t>111</a:t>
+            </a:r>
+            <a:endParaRPr sz="1000" b="1">
+              <a:solidFill>
+                <a:srgbClr val="7A8A6E"/>
+              </a:solidFill>
+              <a:latin typeface="Calibri"/>
+            </a:endParaRPr>
+          </a:p>
+        </p:txBody>
+      </p:sp>
+    </p:spTree>
+  </p:cSld>
+  <p:clrMapOvr>
+    <a:masterClrMapping/>
+  </p:clrMapOvr>
+</p:sld>
+</file>
+
+<file path=ppt/slides/slide17.xml><?xml version="1.0" encoding="utf-8"?>
+<p:sld xmlns:a="http://schemas.openxmlformats.org/drawingml/2006/main" xmlns:p="http://schemas.openxmlformats.org/presentationml/2006/main" xmlns:r="http://schemas.openxmlformats.org/officeDocument/2006/relationships">
+  <p:cSld>
+    <p:spTree>
+      <p:nvGrpSpPr>
+        <p:cNvPr id="1" name=""/>
+        <p:cNvGrpSpPr/>
+        <p:nvPr/>
+      </p:nvGrpSpPr>
+      <p:grpSpPr/>
+      <p:sp>
+        <p:nvSpPr>
+          <p:cNvPr id="2" name="Rectangle 1"/>
+          <p:cNvSpPr/>
+          <p:nvPr/>
+        </p:nvSpPr>
+        <p:spPr>
+          <a:xfrm>
+            <a:off x="0" y="0"/>
+            <a:ext cx="12192000" cy="6858000"/>
+          </a:xfrm>
+          <a:prstGeom prst="rect">
+            <a:avLst/>
+          </a:prstGeom>
+          <a:solidFill>
+            <a:srgbClr val="FFFFFF"/>
+          </a:solidFill>
+          <a:ln>
+            <a:noFill/>
+          </a:ln>
+          <a:effectLst/>
+        </p:spPr>
+        <p:style>
+          <a:lnRef idx="1">
+            <a:schemeClr val="accent1"/>
+          </a:lnRef>
+          <a:fillRef idx="3">
+            <a:schemeClr val="accent1"/>
+          </a:fillRef>
+          <a:effectRef idx="2">
+            <a:schemeClr val="accent1"/>
+          </a:effectRef>
+          <a:fontRef idx="minor">
+            <a:schemeClr val="lt1"/>
+          </a:fontRef>
+        </p:style>
+        <p:txBody>
+          <a:bodyPr rtlCol="0" anchor="ctr"/>
+          <a:lstStyle/>
+          <a:p>
+            <a:pPr algn="ctr"/>
+          </a:p>
+        </p:txBody>
+      </p:sp>
+      <p:sp>
+        <p:nvSpPr>
+          <p:cNvPr id="3" name="TextBox 2"/>
+          <p:cNvSpPr txBox="1"/>
+          <p:nvPr/>
+        </p:nvSpPr>
+        <p:spPr>
+          <a:xfrm>
+            <a:off x="822960" y="502920"/>
+            <a:ext cx="10515600" cy="822960"/>
+          </a:xfrm>
+          <a:prstGeom prst="rect">
+            <a:avLst/>
+          </a:prstGeom>
+          <a:noFill/>
+        </p:spPr>
+        <p:txBody>
+          <a:bodyPr wrap="square">
+            <a:spAutoFit/>
+          </a:bodyPr>
+          <a:lstStyle/>
+          <a:p>
+            <a:r>
+              <a:rPr sz="2800" b="1">
+                <a:solidFill>
+                  <a:srgbClr val="2C5F2D"/>
+                </a:solidFill>
+                <a:latin typeface="Cambria"/>
+              </a:rPr>
+              <a:t>The Take-Home Sheet — the Four Parts</a:t>
+            </a:r>
+          </a:p>
+        </p:txBody>
+      </p:sp>
+      <p:pic>
+        <p:nvPicPr>
+          <p:cNvPr id="4" name="Picture 3" descr="s8_part2.png"/>
+          <p:cNvPicPr>
+            <a:picLocks noChangeAspect="1"/>
+          </p:cNvPicPr>
+          <p:nvPr/>
+        </p:nvPicPr>
+        <p:blipFill>
+          <a:blip r:embed="rId2"/>
+          <a:stretch>
+            <a:fillRect/>
+          </a:stretch>
+        </p:blipFill>
+        <p:spPr>
+          <a:xfrm>
+            <a:off x="1858814" y="1463040"/>
+            <a:ext cx="8474066" cy="4709160"/>
+          </a:xfrm>
+          <a:prstGeom prst="rect">
+            <a:avLst/>
+          </a:prstGeom>
+          <a:ln w="12700">
+            <a:solidFill>
+              <a:srgbClr val="C8C8C8"/>
+            </a:solidFill>
+          </a:ln>
+        </p:spPr>
+      </p:pic>
+      <p:sp>
+        <p:nvSpPr>
+          <p:cNvPr id="5" name="TextBox 4"/>
+          <p:cNvSpPr txBox="1"/>
+          <p:nvPr/>
+        </p:nvSpPr>
+        <p:spPr>
+          <a:xfrm>
+            <a:off x="822960" y="6355080"/>
+            <a:ext cx="10515600" cy="411480"/>
+          </a:xfrm>
+          <a:prstGeom prst="rect">
+            <a:avLst/>
+          </a:prstGeom>
+          <a:noFill/>
+        </p:spPr>
+        <p:txBody>
+          <a:bodyPr wrap="square">
+            <a:spAutoFit/>
+          </a:bodyPr>
+          <a:lstStyle/>
+          <a:p>
+            <a:r>
+              <a:rPr sz="1400" i="1">
+                <a:solidFill>
+                  <a:srgbClr val="595959"/>
+                </a:solidFill>
+                <a:latin typeface="Calibri"/>
+              </a:rPr>
+              <a:t>One practice at a time — and a partner expecting you at the end of week one.</a:t>
+            </a:r>
+          </a:p>
+        </p:txBody>
+      </p:sp>
+      <p:sp>
+        <p:nvSpPr>
+          <p:cNvPr id="90" name="SlideNum"/>
+          <p:cNvSpPr txBox="1"/>
+          <p:nvPr/>
+        </p:nvSpPr>
+        <p:spPr>
+          <a:xfrm>
+            <a:off x="11384280" y="6446520"/>
+            <a:ext cx="640080" cy="292608"/>
+          </a:xfrm>
+          <a:prstGeom prst="rect">
+            <a:avLst/>
+          </a:prstGeom>
+          <a:noFill/>
+        </p:spPr>
+        <p:txBody>
+          <a:bodyPr wrap="none" lIns="0" tIns="0" rIns="45720" bIns="0" anchor="ctr"/>
+          <a:lstStyle/>
+          <a:p>
+            <a:pPr algn="r"/>
+            <a:r>
+              <a:t>111a</a:t>
+            </a:r>
+            <a:endParaRPr sz="1000" b="1">
+              <a:solidFill>
+                <a:srgbClr val="7A8A6E"/>
+              </a:solidFill>
+              <a:latin typeface="Calibri"/>
+            </a:endParaRPr>
+          </a:p>
+        </p:txBody>
+      </p:sp>
+    </p:spTree>
+  </p:cSld>
+  <p:clrMapOvr>
+    <a:masterClrMapping/>
+  </p:clrMapOvr>
+</p:sld>
+</file>
+
+<file path=ppt/slides/slide2.xml><?xml version="1.0" encoding="utf-8"?>
 <p:sld xmlns:a="http://schemas.openxmlformats.org/drawingml/2006/main" xmlns:r="http://schemas.openxmlformats.org/officeDocument/2006/relationships" xmlns:p="http://schemas.openxmlformats.org/presentationml/2006/main">
   <p:cSld>
     <p:spTree>
@@ -4930,7 +6975,7 @@
 </p:sld>
 </file>
 
-<file path=ppt/slides/slide102.xml><?xml version="1.0" encoding="utf-8"?>
+<file path=ppt/slides/slide3.xml><?xml version="1.0" encoding="utf-8"?>
 <p:sld xmlns:a="http://schemas.openxmlformats.org/drawingml/2006/main" xmlns:r="http://schemas.openxmlformats.org/officeDocument/2006/relationships" xmlns:p="http://schemas.openxmlformats.org/presentationml/2006/main">
   <p:cSld>
     <p:spTree>
@@ -5249,7 +7294,7 @@
                 </a:solidFill>
                 <a:latin typeface="Calibri"/>
               </a:rPr>
-              <a:t>Merge and between-session</a:t>
+              <a:t>Merge and homework</a:t>
             </a:r>
           </a:p>
           <a:p>
@@ -5381,7 +7426,7 @@
 </p:sld>
 </file>
 
-<file path=ppt/slides/slide103.xml><?xml version="1.0" encoding="utf-8"?>
+<file path=ppt/slides/slide4.xml><?xml version="1.0" encoding="utf-8"?>
 <p:sld xmlns:a="http://schemas.openxmlformats.org/drawingml/2006/main" xmlns:r="http://schemas.openxmlformats.org/officeDocument/2006/relationships" xmlns:p="http://schemas.openxmlformats.org/presentationml/2006/main">
   <p:cSld>
     <p:spTree>
@@ -5728,7 +7773,7 @@
 </p:sld>
 </file>
 
-<file path=ppt/slides/slide104.xml><?xml version="1.0" encoding="utf-8"?>
+<file path=ppt/slides/slide5.xml><?xml version="1.0" encoding="utf-8"?>
 <p:sld xmlns:a="http://schemas.openxmlformats.org/drawingml/2006/main" xmlns:r="http://schemas.openxmlformats.org/officeDocument/2006/relationships" xmlns:p="http://schemas.openxmlformats.org/presentationml/2006/main">
   <p:cSld>
     <p:spTree>
@@ -6036,7 +8081,7 @@
 </p:sld>
 </file>
 
-<file path=ppt/slides/slide105.xml><?xml version="1.0" encoding="utf-8"?>
+<file path=ppt/slides/slide6.xml><?xml version="1.0" encoding="utf-8"?>
 <p:sld xmlns:a="http://schemas.openxmlformats.org/drawingml/2006/main" xmlns:r="http://schemas.openxmlformats.org/officeDocument/2006/relationships" xmlns:p="http://schemas.openxmlformats.org/presentationml/2006/main">
   <p:cSld>
     <p:spTree>
@@ -6363,7 +8408,7 @@
 </p:sld>
 </file>
 
-<file path=ppt/slides/slide106.xml><?xml version="1.0" encoding="utf-8"?>
+<file path=ppt/slides/slide7.xml><?xml version="1.0" encoding="utf-8"?>
 <p:sld xmlns:a="http://schemas.openxmlformats.org/drawingml/2006/main" xmlns:r="http://schemas.openxmlformats.org/officeDocument/2006/relationships" xmlns:p="http://schemas.openxmlformats.org/presentationml/2006/main">
   <p:cSld>
     <p:spTree>
@@ -6696,7 +8741,7 @@
 </p:sld>
 </file>
 
-<file path=ppt/slides/slide107.xml><?xml version="1.0" encoding="utf-8"?>
+<file path=ppt/slides/slide8.xml><?xml version="1.0" encoding="utf-8"?>
 <p:sld xmlns:a="http://schemas.openxmlformats.org/drawingml/2006/main" xmlns:r="http://schemas.openxmlformats.org/officeDocument/2006/relationships" xmlns:p="http://schemas.openxmlformats.org/presentationml/2006/main">
   <p:cSld>
     <p:spTree>
@@ -6968,7 +9013,7 @@
 </p:sld>
 </file>
 
-<file path=ppt/slides/slide108.xml><?xml version="1.0" encoding="utf-8"?>
+<file path=ppt/slides/slide9.xml><?xml version="1.0" encoding="utf-8"?>
 <p:sld xmlns:a="http://schemas.openxmlformats.org/drawingml/2006/main" xmlns:r="http://schemas.openxmlformats.org/officeDocument/2006/relationships" xmlns:p="http://schemas.openxmlformats.org/presentationml/2006/main">
   <p:cSld>
     <p:spTree>
@@ -7247,1498 +9292,6 @@
             <a:pPr algn="r"/>
             <a:r>
               <a:t>108</a:t>
-            </a:r>
-            <a:endParaRPr sz="1000" b="1">
-              <a:solidFill>
-                <a:srgbClr val="7A8A6E"/>
-              </a:solidFill>
-              <a:latin typeface="Calibri"/>
-            </a:endParaRPr>
-          </a:p>
-        </p:txBody>
-      </p:sp>
-    </p:spTree>
-  </p:cSld>
-  <p:clrMapOvr>
-    <a:masterClrMapping/>
-  </p:clrMapOvr>
-</p:sld>
-</file>
-
-<file path=ppt/slides/slide109.xml><?xml version="1.0" encoding="utf-8"?>
-<p:sld xmlns:a="http://schemas.openxmlformats.org/drawingml/2006/main" xmlns:r="http://schemas.openxmlformats.org/officeDocument/2006/relationships" xmlns:p="http://schemas.openxmlformats.org/presentationml/2006/main">
-  <p:cSld>
-    <p:spTree>
-      <p:nvGrpSpPr>
-        <p:cNvPr id="1" name=""/>
-        <p:cNvGrpSpPr/>
-        <p:nvPr/>
-      </p:nvGrpSpPr>
-      <p:grpSpPr>
-        <a:xfrm>
-          <a:off x="0" y="0"/>
-          <a:ext cx="0" cy="0"/>
-          <a:chOff x="0" y="0"/>
-          <a:chExt cx="0" cy="0"/>
-        </a:xfrm>
-      </p:grpSpPr>
-      <p:sp>
-        <p:nvSpPr>
-          <p:cNvPr id="2" name="Rectangle 1"/>
-          <p:cNvSpPr/>
-          <p:nvPr/>
-        </p:nvSpPr>
-        <p:spPr>
-          <a:xfrm>
-            <a:off x="0" y="0"/>
-            <a:ext cx="12191695" cy="6858000"/>
-          </a:xfrm>
-          <a:prstGeom prst="rect">
-            <a:avLst/>
-          </a:prstGeom>
-          <a:solidFill>
-            <a:srgbClr val="FFFFFF"/>
-          </a:solidFill>
-          <a:ln>
-            <a:noFill/>
-          </a:ln>
-        </p:spPr>
-        <p:txBody>
-          <a:bodyPr/>
-          <a:lstStyle/>
-          <a:p>
-            <a:endParaRPr/>
-          </a:p>
-        </p:txBody>
-      </p:sp>
-      <p:sp>
-        <p:nvSpPr>
-          <p:cNvPr id="3" name="TextBox 2"/>
-          <p:cNvSpPr txBox="1"/>
-          <p:nvPr/>
-        </p:nvSpPr>
-        <p:spPr>
-          <a:xfrm>
-            <a:off x="822960" y="502920"/>
-            <a:ext cx="10515600" cy="822960"/>
-          </a:xfrm>
-          <a:prstGeom prst="rect">
-            <a:avLst/>
-          </a:prstGeom>
-          <a:noFill/>
-        </p:spPr>
-        <p:txBody>
-          <a:bodyPr wrap="square">
-            <a:spAutoFit/>
-          </a:bodyPr>
-          <a:lstStyle/>
-          <a:p>
-            <a:pPr algn="l">
-              <a:spcAft>
-                <a:spcPts val="600"/>
-              </a:spcAft>
-            </a:pPr>
-            <a:r>
-              <a:rPr sz="2800" b="1" i="0">
-                <a:solidFill>
-                  <a:srgbClr val="2C5F2D"/>
-                </a:solidFill>
-                <a:latin typeface="Cambria"/>
-              </a:rPr>
-              <a:t>Tell Step — Sharing in the pair</a:t>
-            </a:r>
-          </a:p>
-        </p:txBody>
-      </p:sp>
-      <p:sp>
-        <p:nvSpPr>
-          <p:cNvPr id="4" name="TextBox 4"/>
-          <p:cNvSpPr txBox="1"/>
-          <p:nvPr/>
-        </p:nvSpPr>
-        <p:spPr>
-          <a:xfrm>
-            <a:off x="822960" y="1554480"/>
-            <a:ext cx="10515600" cy="4892040"/>
-          </a:xfrm>
-          <a:prstGeom prst="rect">
-            <a:avLst/>
-          </a:prstGeom>
-          <a:noFill/>
-        </p:spPr>
-        <p:txBody>
-          <a:bodyPr wrap="square" lIns="91440" tIns="91440" rIns="91440" bIns="91440"/>
-          <a:lstStyle/>
-          <a:p>
-            <a:pPr marL="274320" indent="-274320">
-              <a:spcAft>
-                <a:spcPts val="750"/>
-              </a:spcAft>
-            </a:pPr>
-            <a:r>
-              <a:rPr sz="2400" b="1" i="0">
-                <a:solidFill>
-                  <a:srgbClr val="97BC62"/>
-                </a:solidFill>
-                <a:latin typeface="Calibri"/>
-              </a:rPr>
-              <a:t>•  </a:t>
-            </a:r>
-            <a:r>
-              <a:rPr sz="2400" b="0" i="0">
-                <a:solidFill>
-                  <a:srgbClr val="222B22"/>
-                </a:solidFill>
-                <a:latin typeface="Calibri"/>
-              </a:rPr>
-              <a:t>“The Tell step — second time in the pair, so you know the shape.”</a:t>
-            </a:r>
-          </a:p>
-          <a:p>
-            <a:pPr marL="274320" indent="-274320">
-              <a:spcAft>
-                <a:spcPts val="750"/>
-              </a:spcAft>
-            </a:pPr>
-            <a:r>
-              <a:rPr sz="2400" b="1" i="0">
-                <a:solidFill>
-                  <a:srgbClr val="97BC62"/>
-                </a:solidFill>
-                <a:latin typeface="Calibri"/>
-              </a:rPr>
-              <a:t>•  </a:t>
-            </a:r>
-            <a:r>
-              <a:rPr sz="2400" b="0" i="0">
-                <a:solidFill>
-                  <a:srgbClr val="222B22"/>
-                </a:solidFill>
-                <a:latin typeface="Calibri"/>
-              </a:rPr>
-              <a:t>One specific thing you heard tonight — one sentence — “We listen to receive.”</a:t>
-            </a:r>
-          </a:p>
-          <a:p>
-            <a:pPr marL="274320" indent="-274320">
-              <a:spcAft>
-                <a:spcPts val="750"/>
-              </a:spcAft>
-            </a:pPr>
-            <a:r>
-              <a:rPr sz="2400" b="1" i="0">
-                <a:solidFill>
-                  <a:srgbClr val="97BC62"/>
-                </a:solidFill>
-                <a:latin typeface="Calibri"/>
-              </a:rPr>
-              <a:t>•  </a:t>
-            </a:r>
-            <a:r>
-              <a:rPr sz="2400" b="0" i="0">
-                <a:solidFill>
-                  <a:srgbClr val="222B22"/>
-                </a:solidFill>
-                <a:latin typeface="Calibri"/>
-              </a:rPr>
-              <a:t>A parent opens the round — arranged beforehand, never a cold call on a teen</a:t>
-            </a:r>
-          </a:p>
-          <a:p>
-            <a:pPr marL="274320" indent="-274320">
-              <a:spcAft>
-                <a:spcPts val="750"/>
-              </a:spcAft>
-            </a:pPr>
-            <a:r>
-              <a:rPr sz="2400" b="1" i="0">
-                <a:solidFill>
-                  <a:srgbClr val="97BC62"/>
-                </a:solidFill>
-                <a:latin typeface="Calibri"/>
-              </a:rPr>
-              <a:t>•  </a:t>
-            </a:r>
-            <a:r>
-              <a:rPr sz="2400" b="0" i="0">
-                <a:solidFill>
-                  <a:srgbClr val="222B22"/>
-                </a:solidFill>
-                <a:latin typeface="Calibri"/>
-              </a:rPr>
-              <a:t>Teens choose their own depth; pass-anytime holds</a:t>
-            </a:r>
-          </a:p>
-          <a:p>
-            <a:pPr marL="274320" indent="-274320">
-              <a:spcAft>
-                <a:spcPts val="750"/>
-              </a:spcAft>
-            </a:pPr>
-            <a:r>
-              <a:rPr sz="2400" b="1" i="0">
-                <a:solidFill>
-                  <a:srgbClr val="97BC62"/>
-                </a:solidFill>
-                <a:latin typeface="Calibri"/>
-              </a:rPr>
-              <a:t>•  </a:t>
-            </a:r>
-            <a:r>
-              <a:rPr sz="2400" b="0" i="0">
-                <a:solidFill>
-                  <a:srgbClr val="222B22"/>
-                </a:solidFill>
-                <a:latin typeface="Calibri"/>
-              </a:rPr>
-              <a:t>Receive without preaching — “We hear that.” “Thank you for naming that.”</a:t>
-            </a:r>
-          </a:p>
-          <a:p>
-            <a:pPr marL="274320" indent="-274320">
-              <a:spcAft>
-                <a:spcPts val="750"/>
-              </a:spcAft>
-            </a:pPr>
-            <a:r>
-              <a:rPr sz="2400" b="1" i="0">
-                <a:solidFill>
-                  <a:srgbClr val="97BC62"/>
-                </a:solidFill>
-                <a:latin typeface="Calibri"/>
-              </a:rPr>
-              <a:t>•  </a:t>
-            </a:r>
-            <a:r>
-              <a:rPr sz="2400" b="0" i="0">
-                <a:solidFill>
-                  <a:srgbClr val="222B22"/>
-                </a:solidFill>
-                <a:latin typeface="Calibri"/>
-              </a:rPr>
-              <a:t>“Take what you heard with you. It was given to be walked out.”</a:t>
-            </a:r>
-          </a:p>
-        </p:txBody>
-      </p:sp>
-      <p:sp>
-        <p:nvSpPr>
-          <p:cNvPr id="90" name="SlideNum"/>
-          <p:cNvSpPr txBox="1"/>
-          <p:nvPr/>
-        </p:nvSpPr>
-        <p:spPr>
-          <a:xfrm>
-            <a:off x="11384280" y="6446520"/>
-            <a:ext cx="640080" cy="292608"/>
-          </a:xfrm>
-          <a:prstGeom prst="rect">
-            <a:avLst/>
-          </a:prstGeom>
-          <a:noFill/>
-        </p:spPr>
-        <p:txBody>
-          <a:bodyPr wrap="none" lIns="0" tIns="0" rIns="45720" bIns="0" anchor="ctr"/>
-          <a:lstStyle/>
-          <a:p>
-            <a:pPr algn="r"/>
-            <a:r>
-              <a:t>109</a:t>
-            </a:r>
-            <a:endParaRPr sz="1000" b="1">
-              <a:solidFill>
-                <a:srgbClr val="7A8A6E"/>
-              </a:solidFill>
-              <a:latin typeface="Calibri"/>
-            </a:endParaRPr>
-          </a:p>
-        </p:txBody>
-      </p:sp>
-    </p:spTree>
-  </p:cSld>
-  <p:clrMapOvr>
-    <a:masterClrMapping/>
-  </p:clrMapOvr>
-</p:sld>
-</file>
-
-<file path=ppt/slides/slide110.xml><?xml version="1.0" encoding="utf-8"?>
-<p:sld xmlns:a="http://schemas.openxmlformats.org/drawingml/2006/main" xmlns:r="http://schemas.openxmlformats.org/officeDocument/2006/relationships" xmlns:p="http://schemas.openxmlformats.org/presentationml/2006/main">
-  <p:cSld>
-    <p:spTree>
-      <p:nvGrpSpPr>
-        <p:cNvPr id="1" name=""/>
-        <p:cNvGrpSpPr/>
-        <p:nvPr/>
-      </p:nvGrpSpPr>
-      <p:grpSpPr>
-        <a:xfrm>
-          <a:off x="0" y="0"/>
-          <a:ext cx="0" cy="0"/>
-          <a:chOff x="0" y="0"/>
-          <a:chExt cx="0" cy="0"/>
-        </a:xfrm>
-      </p:grpSpPr>
-      <p:sp>
-        <p:nvSpPr>
-          <p:cNvPr id="2" name="Rectangle 1"/>
-          <p:cNvSpPr/>
-          <p:nvPr/>
-        </p:nvSpPr>
-        <p:spPr>
-          <a:xfrm>
-            <a:off x="0" y="0"/>
-            <a:ext cx="12191695" cy="6858000"/>
-          </a:xfrm>
-          <a:prstGeom prst="rect">
-            <a:avLst/>
-          </a:prstGeom>
-          <a:solidFill>
-            <a:srgbClr val="FFFFFF"/>
-          </a:solidFill>
-          <a:ln>
-            <a:noFill/>
-          </a:ln>
-        </p:spPr>
-        <p:txBody>
-          <a:bodyPr/>
-          <a:lstStyle/>
-          <a:p>
-            <a:endParaRPr/>
-          </a:p>
-        </p:txBody>
-      </p:sp>
-      <p:sp>
-        <p:nvSpPr>
-          <p:cNvPr id="3" name="TextBox 2"/>
-          <p:cNvSpPr txBox="1"/>
-          <p:nvPr/>
-        </p:nvSpPr>
-        <p:spPr>
-          <a:xfrm>
-            <a:off x="822960" y="502920"/>
-            <a:ext cx="10515600" cy="822960"/>
-          </a:xfrm>
-          <a:prstGeom prst="rect">
-            <a:avLst/>
-          </a:prstGeom>
-          <a:noFill/>
-        </p:spPr>
-        <p:txBody>
-          <a:bodyPr wrap="square">
-            <a:spAutoFit/>
-          </a:bodyPr>
-          <a:lstStyle/>
-          <a:p>
-            <a:pPr algn="l">
-              <a:spcAft>
-                <a:spcPts val="600"/>
-              </a:spcAft>
-            </a:pPr>
-            <a:r>
-              <a:rPr sz="2800" b="1" i="0">
-                <a:solidFill>
-                  <a:srgbClr val="2C5F2D"/>
-                </a:solidFill>
-                <a:latin typeface="Cambria"/>
-              </a:rPr>
-              <a:t>Merge and Between-Session</a:t>
-            </a:r>
-          </a:p>
-        </p:txBody>
-      </p:sp>
-      <p:sp>
-        <p:nvSpPr>
-          <p:cNvPr id="4" name="TextBox 4"/>
-          <p:cNvSpPr txBox="1"/>
-          <p:nvPr/>
-        </p:nvSpPr>
-        <p:spPr>
-          <a:xfrm>
-            <a:off x="822960" y="1554480"/>
-            <a:ext cx="6675120" cy="4892040"/>
-          </a:xfrm>
-          <a:prstGeom prst="rect">
-            <a:avLst/>
-          </a:prstGeom>
-          <a:noFill/>
-        </p:spPr>
-        <p:txBody>
-          <a:bodyPr wrap="square" lIns="91440" tIns="91440" rIns="91440" bIns="91440"/>
-          <a:lstStyle/>
-          <a:p>
-            <a:pPr marL="274320" indent="-274320">
-              <a:spcAft>
-                <a:spcPts val="900"/>
-              </a:spcAft>
-            </a:pPr>
-            <a:r>
-              <a:rPr sz="2800" b="1" i="0">
-                <a:solidFill>
-                  <a:srgbClr val="97BC62"/>
-                </a:solidFill>
-                <a:latin typeface="Calibri"/>
-              </a:rPr>
-              <a:t>•  </a:t>
-            </a:r>
-            <a:r>
-              <a:rPr sz="2800" b="0" i="0">
-                <a:solidFill>
-                  <a:srgbClr val="222B22"/>
-                </a:solidFill>
-                <a:latin typeface="Calibri"/>
-              </a:rPr>
-              <a:t>Daily PROAPT continues — one passage, five to fifteen minutes, every day (journal Week 7–8 pages)</a:t>
-            </a:r>
-          </a:p>
-          <a:p>
-            <a:pPr marL="274320" indent="-274320">
-              <a:spcAft>
-                <a:spcPts val="900"/>
-              </a:spcAft>
-            </a:pPr>
-            <a:r>
-              <a:rPr sz="2800" b="1" i="0">
-                <a:solidFill>
-                  <a:srgbClr val="97BC62"/>
-                </a:solidFill>
-                <a:latin typeface="Calibri"/>
-              </a:rPr>
-              <a:t>•  </a:t>
-            </a:r>
-            <a:r>
-              <a:rPr sz="2800" b="0" i="0">
-                <a:solidFill>
-                  <a:srgbClr val="222B22"/>
-                </a:solidFill>
-                <a:latin typeface="Calibri"/>
-              </a:rPr>
-              <a:t>“If last week thinned out, restart tomorrow. No guilt, no doubling up.”</a:t>
-            </a:r>
-          </a:p>
-          <a:p>
-            <a:pPr marL="274320" indent="-274320">
-              <a:spcAft>
-                <a:spcPts val="900"/>
-              </a:spcAft>
-            </a:pPr>
-            <a:r>
-              <a:rPr sz="2800" b="1" i="0">
-                <a:solidFill>
-                  <a:srgbClr val="97BC62"/>
-                </a:solidFill>
-                <a:latin typeface="Calibri"/>
-              </a:rPr>
-              <a:t>•  </a:t>
-            </a:r>
-            <a:r>
-              <a:rPr sz="2800" b="0" i="0">
-                <a:solidFill>
-                  <a:srgbClr val="222B22"/>
-                </a:solidFill>
-                <a:latin typeface="Calibri"/>
-              </a:rPr>
-              <a:t>“Take a moment on the way home to notice what just happened in this room. One of our own led the whole practice tonight. That is the design working.”</a:t>
-            </a:r>
-          </a:p>
-        </p:txBody>
-      </p:sp>
-      <p:sp>
-        <p:nvSpPr>
-          <p:cNvPr id="90" name="SlideNum"/>
-          <p:cNvSpPr txBox="1"/>
-          <p:nvPr/>
-        </p:nvSpPr>
-        <p:spPr>
-          <a:xfrm>
-            <a:off x="11384280" y="6446520"/>
-            <a:ext cx="640080" cy="292608"/>
-          </a:xfrm>
-          <a:prstGeom prst="rect">
-            <a:avLst/>
-          </a:prstGeom>
-          <a:noFill/>
-        </p:spPr>
-        <p:txBody>
-          <a:bodyPr wrap="none" lIns="0" tIns="0" rIns="45720" bIns="0" anchor="ctr"/>
-          <a:lstStyle/>
-          <a:p>
-            <a:pPr algn="r"/>
-            <a:r>
-              <a:t>110</a:t>
-            </a:r>
-            <a:endParaRPr sz="1000" b="1">
-              <a:solidFill>
-                <a:srgbClr val="7A8A6E"/>
-              </a:solidFill>
-              <a:latin typeface="Calibri"/>
-            </a:endParaRPr>
-          </a:p>
-        </p:txBody>
-      </p:sp>
-      <p:pic>
-        <p:nvPicPr>
-          <p:cNvPr id="34" name="Picture 34" descr="seedling - what grows between Wednesdays"/>
-          <p:cNvPicPr>
-            <a:picLocks noChangeAspect="1"/>
-          </p:cNvPicPr>
-          <p:nvPr/>
-        </p:nvPicPr>
-        <p:blipFill>
-          <a:blip r:embed="rId3"/>
-          <a:stretch>
-            <a:fillRect/>
-          </a:stretch>
-        </p:blipFill>
-        <p:spPr>
-          <a:xfrm>
-            <a:off x="8103612" y="1463040"/>
-            <a:ext cx="3262379" cy="4892040"/>
-          </a:xfrm>
-          <a:prstGeom prst="rect">
-            <a:avLst/>
-          </a:prstGeom>
-          <a:ln w="76200">
-            <a:solidFill>
-              <a:srgbClr val="FFFFFF"/>
-            </a:solidFill>
-          </a:ln>
-          <a:effectLst>
-            <a:outerShdw blurRad="63500" dist="25400" dir="5400000" rotWithShape="0">
-              <a:srgbClr val="000000">
-                <a:alpha val="35000"/>
-              </a:srgbClr>
-            </a:outerShdw>
-          </a:effectLst>
-        </p:spPr>
-      </p:pic>
-    </p:spTree>
-  </p:cSld>
-  <p:clrMapOvr>
-    <a:masterClrMapping/>
-  </p:clrMapOvr>
-</p:sld>
-</file>
-
-<file path=ppt/slides/slide111.xml><?xml version="1.0" encoding="utf-8"?>
-<p:sld xmlns:a="http://schemas.openxmlformats.org/drawingml/2006/main" xmlns:r="http://schemas.openxmlformats.org/officeDocument/2006/relationships" xmlns:p="http://schemas.openxmlformats.org/presentationml/2006/main">
-  <p:cSld>
-    <p:spTree>
-      <p:nvGrpSpPr>
-        <p:cNvPr id="1" name=""/>
-        <p:cNvGrpSpPr/>
-        <p:nvPr/>
-      </p:nvGrpSpPr>
-      <p:grpSpPr>
-        <a:xfrm>
-          <a:off x="0" y="0"/>
-          <a:ext cx="0" cy="0"/>
-          <a:chOff x="0" y="0"/>
-          <a:chExt cx="0" cy="0"/>
-        </a:xfrm>
-      </p:grpSpPr>
-      <p:sp>
-        <p:nvSpPr>
-          <p:cNvPr id="2" name="Rectangle 1"/>
-          <p:cNvSpPr/>
-          <p:nvPr/>
-        </p:nvSpPr>
-        <p:spPr>
-          <a:xfrm>
-            <a:off x="0" y="0"/>
-            <a:ext cx="12191695" cy="6858000"/>
-          </a:xfrm>
-          <a:prstGeom prst="rect">
-            <a:avLst/>
-          </a:prstGeom>
-          <a:solidFill>
-            <a:srgbClr val="FFFFFF"/>
-          </a:solidFill>
-          <a:ln>
-            <a:noFill/>
-          </a:ln>
-        </p:spPr>
-        <p:txBody>
-          <a:bodyPr/>
-          <a:lstStyle/>
-          <a:p>
-            <a:endParaRPr/>
-          </a:p>
-        </p:txBody>
-      </p:sp>
-      <p:sp>
-        <p:nvSpPr>
-          <p:cNvPr id="3" name="TextBox 2"/>
-          <p:cNvSpPr txBox="1"/>
-          <p:nvPr/>
-        </p:nvSpPr>
-        <p:spPr>
-          <a:xfrm>
-            <a:off x="822960" y="502920"/>
-            <a:ext cx="10515600" cy="822960"/>
-          </a:xfrm>
-          <a:prstGeom prst="rect">
-            <a:avLst/>
-          </a:prstGeom>
-          <a:noFill/>
-        </p:spPr>
-        <p:txBody>
-          <a:bodyPr wrap="square">
-            <a:spAutoFit/>
-          </a:bodyPr>
-          <a:lstStyle/>
-          <a:p>
-            <a:pPr algn="l">
-              <a:spcAft>
-                <a:spcPts val="600"/>
-              </a:spcAft>
-            </a:pPr>
-            <a:r>
-              <a:rPr sz="2800" b="1" i="0">
-                <a:solidFill>
-                  <a:srgbClr val="2C5F2D"/>
-                </a:solidFill>
-                <a:latin typeface="Cambria"/>
-              </a:rPr>
-              <a:t>Your Take-Home Card — This Session’s Practice</a:t>
-            </a:r>
-          </a:p>
-        </p:txBody>
-      </p:sp>
-      <p:sp>
-        <p:nvSpPr>
-          <p:cNvPr id="90" name="SlideNum"/>
-          <p:cNvSpPr txBox="1"/>
-          <p:nvPr/>
-        </p:nvSpPr>
-        <p:spPr>
-          <a:xfrm>
-            <a:off x="11384280" y="6446520"/>
-            <a:ext cx="640080" cy="292608"/>
-          </a:xfrm>
-          <a:prstGeom prst="rect">
-            <a:avLst/>
-          </a:prstGeom>
-          <a:noFill/>
-        </p:spPr>
-        <p:txBody>
-          <a:bodyPr wrap="none" lIns="0" tIns="0" rIns="45720" bIns="0" anchor="ctr"/>
-          <a:lstStyle/>
-          <a:p>
-            <a:pPr algn="r"/>
-            <a:r>
-              <a:t>111</a:t>
-            </a:r>
-            <a:endParaRPr sz="1000" b="1">
-              <a:solidFill>
-                <a:srgbClr val="7A8A6E"/>
-              </a:solidFill>
-              <a:latin typeface="Calibri"/>
-            </a:endParaRPr>
-          </a:p>
-        </p:txBody>
-      </p:sp>
-      <p:pic>
-        <p:nvPicPr>
-          <p:cNvPr id="270" name="CardImage" descr="the Week 8 check-off card, as handed out"/>
-          <p:cNvPicPr>
-            <a:picLocks noChangeAspect="1"/>
-          </p:cNvPicPr>
-          <p:nvPr/>
-        </p:nvPicPr>
-        <p:blipFill>
-          <a:blip r:embed="rId3"/>
-          <a:stretch>
-            <a:fillRect/>
-          </a:stretch>
-        </p:blipFill>
-        <p:spPr>
-          <a:xfrm>
-            <a:off x="1158087" y="1554480"/>
-            <a:ext cx="9875520" cy="4430989"/>
-          </a:xfrm>
-          <a:prstGeom prst="rect">
-            <a:avLst/>
-          </a:prstGeom>
-          <a:ln w="76200">
-            <a:solidFill>
-              <a:srgbClr val="FFFFFF"/>
-            </a:solidFill>
-          </a:ln>
-          <a:effectLst>
-            <a:outerShdw blurRad="63500" dist="25400" dir="5400000" rotWithShape="0">
-              <a:srgbClr val="000000">
-                <a:alpha val="35000"/>
-              </a:srgbClr>
-            </a:outerShdw>
-          </a:effectLst>
-        </p:spPr>
-      </p:pic>
-      <p:sp>
-        <p:nvSpPr>
-          <p:cNvPr id="271" name="Caption"/>
-          <p:cNvSpPr txBox="1"/>
-          <p:nvPr/>
-        </p:nvSpPr>
-        <p:spPr>
-          <a:xfrm>
-            <a:off x="822960" y="6168349"/>
-            <a:ext cx="10515600" cy="457200"/>
-          </a:xfrm>
-          <a:prstGeom prst="rect">
-            <a:avLst/>
-          </a:prstGeom>
-          <a:noFill/>
-        </p:spPr>
-        <p:txBody>
-          <a:bodyPr wrap="square"/>
-          <a:lstStyle/>
-          <a:p>
-            <a:pPr algn="ctr"/>
-            <a:r>
-              <a:rPr sz="1800" b="0" i="1">
-                <a:solidFill>
-                  <a:srgbClr val="222B22"/>
-                </a:solidFill>
-                <a:latin typeface="Calibri"/>
-              </a:rPr>
-              <a:t>Handed out now — fridge, mirror, journal pocket.</a:t>
-            </a:r>
-          </a:p>
-        </p:txBody>
-      </p:sp>
-    </p:spTree>
-  </p:cSld>
-  <p:clrMapOvr>
-    <a:masterClrMapping/>
-  </p:clrMapOvr>
-</p:sld>
-</file>
-
-<file path=ppt/slides/slide112.xml><?xml version="1.0" encoding="utf-8"?>
-<p:sld xmlns:a="http://schemas.openxmlformats.org/drawingml/2006/main" xmlns:r="http://schemas.openxmlformats.org/officeDocument/2006/relationships" xmlns:p="http://schemas.openxmlformats.org/presentationml/2006/main">
-  <p:cSld>
-    <p:spTree>
-      <p:nvGrpSpPr>
-        <p:cNvPr id="1" name=""/>
-        <p:cNvGrpSpPr/>
-        <p:nvPr/>
-      </p:nvGrpSpPr>
-      <p:grpSpPr>
-        <a:xfrm>
-          <a:off x="0" y="0"/>
-          <a:ext cx="0" cy="0"/>
-          <a:chOff x="0" y="0"/>
-          <a:chExt cx="0" cy="0"/>
-        </a:xfrm>
-      </p:grpSpPr>
-      <p:sp>
-        <p:nvSpPr>
-          <p:cNvPr id="2" name="Rectangle 1"/>
-          <p:cNvSpPr/>
-          <p:nvPr/>
-        </p:nvSpPr>
-        <p:spPr>
-          <a:xfrm>
-            <a:off x="0" y="0"/>
-            <a:ext cx="12191695" cy="6858000"/>
-          </a:xfrm>
-          <a:prstGeom prst="rect">
-            <a:avLst/>
-          </a:prstGeom>
-          <a:solidFill>
-            <a:srgbClr val="FFFFFF"/>
-          </a:solidFill>
-          <a:ln>
-            <a:noFill/>
-          </a:ln>
-        </p:spPr>
-        <p:txBody>
-          <a:bodyPr/>
-          <a:lstStyle/>
-          <a:p>
-            <a:endParaRPr/>
-          </a:p>
-        </p:txBody>
-      </p:sp>
-      <p:sp>
-        <p:nvSpPr>
-          <p:cNvPr id="3" name="TextBox 2"/>
-          <p:cNvSpPr txBox="1"/>
-          <p:nvPr/>
-        </p:nvSpPr>
-        <p:spPr>
-          <a:xfrm>
-            <a:off x="822960" y="502920"/>
-            <a:ext cx="10515600" cy="822960"/>
-          </a:xfrm>
-          <a:prstGeom prst="rect">
-            <a:avLst/>
-          </a:prstGeom>
-          <a:noFill/>
-        </p:spPr>
-        <p:txBody>
-          <a:bodyPr wrap="square">
-            <a:spAutoFit/>
-          </a:bodyPr>
-          <a:lstStyle/>
-          <a:p>
-            <a:pPr algn="l">
-              <a:spcAft>
-                <a:spcPts val="600"/>
-              </a:spcAft>
-            </a:pPr>
-            <a:r>
-              <a:rPr sz="2800" b="1" i="0">
-                <a:solidFill>
-                  <a:srgbClr val="2C5F2D"/>
-                </a:solidFill>
-                <a:latin typeface="Cambria"/>
-              </a:rPr>
-              <a:t>The Leader Feedback Round</a:t>
-            </a:r>
-          </a:p>
-        </p:txBody>
-      </p:sp>
-      <p:sp>
-        <p:nvSpPr>
-          <p:cNvPr id="4" name="TextBox 4"/>
-          <p:cNvSpPr txBox="1"/>
-          <p:nvPr/>
-        </p:nvSpPr>
-        <p:spPr>
-          <a:xfrm>
-            <a:off x="822960" y="1554480"/>
-            <a:ext cx="6675120" cy="4892040"/>
-          </a:xfrm>
-          <a:prstGeom prst="rect">
-            <a:avLst/>
-          </a:prstGeom>
-          <a:noFill/>
-        </p:spPr>
-        <p:txBody>
-          <a:bodyPr wrap="square" lIns="91440" tIns="91440" rIns="91440" bIns="91440"/>
-          <a:lstStyle/>
-          <a:p>
-            <a:pPr marL="274320" indent="-274320">
-              <a:spcAft>
-                <a:spcPts val="900"/>
-              </a:spcAft>
-            </a:pPr>
-            <a:r>
-              <a:rPr sz="2800" b="1" i="0">
-                <a:solidFill>
-                  <a:srgbClr val="97BC62"/>
-                </a:solidFill>
-                <a:latin typeface="Calibri"/>
-              </a:rPr>
-              <a:t>•  </a:t>
-            </a:r>
-            <a:r>
-              <a:rPr sz="2800" b="0" i="0">
-                <a:solidFill>
-                  <a:srgbClr val="222B22"/>
-                </a:solidFill>
-                <a:latin typeface="Calibri"/>
-              </a:rPr>
-              <a:t>Two rounds, same as every session — the container holder first, then the content presenter: three things each</a:t>
-            </a:r>
-          </a:p>
-          <a:p>
-            <a:pPr marL="685800" indent="-274320">
-              <a:spcAft>
-                <a:spcPts val="700"/>
-              </a:spcAft>
-            </a:pPr>
-            <a:r>
-              <a:rPr sz="2000" b="1" i="0">
-                <a:solidFill>
-                  <a:srgbClr val="97BC62"/>
-                </a:solidFill>
-                <a:latin typeface="Calibri"/>
-              </a:rPr>
-              <a:t>–  </a:t>
-            </a:r>
-            <a:r>
-              <a:rPr sz="2000" b="0" i="1">
-                <a:solidFill>
-                  <a:srgbClr val="222B22"/>
-                </a:solidFill>
-                <a:latin typeface="Calibri"/>
-              </a:rPr>
-              <a:t>“What I think went well tonight: ______”</a:t>
-            </a:r>
-          </a:p>
-          <a:p>
-            <a:pPr marL="685800" indent="-274320">
-              <a:spcAft>
-                <a:spcPts val="700"/>
-              </a:spcAft>
-            </a:pPr>
-            <a:r>
-              <a:rPr sz="2000" b="1" i="0">
-                <a:solidFill>
-                  <a:srgbClr val="97BC62"/>
-                </a:solidFill>
-                <a:latin typeface="Calibri"/>
-              </a:rPr>
-              <a:t>–  </a:t>
-            </a:r>
-            <a:r>
-              <a:rPr sz="2000" b="0" i="1">
-                <a:solidFill>
-                  <a:srgbClr val="222B22"/>
-                </a:solidFill>
-                <a:latin typeface="Calibri"/>
-              </a:rPr>
-              <a:t>“What I’d do differently next time: ______”</a:t>
-            </a:r>
-          </a:p>
-          <a:p>
-            <a:pPr marL="685800" indent="-274320">
-              <a:spcAft>
-                <a:spcPts val="700"/>
-              </a:spcAft>
-            </a:pPr>
-            <a:r>
-              <a:rPr sz="2000" b="1" i="0">
-                <a:solidFill>
-                  <a:srgbClr val="97BC62"/>
-                </a:solidFill>
-                <a:latin typeface="Calibri"/>
-              </a:rPr>
-              <a:t>–  </a:t>
-            </a:r>
-            <a:r>
-              <a:rPr sz="2000" b="0" i="1">
-                <a:solidFill>
-                  <a:srgbClr val="222B22"/>
-                </a:solidFill>
-                <a:latin typeface="Calibri"/>
-              </a:rPr>
-              <a:t>“If I were to teach tonight’s process to someone, I would tell them: ______”</a:t>
-            </a:r>
-          </a:p>
-          <a:p>
-            <a:pPr marL="274320" indent="-274320">
-              <a:spcAft>
-                <a:spcPts val="900"/>
-              </a:spcAft>
-            </a:pPr>
-            <a:r>
-              <a:rPr sz="2800" b="1" i="0">
-                <a:solidFill>
-                  <a:srgbClr val="97BC62"/>
-                </a:solidFill>
-                <a:latin typeface="Calibri"/>
-              </a:rPr>
-              <a:t>•  </a:t>
-            </a:r>
-            <a:r>
-              <a:rPr sz="2800" b="0" i="0">
-                <a:solidFill>
-                  <a:srgbClr val="222B22"/>
-                </a:solidFill>
-                <a:latin typeface="Calibri"/>
-              </a:rPr>
-              <a:t>Then the room — the same two questions about tonight</a:t>
-            </a:r>
-          </a:p>
-          <a:p>
-            <a:pPr marL="274320" indent="-274320">
-              <a:spcAft>
-                <a:spcPts val="900"/>
-              </a:spcAft>
-            </a:pPr>
-            <a:r>
-              <a:rPr sz="2800" b="1" i="0">
-                <a:solidFill>
-                  <a:srgbClr val="97BC62"/>
-                </a:solidFill>
-                <a:latin typeface="Calibri"/>
-              </a:rPr>
-              <a:t>•  </a:t>
-            </a:r>
-            <a:r>
-              <a:rPr sz="2800" b="0" i="0">
-                <a:solidFill>
-                  <a:srgbClr val="222B22"/>
-                </a:solidFill>
-                <a:latin typeface="Calibri"/>
-              </a:rPr>
-              <a:t>The leaders receive without defending — “thank you” is the whole response</a:t>
-            </a:r>
-          </a:p>
-        </p:txBody>
-      </p:sp>
-      <p:sp>
-        <p:nvSpPr>
-          <p:cNvPr id="90" name="SlideNum"/>
-          <p:cNvSpPr txBox="1"/>
-          <p:nvPr/>
-        </p:nvSpPr>
-        <p:spPr>
-          <a:xfrm>
-            <a:off x="11384280" y="6446520"/>
-            <a:ext cx="640080" cy="292608"/>
-          </a:xfrm>
-          <a:prstGeom prst="rect">
-            <a:avLst/>
-          </a:prstGeom>
-          <a:noFill/>
-        </p:spPr>
-        <p:txBody>
-          <a:bodyPr wrap="none" lIns="0" tIns="0" rIns="45720" bIns="0" anchor="ctr"/>
-          <a:lstStyle/>
-          <a:p>
-            <a:pPr algn="r"/>
-            <a:r>
-              <a:t>112</a:t>
-            </a:r>
-            <a:endParaRPr sz="1000" b="1">
-              <a:solidFill>
-                <a:srgbClr val="7A8A6E"/>
-              </a:solidFill>
-              <a:latin typeface="Calibri"/>
-            </a:endParaRPr>
-          </a:p>
-        </p:txBody>
-      </p:sp>
-      <p:pic>
-        <p:nvPicPr>
-          <p:cNvPr id="33" name="Picture 33" descr="compass on the trail - the weekly bearing check"/>
-          <p:cNvPicPr>
-            <a:picLocks noChangeAspect="1"/>
-          </p:cNvPicPr>
-          <p:nvPr/>
-        </p:nvPicPr>
-        <p:blipFill>
-          <a:blip r:embed="rId3"/>
-          <a:stretch>
-            <a:fillRect/>
-          </a:stretch>
-        </p:blipFill>
-        <p:spPr>
-          <a:xfrm>
-            <a:off x="8106160" y="1463040"/>
-            <a:ext cx="3259831" cy="4892040"/>
-          </a:xfrm>
-          <a:prstGeom prst="rect">
-            <a:avLst/>
-          </a:prstGeom>
-          <a:ln w="76200">
-            <a:solidFill>
-              <a:srgbClr val="FFFFFF"/>
-            </a:solidFill>
-          </a:ln>
-          <a:effectLst>
-            <a:outerShdw blurRad="63500" dist="25400" dir="5400000" rotWithShape="0">
-              <a:srgbClr val="000000">
-                <a:alpha val="35000"/>
-              </a:srgbClr>
-            </a:outerShdw>
-          </a:effectLst>
-        </p:spPr>
-      </p:pic>
-    </p:spTree>
-  </p:cSld>
-  <p:clrMapOvr>
-    <a:masterClrMapping/>
-  </p:clrMapOvr>
-</p:sld>
-</file>
-
-<file path=ppt/slides/slide113.xml><?xml version="1.0" encoding="utf-8"?>
-<p:sld xmlns:a="http://schemas.openxmlformats.org/drawingml/2006/main" xmlns:r="http://schemas.openxmlformats.org/officeDocument/2006/relationships" xmlns:p="http://schemas.openxmlformats.org/presentationml/2006/main">
-  <p:cSld>
-    <p:spTree>
-      <p:nvGrpSpPr>
-        <p:cNvPr id="1" name=""/>
-        <p:cNvGrpSpPr/>
-        <p:nvPr/>
-      </p:nvGrpSpPr>
-      <p:grpSpPr>
-        <a:xfrm>
-          <a:off x="0" y="0"/>
-          <a:ext cx="0" cy="0"/>
-          <a:chOff x="0" y="0"/>
-          <a:chExt cx="0" cy="0"/>
-        </a:xfrm>
-      </p:grpSpPr>
-      <p:sp>
-        <p:nvSpPr>
-          <p:cNvPr id="2" name="Rectangle 1"/>
-          <p:cNvSpPr/>
-          <p:nvPr/>
-        </p:nvSpPr>
-        <p:spPr>
-          <a:xfrm>
-            <a:off x="0" y="0"/>
-            <a:ext cx="12191695" cy="6858000"/>
-          </a:xfrm>
-          <a:prstGeom prst="rect">
-            <a:avLst/>
-          </a:prstGeom>
-          <a:solidFill>
-            <a:srgbClr val="FFFFFF"/>
-          </a:solidFill>
-          <a:ln>
-            <a:noFill/>
-          </a:ln>
-        </p:spPr>
-        <p:txBody>
-          <a:bodyPr/>
-          <a:lstStyle/>
-          <a:p>
-            <a:endParaRPr/>
-          </a:p>
-        </p:txBody>
-      </p:sp>
-      <p:sp>
-        <p:nvSpPr>
-          <p:cNvPr id="3" name="TextBox 2"/>
-          <p:cNvSpPr txBox="1"/>
-          <p:nvPr/>
-        </p:nvSpPr>
-        <p:spPr>
-          <a:xfrm>
-            <a:off x="822960" y="502920"/>
-            <a:ext cx="10515600" cy="822960"/>
-          </a:xfrm>
-          <a:prstGeom prst="rect">
-            <a:avLst/>
-          </a:prstGeom>
-          <a:noFill/>
-        </p:spPr>
-        <p:txBody>
-          <a:bodyPr wrap="square">
-            <a:spAutoFit/>
-          </a:bodyPr>
-          <a:lstStyle/>
-          <a:p>
-            <a:pPr algn="l">
-              <a:spcAft>
-                <a:spcPts val="600"/>
-              </a:spcAft>
-            </a:pPr>
-            <a:r>
-              <a:rPr sz="2800" b="1" i="0">
-                <a:solidFill>
-                  <a:srgbClr val="2C5F2D"/>
-                </a:solidFill>
-                <a:latin typeface="Cambria"/>
-              </a:rPr>
-              <a:t>Closing the Container + Aaronic Blessing</a:t>
-            </a:r>
-          </a:p>
-        </p:txBody>
-      </p:sp>
-      <p:sp>
-        <p:nvSpPr>
-          <p:cNvPr id="4" name="TextBox 4"/>
-          <p:cNvSpPr txBox="1"/>
-          <p:nvPr/>
-        </p:nvSpPr>
-        <p:spPr>
-          <a:xfrm>
-            <a:off x="822960" y="1600200"/>
-            <a:ext cx="5669280" cy="4572000"/>
-          </a:xfrm>
-          <a:prstGeom prst="rect">
-            <a:avLst/>
-          </a:prstGeom>
-          <a:noFill/>
-        </p:spPr>
-        <p:txBody>
-          <a:bodyPr wrap="square" lIns="91440" tIns="91440" rIns="91440" bIns="91440"/>
-          <a:lstStyle/>
-          <a:p>
-            <a:pPr marL="274320" indent="-274320">
-              <a:spcAft>
-                <a:spcPts val="900"/>
-              </a:spcAft>
-            </a:pPr>
-            <a:r>
-              <a:rPr sz="2200" b="1" i="0">
-                <a:solidFill>
-                  <a:srgbClr val="97BC62"/>
-                </a:solidFill>
-                <a:latin typeface="Calibri"/>
-              </a:rPr>
-              <a:t>•  </a:t>
-            </a:r>
-            <a:r>
-              <a:rPr sz="2200" b="0" i="0">
-                <a:solidFill>
-                  <a:srgbClr val="222B22"/>
-                </a:solidFill>
-                <a:latin typeface="Calibri"/>
-              </a:rPr>
-              <a:t>We close the way we opened — the container, six steps:</a:t>
-            </a:r>
-          </a:p>
-          <a:p>
-            <a:pPr marL="685800" indent="-274320">
-              <a:spcAft>
-                <a:spcPts val="700"/>
-              </a:spcAft>
-            </a:pPr>
-            <a:r>
-              <a:rPr sz="2000" b="1" i="0">
-                <a:solidFill>
-                  <a:srgbClr val="97BC62"/>
-                </a:solidFill>
-                <a:latin typeface="Calibri"/>
-              </a:rPr>
-              <a:t>1   </a:t>
-            </a:r>
-            <a:r>
-              <a:rPr sz="2000" b="0" i="0">
-                <a:solidFill>
-                  <a:srgbClr val="222B22"/>
-                </a:solidFill>
-                <a:latin typeface="Calibri"/>
-              </a:rPr>
-              <a:t>Stand again — same circle, same posture as the open</a:t>
-            </a:r>
-          </a:p>
-          <a:p>
-            <a:pPr marL="685800" indent="-274320">
-              <a:spcAft>
-                <a:spcPts val="700"/>
-              </a:spcAft>
-            </a:pPr>
-            <a:r>
-              <a:rPr sz="2000" b="1" i="0">
-                <a:solidFill>
-                  <a:srgbClr val="97BC62"/>
-                </a:solidFill>
-                <a:latin typeface="Calibri"/>
-              </a:rPr>
-              <a:t>2   </a:t>
-            </a:r>
-            <a:r>
-              <a:rPr sz="2000" b="0" i="0">
-                <a:solidFill>
-                  <a:srgbClr val="222B22"/>
-                </a:solidFill>
-                <a:latin typeface="Calibri"/>
-              </a:rPr>
-              <a:t>One-word landing — compare it to your opening word</a:t>
-            </a:r>
-          </a:p>
-          <a:p>
-            <a:pPr marL="685800" indent="-274320">
-              <a:spcAft>
-                <a:spcPts val="700"/>
-              </a:spcAft>
-            </a:pPr>
-            <a:r>
-              <a:rPr sz="2000" b="1" i="0">
-                <a:solidFill>
-                  <a:srgbClr val="97BC62"/>
-                </a:solidFill>
-                <a:latin typeface="Calibri"/>
-              </a:rPr>
-              <a:t>3   </a:t>
-            </a:r>
-            <a:r>
-              <a:rPr sz="2000" b="0" i="0">
-                <a:solidFill>
-                  <a:srgbClr val="222B22"/>
-                </a:solidFill>
-                <a:latin typeface="Calibri"/>
-              </a:rPr>
-              <a:t>The one thing you are taking from tonight</a:t>
-            </a:r>
-          </a:p>
-          <a:p>
-            <a:pPr marL="685800" indent="-274320">
-              <a:spcAft>
-                <a:spcPts val="700"/>
-              </a:spcAft>
-            </a:pPr>
-            <a:r>
-              <a:rPr sz="2000" b="1" i="0">
-                <a:solidFill>
-                  <a:srgbClr val="97BC62"/>
-                </a:solidFill>
-                <a:latin typeface="Calibri"/>
-              </a:rPr>
-              <a:t>4   </a:t>
-            </a:r>
-            <a:r>
-              <a:rPr sz="2000" b="0" i="0">
-                <a:solidFill>
-                  <a:srgbClr val="222B22"/>
-                </a:solidFill>
-                <a:latin typeface="Calibri"/>
-              </a:rPr>
-              <a:t>The one practice — committed aloud, or modified to one you will actually keep</a:t>
-            </a:r>
-          </a:p>
-          <a:p>
-            <a:pPr marL="685800" indent="-274320">
-              <a:spcAft>
-                <a:spcPts val="700"/>
-              </a:spcAft>
-            </a:pPr>
-            <a:r>
-              <a:rPr sz="2000" b="1" i="0">
-                <a:solidFill>
-                  <a:srgbClr val="97BC62"/>
-                </a:solidFill>
-                <a:latin typeface="Calibri"/>
-              </a:rPr>
-              <a:t>5   </a:t>
-            </a:r>
-            <a:r>
-              <a:rPr sz="2000" b="0" i="0">
-                <a:solidFill>
-                  <a:srgbClr val="222B22"/>
-                </a:solidFill>
-                <a:latin typeface="Calibri"/>
-              </a:rPr>
-              <a:t>Blessings — specific, witnessed, short</a:t>
-            </a:r>
-          </a:p>
-          <a:p>
-            <a:pPr marL="685800" indent="-274320">
-              <a:spcAft>
-                <a:spcPts val="700"/>
-              </a:spcAft>
-            </a:pPr>
-            <a:r>
-              <a:rPr sz="2000" b="1" i="0">
-                <a:solidFill>
-                  <a:srgbClr val="97BC62"/>
-                </a:solidFill>
-                <a:latin typeface="Calibri"/>
-              </a:rPr>
-              <a:t>6   </a:t>
-            </a:r>
-            <a:r>
-              <a:rPr sz="2000" b="0" i="0">
-                <a:solidFill>
-                  <a:srgbClr val="222B22"/>
-                </a:solidFill>
-                <a:latin typeface="Calibri"/>
-              </a:rPr>
-              <a:t>Closing prayer — and the Aaronic blessing, spoken over each other, face to face</a:t>
-            </a:r>
-          </a:p>
-        </p:txBody>
-      </p:sp>
-      <p:sp>
-        <p:nvSpPr>
-          <p:cNvPr id="6" name="TextBox 6"/>
-          <p:cNvSpPr txBox="1"/>
-          <p:nvPr/>
-        </p:nvSpPr>
-        <p:spPr>
-          <a:xfrm>
-            <a:off x="6766560" y="1737360"/>
-            <a:ext cx="4663440" cy="2926080"/>
-          </a:xfrm>
-          <a:prstGeom prst="rect">
-            <a:avLst/>
-          </a:prstGeom>
-          <a:solidFill>
-            <a:srgbClr val="F1F6EC"/>
-          </a:solidFill>
-        </p:spPr>
-        <p:txBody>
-          <a:bodyPr wrap="square" lIns="91440" tIns="91440" rIns="91440" bIns="91440" anchor="ctr"/>
-          <a:lstStyle/>
-          <a:p>
-            <a:pPr>
-              <a:spcAft>
-                <a:spcPts val="900"/>
-              </a:spcAft>
-            </a:pPr>
-            <a:r>
-              <a:rPr sz="1200" b="1" i="0">
-                <a:solidFill>
-                  <a:srgbClr val="97BC62"/>
-                </a:solidFill>
-                <a:latin typeface="Calibri"/>
-              </a:rPr>
-              <a:t>THE AARONIC BLESSING — NUMBERS 6:24–26</a:t>
-            </a:r>
-          </a:p>
-          <a:p>
-            <a:pPr>
-              <a:spcAft>
-                <a:spcPts val="600"/>
-              </a:spcAft>
-            </a:pPr>
-            <a:r>
-              <a:rPr sz="2400" b="0" i="1">
-                <a:solidFill>
-                  <a:srgbClr val="222B22"/>
-                </a:solidFill>
-                <a:latin typeface="Cambria"/>
-              </a:rPr>
-              <a:t>“The Lord bless you and keep you;</a:t>
-            </a:r>
-          </a:p>
-          <a:p>
-            <a:pPr>
-              <a:spcAft>
-                <a:spcPts val="600"/>
-              </a:spcAft>
-            </a:pPr>
-            <a:r>
-              <a:rPr sz="2400" b="0" i="1">
-                <a:solidFill>
-                  <a:srgbClr val="222B22"/>
-                </a:solidFill>
-                <a:latin typeface="Cambria"/>
-              </a:rPr>
-              <a:t>the Lord make his face to shine upon you, and be gracious to you;</a:t>
-            </a:r>
-          </a:p>
-          <a:p>
-            <a:pPr>
-              <a:spcAft>
-                <a:spcPts val="600"/>
-              </a:spcAft>
-            </a:pPr>
-            <a:r>
-              <a:rPr sz="2400" b="0" i="1">
-                <a:solidFill>
-                  <a:srgbClr val="222B22"/>
-                </a:solidFill>
-                <a:latin typeface="Cambria"/>
-              </a:rPr>
-              <a:t>the Lord lift up his countenance upon you, and give you peace.”</a:t>
-            </a:r>
-          </a:p>
-        </p:txBody>
-      </p:sp>
-      <p:sp>
-        <p:nvSpPr>
-          <p:cNvPr id="90" name="SlideNum"/>
-          <p:cNvSpPr txBox="1"/>
-          <p:nvPr/>
-        </p:nvSpPr>
-        <p:spPr>
-          <a:xfrm>
-            <a:off x="11384280" y="6446520"/>
-            <a:ext cx="640080" cy="292608"/>
-          </a:xfrm>
-          <a:prstGeom prst="rect">
-            <a:avLst/>
-          </a:prstGeom>
-          <a:noFill/>
-        </p:spPr>
-        <p:txBody>
-          <a:bodyPr wrap="none" lIns="0" tIns="0" rIns="45720" bIns="0" anchor="ctr"/>
-          <a:lstStyle/>
-          <a:p>
-            <a:pPr algn="r"/>
-            <a:r>
-              <a:t>113</a:t>
             </a:r>
             <a:endParaRPr sz="1000" b="1">
               <a:solidFill>

--- a/_implementation-notes/evening-series/FotH Evening Session 8 Slides DRAFT v1.pptx
+++ b/_implementation-notes/evening-series/FotH Evening Session 8 Slides DRAFT v1.pptx
@@ -4920,7 +4920,7 @@
                 </a:solidFill>
                 <a:latin typeface="Cambria"/>
               </a:rPr>
-              <a:t>Tell Step — Sharing in the pair</a:t>
+              <a:t>PROAPT in Family Pairs</a:t>
             </a:r>
           </a:p>
         </p:txBody>
@@ -4945,6 +4945,106 @@
           <a:bodyPr wrap="square" lIns="91440" tIns="91440" rIns="91440" bIns="91440"/>
           <a:lstStyle/>
           <a:p>
+            <a:pPr marL="342900" indent="-342900">
+              <a:spcAft>
+                <a:spcPts val="750"/>
+              </a:spcAft>
+            </a:pPr>
+            <a:r>
+              <a:rPr sz="2400" b="1" i="0">
+                <a:solidFill>
+                  <a:srgbClr val="97BC62"/>
+                </a:solidFill>
+                <a:latin typeface="Calibri"/>
+              </a:rPr>
+              <a:t>1   </a:t>
+            </a:r>
+            <a:r>
+              <a:rPr sz="2400" b="0" i="0">
+                <a:solidFill>
+                  <a:srgbClr val="222B22"/>
+                </a:solidFill>
+                <a:latin typeface="Calibri"/>
+              </a:rPr>
+              <a:t>First pass (13 min) — Reader leads PROAPT; Listener works alongside without interrupting</a:t>
+            </a:r>
+          </a:p>
+          <a:p>
+            <a:pPr marL="342900" indent="-342900">
+              <a:spcAft>
+                <a:spcPts val="750"/>
+              </a:spcAft>
+            </a:pPr>
+            <a:r>
+              <a:rPr sz="2400" b="1" i="0">
+                <a:solidFill>
+                  <a:srgbClr val="97BC62"/>
+                </a:solidFill>
+                <a:latin typeface="Calibri"/>
+              </a:rPr>
+              <a:t>2   </a:t>
+            </a:r>
+            <a:r>
+              <a:rPr sz="2400" b="0" i="0">
+                <a:solidFill>
+                  <a:srgbClr val="222B22"/>
+                </a:solidFill>
+                <a:latin typeface="Calibri"/>
+              </a:rPr>
+              <a:t>Reader’s Tell at the end goes to the Listener — one sentence</a:t>
+            </a:r>
+          </a:p>
+          <a:p>
+            <a:pPr marL="342900" indent="-342900">
+              <a:spcAft>
+                <a:spcPts val="750"/>
+              </a:spcAft>
+            </a:pPr>
+            <a:r>
+              <a:rPr sz="2400" b="1" i="0">
+                <a:solidFill>
+                  <a:srgbClr val="97BC62"/>
+                </a:solidFill>
+                <a:latin typeface="Calibri"/>
+              </a:rPr>
+              <a:t>3   </a:t>
+            </a:r>
+            <a:r>
+              <a:rPr sz="2400" b="0" i="0">
+                <a:solidFill>
+                  <a:srgbClr val="222B22"/>
+                </a:solidFill>
+                <a:latin typeface="Calibri"/>
+              </a:rPr>
+              <a:t>Switch — roles reverse; same passage or new</a:t>
+            </a:r>
+          </a:p>
+          <a:p>
+            <a:pPr marL="342900" indent="-342900">
+              <a:spcAft>
+                <a:spcPts val="750"/>
+              </a:spcAft>
+            </a:pPr>
+            <a:r>
+              <a:rPr sz="2400" b="1" i="0">
+                <a:solidFill>
+                  <a:srgbClr val="97BC62"/>
+                </a:solidFill>
+                <a:latin typeface="Calibri"/>
+              </a:rPr>
+              <a:t>4   </a:t>
+            </a:r>
+            <a:r>
+              <a:rPr sz="2400" b="0" i="0">
+                <a:solidFill>
+                  <a:srgbClr val="222B22"/>
+                </a:solidFill>
+                <a:latin typeface="Calibri"/>
+              </a:rPr>
+              <a:t>Second pass (13 min) — same structure, roles reversed</a:t>
+            </a:r>
+          </a:p>
+          <a:p>
             <a:pPr marL="274320" indent="-274320">
               <a:spcAft>
                 <a:spcPts val="750"/>
@@ -4966,7 +5066,7 @@
                 </a:solidFill>
                 <a:latin typeface="Calibri"/>
               </a:rPr>
-              <a:t>“The Tell step — second time in the pair, so you know the shape.”</a:t>
+              <a:t>Same unstick prompts as Week 7 — “one specific word or phrase that caught you” / “one situation in your life right now — be specific”</a:t>
             </a:r>
           </a:p>
           <a:p>
@@ -4991,107 +5091,7 @@
                 </a:solidFill>
                 <a:latin typeface="Calibri"/>
               </a:rPr>
-              <a:t>One specific thing you heard tonight — one sentence — “We listen to receive.”</a:t>
-            </a:r>
-          </a:p>
-          <a:p>
-            <a:pPr marL="274320" indent="-274320">
-              <a:spcAft>
-                <a:spcPts val="750"/>
-              </a:spcAft>
-            </a:pPr>
-            <a:r>
-              <a:rPr sz="2400" b="1" i="0">
-                <a:solidFill>
-                  <a:srgbClr val="97BC62"/>
-                </a:solidFill>
-                <a:latin typeface="Calibri"/>
-              </a:rPr>
-              <a:t>•  </a:t>
-            </a:r>
-            <a:r>
-              <a:rPr sz="2400" b="0" i="0">
-                <a:solidFill>
-                  <a:srgbClr val="222B22"/>
-                </a:solidFill>
-                <a:latin typeface="Calibri"/>
-              </a:rPr>
-              <a:t>A parent opens the round — arranged beforehand, never a cold call on a teen</a:t>
-            </a:r>
-          </a:p>
-          <a:p>
-            <a:pPr marL="274320" indent="-274320">
-              <a:spcAft>
-                <a:spcPts val="750"/>
-              </a:spcAft>
-            </a:pPr>
-            <a:r>
-              <a:rPr sz="2400" b="1" i="0">
-                <a:solidFill>
-                  <a:srgbClr val="97BC62"/>
-                </a:solidFill>
-                <a:latin typeface="Calibri"/>
-              </a:rPr>
-              <a:t>•  </a:t>
-            </a:r>
-            <a:r>
-              <a:rPr sz="2400" b="0" i="0">
-                <a:solidFill>
-                  <a:srgbClr val="222B22"/>
-                </a:solidFill>
-                <a:latin typeface="Calibri"/>
-              </a:rPr>
-              <a:t>Teens choose their own depth; pass-anytime holds</a:t>
-            </a:r>
-          </a:p>
-          <a:p>
-            <a:pPr marL="274320" indent="-274320">
-              <a:spcAft>
-                <a:spcPts val="750"/>
-              </a:spcAft>
-            </a:pPr>
-            <a:r>
-              <a:rPr sz="2400" b="1" i="0">
-                <a:solidFill>
-                  <a:srgbClr val="97BC62"/>
-                </a:solidFill>
-                <a:latin typeface="Calibri"/>
-              </a:rPr>
-              <a:t>•  </a:t>
-            </a:r>
-            <a:r>
-              <a:rPr sz="2400" b="0" i="0">
-                <a:solidFill>
-                  <a:srgbClr val="222B22"/>
-                </a:solidFill>
-                <a:latin typeface="Calibri"/>
-              </a:rPr>
-              <a:t>Receive without preaching — “We hear that.” “Thank you for naming that.”</a:t>
-            </a:r>
-          </a:p>
-          <a:p>
-            <a:pPr marL="274320" indent="-274320">
-              <a:spcAft>
-                <a:spcPts val="750"/>
-              </a:spcAft>
-            </a:pPr>
-            <a:r>
-              <a:rPr sz="2400" b="1" i="0">
-                <a:solidFill>
-                  <a:srgbClr val="97BC62"/>
-                </a:solidFill>
-                <a:latin typeface="Calibri"/>
-              </a:rPr>
-              <a:t>•  </a:t>
-            </a:r>
-            <a:r>
-              <a:rPr sz="2400" b="0" i="0">
-                <a:solidFill>
-                  <a:srgbClr val="222B22"/>
-                </a:solidFill>
-                <a:latin typeface="Calibri"/>
-              </a:rPr>
-              <a:t>“Take what you heard with you. It was given to be walked out.”</a:t>
+              <a:t>Feels like a rerun? “Then you know what it said Thursday. What is it saying tonight? Second hearings are where the specific word comes.”</a:t>
             </a:r>
           </a:p>
         </p:txBody>
@@ -5118,7 +5118,7 @@
           <a:p>
             <a:pPr algn="r"/>
             <a:r>
-              <a:t>109</a:t>
+              <a:t>108</a:t>
             </a:r>
             <a:endParaRPr sz="1000" b="1">
               <a:solidFill>
@@ -5138,6 +5138,303 @@
 </file>
 
 <file path=ppt/slides/slide11.xml><?xml version="1.0" encoding="utf-8"?>
+<p:sld xmlns:a="http://schemas.openxmlformats.org/drawingml/2006/main" xmlns:r="http://schemas.openxmlformats.org/officeDocument/2006/relationships" xmlns:p="http://schemas.openxmlformats.org/presentationml/2006/main">
+  <p:cSld>
+    <p:spTree>
+      <p:nvGrpSpPr>
+        <p:cNvPr id="1" name=""/>
+        <p:cNvGrpSpPr/>
+        <p:nvPr/>
+      </p:nvGrpSpPr>
+      <p:grpSpPr>
+        <a:xfrm>
+          <a:off x="0" y="0"/>
+          <a:ext cx="0" cy="0"/>
+          <a:chOff x="0" y="0"/>
+          <a:chExt cx="0" cy="0"/>
+        </a:xfrm>
+      </p:grpSpPr>
+      <p:sp>
+        <p:nvSpPr>
+          <p:cNvPr id="2" name="Rectangle 1"/>
+          <p:cNvSpPr/>
+          <p:nvPr/>
+        </p:nvSpPr>
+        <p:spPr>
+          <a:xfrm>
+            <a:off x="0" y="0"/>
+            <a:ext cx="12191695" cy="6858000"/>
+          </a:xfrm>
+          <a:prstGeom prst="rect">
+            <a:avLst/>
+          </a:prstGeom>
+          <a:solidFill>
+            <a:srgbClr val="FFFFFF"/>
+          </a:solidFill>
+          <a:ln>
+            <a:noFill/>
+          </a:ln>
+        </p:spPr>
+        <p:txBody>
+          <a:bodyPr/>
+          <a:lstStyle/>
+          <a:p>
+            <a:endParaRPr/>
+          </a:p>
+        </p:txBody>
+      </p:sp>
+      <p:sp>
+        <p:nvSpPr>
+          <p:cNvPr id="3" name="TextBox 2"/>
+          <p:cNvSpPr txBox="1"/>
+          <p:nvPr/>
+        </p:nvSpPr>
+        <p:spPr>
+          <a:xfrm>
+            <a:off x="822960" y="502920"/>
+            <a:ext cx="10515600" cy="822960"/>
+          </a:xfrm>
+          <a:prstGeom prst="rect">
+            <a:avLst/>
+          </a:prstGeom>
+          <a:noFill/>
+        </p:spPr>
+        <p:txBody>
+          <a:bodyPr wrap="square">
+            <a:spAutoFit/>
+          </a:bodyPr>
+          <a:lstStyle/>
+          <a:p>
+            <a:pPr algn="l">
+              <a:spcAft>
+                <a:spcPts val="600"/>
+              </a:spcAft>
+            </a:pPr>
+            <a:r>
+              <a:rPr sz="2800" b="1" i="0">
+                <a:solidFill>
+                  <a:srgbClr val="2C5F2D"/>
+                </a:solidFill>
+                <a:latin typeface="Cambria"/>
+              </a:rPr>
+              <a:t>Tell Step — Sharing in the pair</a:t>
+            </a:r>
+          </a:p>
+        </p:txBody>
+      </p:sp>
+      <p:sp>
+        <p:nvSpPr>
+          <p:cNvPr id="4" name="TextBox 4"/>
+          <p:cNvSpPr txBox="1"/>
+          <p:nvPr/>
+        </p:nvSpPr>
+        <p:spPr>
+          <a:xfrm>
+            <a:off x="822960" y="1554480"/>
+            <a:ext cx="10515600" cy="4892040"/>
+          </a:xfrm>
+          <a:prstGeom prst="rect">
+            <a:avLst/>
+          </a:prstGeom>
+          <a:noFill/>
+        </p:spPr>
+        <p:txBody>
+          <a:bodyPr wrap="square" lIns="91440" tIns="91440" rIns="91440" bIns="91440"/>
+          <a:lstStyle/>
+          <a:p>
+            <a:pPr marL="274320" indent="-274320">
+              <a:spcAft>
+                <a:spcPts val="750"/>
+              </a:spcAft>
+            </a:pPr>
+            <a:r>
+              <a:rPr sz="2400" b="1" i="0">
+                <a:solidFill>
+                  <a:srgbClr val="97BC62"/>
+                </a:solidFill>
+                <a:latin typeface="Calibri"/>
+              </a:rPr>
+              <a:t>•  </a:t>
+            </a:r>
+            <a:r>
+              <a:rPr sz="2400" b="0" i="0">
+                <a:solidFill>
+                  <a:srgbClr val="222B22"/>
+                </a:solidFill>
+                <a:latin typeface="Calibri"/>
+              </a:rPr>
+              <a:t>“The Tell step — second time in the pair, so you know the shape.”</a:t>
+            </a:r>
+          </a:p>
+          <a:p>
+            <a:pPr marL="274320" indent="-274320">
+              <a:spcAft>
+                <a:spcPts val="750"/>
+              </a:spcAft>
+            </a:pPr>
+            <a:r>
+              <a:rPr sz="2400" b="1" i="0">
+                <a:solidFill>
+                  <a:srgbClr val="97BC62"/>
+                </a:solidFill>
+                <a:latin typeface="Calibri"/>
+              </a:rPr>
+              <a:t>•  </a:t>
+            </a:r>
+            <a:r>
+              <a:rPr sz="2400" b="0" i="0">
+                <a:solidFill>
+                  <a:srgbClr val="222B22"/>
+                </a:solidFill>
+                <a:latin typeface="Calibri"/>
+              </a:rPr>
+              <a:t>One specific thing you heard tonight — one sentence — “We listen to receive.”</a:t>
+            </a:r>
+          </a:p>
+          <a:p>
+            <a:pPr marL="274320" indent="-274320">
+              <a:spcAft>
+                <a:spcPts val="750"/>
+              </a:spcAft>
+            </a:pPr>
+            <a:r>
+              <a:rPr sz="2400" b="1" i="0">
+                <a:solidFill>
+                  <a:srgbClr val="97BC62"/>
+                </a:solidFill>
+                <a:latin typeface="Calibri"/>
+              </a:rPr>
+              <a:t>•  </a:t>
+            </a:r>
+            <a:r>
+              <a:rPr sz="2400" b="0" i="0">
+                <a:solidFill>
+                  <a:srgbClr val="222B22"/>
+                </a:solidFill>
+                <a:latin typeface="Calibri"/>
+              </a:rPr>
+              <a:t>A parent opens the round — arranged beforehand, never a cold call on a teen</a:t>
+            </a:r>
+          </a:p>
+          <a:p>
+            <a:pPr marL="274320" indent="-274320">
+              <a:spcAft>
+                <a:spcPts val="750"/>
+              </a:spcAft>
+            </a:pPr>
+            <a:r>
+              <a:rPr sz="2400" b="1" i="0">
+                <a:solidFill>
+                  <a:srgbClr val="97BC62"/>
+                </a:solidFill>
+                <a:latin typeface="Calibri"/>
+              </a:rPr>
+              <a:t>•  </a:t>
+            </a:r>
+            <a:r>
+              <a:rPr sz="2400" b="0" i="0">
+                <a:solidFill>
+                  <a:srgbClr val="222B22"/>
+                </a:solidFill>
+                <a:latin typeface="Calibri"/>
+              </a:rPr>
+              <a:t>Teens choose their own depth; pass-anytime holds</a:t>
+            </a:r>
+          </a:p>
+          <a:p>
+            <a:pPr marL="274320" indent="-274320">
+              <a:spcAft>
+                <a:spcPts val="750"/>
+              </a:spcAft>
+            </a:pPr>
+            <a:r>
+              <a:rPr sz="2400" b="1" i="0">
+                <a:solidFill>
+                  <a:srgbClr val="97BC62"/>
+                </a:solidFill>
+                <a:latin typeface="Calibri"/>
+              </a:rPr>
+              <a:t>•  </a:t>
+            </a:r>
+            <a:r>
+              <a:rPr sz="2400" b="0" i="0">
+                <a:solidFill>
+                  <a:srgbClr val="222B22"/>
+                </a:solidFill>
+                <a:latin typeface="Calibri"/>
+              </a:rPr>
+              <a:t>Receive without preaching — “We hear that.” “Thank you for naming that.”</a:t>
+            </a:r>
+          </a:p>
+          <a:p>
+            <a:pPr marL="274320" indent="-274320">
+              <a:spcAft>
+                <a:spcPts val="750"/>
+              </a:spcAft>
+            </a:pPr>
+            <a:r>
+              <a:rPr sz="2400" b="1" i="0">
+                <a:solidFill>
+                  <a:srgbClr val="97BC62"/>
+                </a:solidFill>
+                <a:latin typeface="Calibri"/>
+              </a:rPr>
+              <a:t>•  </a:t>
+            </a:r>
+            <a:r>
+              <a:rPr sz="2400" b="0" i="0">
+                <a:solidFill>
+                  <a:srgbClr val="222B22"/>
+                </a:solidFill>
+                <a:latin typeface="Calibri"/>
+              </a:rPr>
+              <a:t>“Take what you heard with you. It was given to be walked out.”</a:t>
+            </a:r>
+          </a:p>
+        </p:txBody>
+      </p:sp>
+      <p:sp>
+        <p:nvSpPr>
+          <p:cNvPr id="90" name="SlideNum"/>
+          <p:cNvSpPr txBox="1"/>
+          <p:nvPr/>
+        </p:nvSpPr>
+        <p:spPr>
+          <a:xfrm>
+            <a:off x="11384280" y="6446520"/>
+            <a:ext cx="640080" cy="292608"/>
+          </a:xfrm>
+          <a:prstGeom prst="rect">
+            <a:avLst/>
+          </a:prstGeom>
+          <a:noFill/>
+        </p:spPr>
+        <p:txBody>
+          <a:bodyPr wrap="none" lIns="0" tIns="0" rIns="45720" bIns="0" anchor="ctr"/>
+          <a:lstStyle/>
+          <a:p>
+            <a:pPr algn="r"/>
+            <a:r>
+              <a:t>109</a:t>
+            </a:r>
+            <a:endParaRPr sz="1000" b="1">
+              <a:solidFill>
+                <a:srgbClr val="7A8A6E"/>
+              </a:solidFill>
+              <a:latin typeface="Calibri"/>
+            </a:endParaRPr>
+          </a:p>
+        </p:txBody>
+      </p:sp>
+    </p:spTree>
+  </p:cSld>
+  <p:clrMapOvr>
+    <a:masterClrMapping/>
+  </p:clrMapOvr>
+</p:sld>
+</file>
+
+<file path=ppt/slides/slide12.xml><?xml version="1.0" encoding="utf-8"?>
 <p:sld xmlns:a="http://schemas.openxmlformats.org/drawingml/2006/main" xmlns:r="http://schemas.openxmlformats.org/officeDocument/2006/relationships" xmlns:p="http://schemas.openxmlformats.org/presentationml/2006/main">
   <p:cSld>
     <p:spTree>
@@ -5396,6 +5693,390 @@
 </file>
 
 <file path=ppt/slides/slide13.xml><?xml version="1.0" encoding="utf-8"?>
+<p:sld xmlns:a="http://schemas.openxmlformats.org/drawingml/2006/main" xmlns:p="http://schemas.openxmlformats.org/presentationml/2006/main" xmlns:r="http://schemas.openxmlformats.org/officeDocument/2006/relationships">
+  <p:cSld>
+    <p:spTree>
+      <p:nvGrpSpPr>
+        <p:cNvPr id="1" name=""/>
+        <p:cNvGrpSpPr/>
+        <p:nvPr/>
+      </p:nvGrpSpPr>
+      <p:grpSpPr/>
+      <p:sp>
+        <p:nvSpPr>
+          <p:cNvPr id="2" name="Rectangle 1"/>
+          <p:cNvSpPr/>
+          <p:nvPr/>
+        </p:nvSpPr>
+        <p:spPr>
+          <a:xfrm>
+            <a:off x="0" y="0"/>
+            <a:ext cx="12192000" cy="6858000"/>
+          </a:xfrm>
+          <a:prstGeom prst="rect">
+            <a:avLst/>
+          </a:prstGeom>
+          <a:solidFill>
+            <a:srgbClr val="FFFFFF"/>
+          </a:solidFill>
+          <a:ln>
+            <a:noFill/>
+          </a:ln>
+          <a:effectLst/>
+        </p:spPr>
+        <p:style>
+          <a:lnRef idx="1">
+            <a:schemeClr val="accent1"/>
+          </a:lnRef>
+          <a:fillRef idx="3">
+            <a:schemeClr val="accent1"/>
+          </a:fillRef>
+          <a:effectRef idx="2">
+            <a:schemeClr val="accent1"/>
+          </a:effectRef>
+          <a:fontRef idx="minor">
+            <a:schemeClr val="lt1"/>
+          </a:fontRef>
+        </p:style>
+        <p:txBody>
+          <a:bodyPr rtlCol="0" anchor="ctr"/>
+          <a:lstStyle/>
+          <a:p>
+            <a:pPr algn="ctr"/>
+          </a:p>
+        </p:txBody>
+      </p:sp>
+      <p:sp>
+        <p:nvSpPr>
+          <p:cNvPr id="3" name="TextBox 2"/>
+          <p:cNvSpPr txBox="1"/>
+          <p:nvPr/>
+        </p:nvSpPr>
+        <p:spPr>
+          <a:xfrm>
+            <a:off x="822960" y="502920"/>
+            <a:ext cx="10515600" cy="822960"/>
+          </a:xfrm>
+          <a:prstGeom prst="rect">
+            <a:avLst/>
+          </a:prstGeom>
+          <a:noFill/>
+        </p:spPr>
+        <p:txBody>
+          <a:bodyPr wrap="square">
+            <a:spAutoFit/>
+          </a:bodyPr>
+          <a:lstStyle/>
+          <a:p>
+            <a:r>
+              <a:rPr sz="2800" b="1">
+                <a:solidFill>
+                  <a:srgbClr val="2C5F2D"/>
+                </a:solidFill>
+                <a:latin typeface="Cambria"/>
+              </a:rPr>
+              <a:t>The Take-Home Sheet — the Daily Rhythm</a:t>
+            </a:r>
+          </a:p>
+        </p:txBody>
+      </p:sp>
+      <p:pic>
+        <p:nvPicPr>
+          <p:cNvPr id="4" name="Picture 3" descr="s8_part1.png"/>
+          <p:cNvPicPr>
+            <a:picLocks noChangeAspect="1"/>
+          </p:cNvPicPr>
+          <p:nvPr/>
+        </p:nvPicPr>
+        <p:blipFill>
+          <a:blip r:embed="rId2"/>
+          <a:stretch>
+            <a:fillRect/>
+          </a:stretch>
+        </p:blipFill>
+        <p:spPr>
+          <a:xfrm>
+            <a:off x="1798167" y="1463040"/>
+            <a:ext cx="8595360" cy="4039819"/>
+          </a:xfrm>
+          <a:prstGeom prst="rect">
+            <a:avLst/>
+          </a:prstGeom>
+          <a:ln w="12700">
+            <a:solidFill>
+              <a:srgbClr val="C8C8C8"/>
+            </a:solidFill>
+          </a:ln>
+        </p:spPr>
+      </p:pic>
+      <p:sp>
+        <p:nvSpPr>
+          <p:cNvPr id="5" name="TextBox 4"/>
+          <p:cNvSpPr txBox="1"/>
+          <p:nvPr/>
+        </p:nvSpPr>
+        <p:spPr>
+          <a:xfrm>
+            <a:off x="822960" y="6355080"/>
+            <a:ext cx="10515600" cy="411480"/>
+          </a:xfrm>
+          <a:prstGeom prst="rect">
+            <a:avLst/>
+          </a:prstGeom>
+          <a:noFill/>
+        </p:spPr>
+        <p:txBody>
+          <a:bodyPr wrap="square">
+            <a:spAutoFit/>
+          </a:bodyPr>
+          <a:lstStyle/>
+          <a:p>
+            <a:r>
+              <a:rPr sz="1400" i="1">
+                <a:solidFill>
+                  <a:srgbClr val="595959"/>
+                </a:solidFill>
+                <a:latin typeface="Calibri"/>
+              </a:rPr>
+              <a:t>Handed out now — this is the sheet in your hands.</a:t>
+            </a:r>
+          </a:p>
+        </p:txBody>
+      </p:sp>
+      <p:sp>
+        <p:nvSpPr>
+          <p:cNvPr id="90" name="SlideNum"/>
+          <p:cNvSpPr txBox="1"/>
+          <p:nvPr/>
+        </p:nvSpPr>
+        <p:spPr>
+          <a:xfrm>
+            <a:off x="11384280" y="6446520"/>
+            <a:ext cx="640080" cy="292608"/>
+          </a:xfrm>
+          <a:prstGeom prst="rect">
+            <a:avLst/>
+          </a:prstGeom>
+          <a:noFill/>
+        </p:spPr>
+        <p:txBody>
+          <a:bodyPr wrap="none" lIns="0" tIns="0" rIns="45720" bIns="0" anchor="ctr"/>
+          <a:lstStyle/>
+          <a:p>
+            <a:pPr algn="r"/>
+            <a:r>
+              <a:t>111</a:t>
+            </a:r>
+            <a:endParaRPr sz="1000" b="1">
+              <a:solidFill>
+                <a:srgbClr val="7A8A6E"/>
+              </a:solidFill>
+              <a:latin typeface="Calibri"/>
+            </a:endParaRPr>
+          </a:p>
+        </p:txBody>
+      </p:sp>
+    </p:spTree>
+  </p:cSld>
+  <p:clrMapOvr>
+    <a:masterClrMapping/>
+  </p:clrMapOvr>
+</p:sld>
+</file>
+
+<file path=ppt/slides/slide14.xml><?xml version="1.0" encoding="utf-8"?>
+<p:sld xmlns:a="http://schemas.openxmlformats.org/drawingml/2006/main" xmlns:p="http://schemas.openxmlformats.org/presentationml/2006/main" xmlns:r="http://schemas.openxmlformats.org/officeDocument/2006/relationships">
+  <p:cSld>
+    <p:spTree>
+      <p:nvGrpSpPr>
+        <p:cNvPr id="1" name=""/>
+        <p:cNvGrpSpPr/>
+        <p:nvPr/>
+      </p:nvGrpSpPr>
+      <p:grpSpPr/>
+      <p:sp>
+        <p:nvSpPr>
+          <p:cNvPr id="2" name="Rectangle 1"/>
+          <p:cNvSpPr/>
+          <p:nvPr/>
+        </p:nvSpPr>
+        <p:spPr>
+          <a:xfrm>
+            <a:off x="0" y="0"/>
+            <a:ext cx="12192000" cy="6858000"/>
+          </a:xfrm>
+          <a:prstGeom prst="rect">
+            <a:avLst/>
+          </a:prstGeom>
+          <a:solidFill>
+            <a:srgbClr val="FFFFFF"/>
+          </a:solidFill>
+          <a:ln>
+            <a:noFill/>
+          </a:ln>
+          <a:effectLst/>
+        </p:spPr>
+        <p:style>
+          <a:lnRef idx="1">
+            <a:schemeClr val="accent1"/>
+          </a:lnRef>
+          <a:fillRef idx="3">
+            <a:schemeClr val="accent1"/>
+          </a:fillRef>
+          <a:effectRef idx="2">
+            <a:schemeClr val="accent1"/>
+          </a:effectRef>
+          <a:fontRef idx="minor">
+            <a:schemeClr val="lt1"/>
+          </a:fontRef>
+        </p:style>
+        <p:txBody>
+          <a:bodyPr rtlCol="0" anchor="ctr"/>
+          <a:lstStyle/>
+          <a:p>
+            <a:pPr algn="ctr"/>
+          </a:p>
+        </p:txBody>
+      </p:sp>
+      <p:sp>
+        <p:nvSpPr>
+          <p:cNvPr id="3" name="TextBox 2"/>
+          <p:cNvSpPr txBox="1"/>
+          <p:nvPr/>
+        </p:nvSpPr>
+        <p:spPr>
+          <a:xfrm>
+            <a:off x="822960" y="502920"/>
+            <a:ext cx="10515600" cy="822960"/>
+          </a:xfrm>
+          <a:prstGeom prst="rect">
+            <a:avLst/>
+          </a:prstGeom>
+          <a:noFill/>
+        </p:spPr>
+        <p:txBody>
+          <a:bodyPr wrap="square">
+            <a:spAutoFit/>
+          </a:bodyPr>
+          <a:lstStyle/>
+          <a:p>
+            <a:r>
+              <a:rPr sz="2800" b="1">
+                <a:solidFill>
+                  <a:srgbClr val="2C5F2D"/>
+                </a:solidFill>
+                <a:latin typeface="Cambria"/>
+              </a:rPr>
+              <a:t>The Take-Home Sheet — the Four Parts</a:t>
+            </a:r>
+          </a:p>
+        </p:txBody>
+      </p:sp>
+      <p:pic>
+        <p:nvPicPr>
+          <p:cNvPr id="4" name="Picture 3" descr="s8_part2.png"/>
+          <p:cNvPicPr>
+            <a:picLocks noChangeAspect="1"/>
+          </p:cNvPicPr>
+          <p:nvPr/>
+        </p:nvPicPr>
+        <p:blipFill>
+          <a:blip r:embed="rId2"/>
+          <a:stretch>
+            <a:fillRect/>
+          </a:stretch>
+        </p:blipFill>
+        <p:spPr>
+          <a:xfrm>
+            <a:off x="1858814" y="1463040"/>
+            <a:ext cx="8474066" cy="4709160"/>
+          </a:xfrm>
+          <a:prstGeom prst="rect">
+            <a:avLst/>
+          </a:prstGeom>
+          <a:ln w="12700">
+            <a:solidFill>
+              <a:srgbClr val="C8C8C8"/>
+            </a:solidFill>
+          </a:ln>
+        </p:spPr>
+      </p:pic>
+      <p:sp>
+        <p:nvSpPr>
+          <p:cNvPr id="5" name="TextBox 4"/>
+          <p:cNvSpPr txBox="1"/>
+          <p:nvPr/>
+        </p:nvSpPr>
+        <p:spPr>
+          <a:xfrm>
+            <a:off x="822960" y="6355080"/>
+            <a:ext cx="10515600" cy="411480"/>
+          </a:xfrm>
+          <a:prstGeom prst="rect">
+            <a:avLst/>
+          </a:prstGeom>
+          <a:noFill/>
+        </p:spPr>
+        <p:txBody>
+          <a:bodyPr wrap="square">
+            <a:spAutoFit/>
+          </a:bodyPr>
+          <a:lstStyle/>
+          <a:p>
+            <a:r>
+              <a:rPr sz="1400" i="1">
+                <a:solidFill>
+                  <a:srgbClr val="595959"/>
+                </a:solidFill>
+                <a:latin typeface="Calibri"/>
+              </a:rPr>
+              <a:t>One practice at a time — and a partner expecting you at the end of week one.</a:t>
+            </a:r>
+          </a:p>
+        </p:txBody>
+      </p:sp>
+      <p:sp>
+        <p:nvSpPr>
+          <p:cNvPr id="90" name="SlideNum"/>
+          <p:cNvSpPr txBox="1"/>
+          <p:nvPr/>
+        </p:nvSpPr>
+        <p:spPr>
+          <a:xfrm>
+            <a:off x="11384280" y="6446520"/>
+            <a:ext cx="640080" cy="292608"/>
+          </a:xfrm>
+          <a:prstGeom prst="rect">
+            <a:avLst/>
+          </a:prstGeom>
+          <a:noFill/>
+        </p:spPr>
+        <p:txBody>
+          <a:bodyPr wrap="none" lIns="0" tIns="0" rIns="45720" bIns="0" anchor="ctr"/>
+          <a:lstStyle/>
+          <a:p>
+            <a:pPr algn="r"/>
+            <a:r>
+              <a:t>111a</a:t>
+            </a:r>
+            <a:endParaRPr sz="1000" b="1">
+              <a:solidFill>
+                <a:srgbClr val="7A8A6E"/>
+              </a:solidFill>
+              <a:latin typeface="Calibri"/>
+            </a:endParaRPr>
+          </a:p>
+        </p:txBody>
+      </p:sp>
+    </p:spTree>
+  </p:cSld>
+  <p:clrMapOvr>
+    <a:masterClrMapping/>
+  </p:clrMapOvr>
+</p:sld>
+</file>
+
+<file path=ppt/slides/slide15.xml><?xml version="1.0" encoding="utf-8"?>
 <p:sld xmlns:a="http://schemas.openxmlformats.org/drawingml/2006/main" xmlns:r="http://schemas.openxmlformats.org/officeDocument/2006/relationships" xmlns:p="http://schemas.openxmlformats.org/presentationml/2006/main">
   <p:cSld>
     <p:spTree>
@@ -5728,7 +6409,7 @@
 </p:sld>
 </file>
 
-<file path=ppt/slides/slide14.xml><?xml version="1.0" encoding="utf-8"?>
+<file path=ppt/slides/slide16.xml><?xml version="1.0" encoding="utf-8"?>
 <p:sld xmlns:a="http://schemas.openxmlformats.org/drawingml/2006/main" xmlns:r="http://schemas.openxmlformats.org/officeDocument/2006/relationships" xmlns:p="http://schemas.openxmlformats.org/presentationml/2006/main">
   <p:cSld>
     <p:spTree>
@@ -6119,595 +6800,6 @@
             <a:pPr algn="r"/>
             <a:r>
               <a:t>113</a:t>
-            </a:r>
-            <a:endParaRPr sz="1000" b="1">
-              <a:solidFill>
-                <a:srgbClr val="7A8A6E"/>
-              </a:solidFill>
-              <a:latin typeface="Calibri"/>
-            </a:endParaRPr>
-          </a:p>
-        </p:txBody>
-      </p:sp>
-    </p:spTree>
-  </p:cSld>
-  <p:clrMapOvr>
-    <a:masterClrMapping/>
-  </p:clrMapOvr>
-</p:sld>
-</file>
-
-<file path=ppt/slides/slide15.xml><?xml version="1.0" encoding="utf-8"?>
-<p:sld xmlns:a="http://schemas.openxmlformats.org/drawingml/2006/main" xmlns:p="http://schemas.openxmlformats.org/presentationml/2006/main" xmlns:r="http://schemas.openxmlformats.org/officeDocument/2006/relationships">
-  <p:cSld>
-    <p:spTree>
-      <p:nvGrpSpPr>
-        <p:cNvPr id="1" name=""/>
-        <p:cNvGrpSpPr/>
-        <p:nvPr/>
-      </p:nvGrpSpPr>
-      <p:grpSpPr/>
-      <p:sp>
-        <p:nvSpPr>
-          <p:cNvPr id="2" name="Rectangle 1"/>
-          <p:cNvSpPr/>
-          <p:nvPr/>
-        </p:nvSpPr>
-        <p:spPr>
-          <a:xfrm>
-            <a:off x="0" y="0"/>
-            <a:ext cx="12192000" cy="6858000"/>
-          </a:xfrm>
-          <a:prstGeom prst="rect">
-            <a:avLst/>
-          </a:prstGeom>
-          <a:solidFill>
-            <a:srgbClr val="FFFFFF"/>
-          </a:solidFill>
-          <a:ln>
-            <a:noFill/>
-          </a:ln>
-          <a:effectLst/>
-        </p:spPr>
-        <p:style>
-          <a:lnRef idx="1">
-            <a:schemeClr val="accent1"/>
-          </a:lnRef>
-          <a:fillRef idx="3">
-            <a:schemeClr val="accent1"/>
-          </a:fillRef>
-          <a:effectRef idx="2">
-            <a:schemeClr val="accent1"/>
-          </a:effectRef>
-          <a:fontRef idx="minor">
-            <a:schemeClr val="lt1"/>
-          </a:fontRef>
-        </p:style>
-        <p:txBody>
-          <a:bodyPr rtlCol="0" anchor="ctr"/>
-          <a:lstStyle/>
-          <a:p>
-            <a:pPr algn="ctr"/>
-          </a:p>
-        </p:txBody>
-      </p:sp>
-      <p:sp>
-        <p:nvSpPr>
-          <p:cNvPr id="3" name="TextBox 2"/>
-          <p:cNvSpPr txBox="1"/>
-          <p:nvPr/>
-        </p:nvSpPr>
-        <p:spPr>
-          <a:xfrm>
-            <a:off x="822960" y="502920"/>
-            <a:ext cx="10515600" cy="822960"/>
-          </a:xfrm>
-          <a:prstGeom prst="rect">
-            <a:avLst/>
-          </a:prstGeom>
-          <a:noFill/>
-        </p:spPr>
-        <p:txBody>
-          <a:bodyPr wrap="square">
-            <a:spAutoFit/>
-          </a:bodyPr>
-          <a:lstStyle/>
-          <a:p>
-            <a:r>
-              <a:rPr sz="2800" b="1">
-                <a:solidFill>
-                  <a:srgbClr val="2C5F2D"/>
-                </a:solidFill>
-                <a:latin typeface="Cambria"/>
-              </a:rPr>
-              <a:t>Where We Are — the Four Connects</a:t>
-            </a:r>
-          </a:p>
-        </p:txBody>
-      </p:sp>
-      <p:pic>
-        <p:nvPicPr>
-          <p:cNvPr id="4" name="Picture 3" descr="four-connects.png"/>
-          <p:cNvPicPr>
-            <a:picLocks noChangeAspect="1"/>
-          </p:cNvPicPr>
-          <p:nvPr/>
-        </p:nvPicPr>
-        <p:blipFill>
-          <a:blip r:embed="rId2"/>
-          <a:stretch>
-            <a:fillRect/>
-          </a:stretch>
-        </p:blipFill>
-        <p:spPr>
-          <a:xfrm>
-            <a:off x="932688" y="1645920"/>
-            <a:ext cx="10332720" cy="3708663"/>
-          </a:xfrm>
-          <a:prstGeom prst="rect">
-            <a:avLst/>
-          </a:prstGeom>
-        </p:spPr>
-      </p:pic>
-      <p:sp>
-        <p:nvSpPr>
-          <p:cNvPr id="5" name="TextBox 4"/>
-          <p:cNvSpPr txBox="1"/>
-          <p:nvPr/>
-        </p:nvSpPr>
-        <p:spPr>
-          <a:xfrm>
-            <a:off x="822960" y="5623560"/>
-            <a:ext cx="10515600" cy="914400"/>
-          </a:xfrm>
-          <a:prstGeom prst="rect">
-            <a:avLst/>
-          </a:prstGeom>
-          <a:noFill/>
-        </p:spPr>
-        <p:txBody>
-          <a:bodyPr wrap="square">
-            <a:spAutoFit/>
-          </a:bodyPr>
-          <a:lstStyle/>
-          <a:p>
-            <a:r>
-              <a:rPr sz="1800" b="0">
-                <a:solidFill>
-                  <a:srgbClr val="222B22"/>
-                </a:solidFill>
-                <a:latin typeface="Calibri"/>
-              </a:rPr>
-              <a:t>Session 8 stands in the third box — </a:t>
-            </a:r>
-            <a:r>
-              <a:rPr sz="1800" b="1">
-                <a:solidFill>
-                  <a:srgbClr val="2C5F2D"/>
-                </a:solidFill>
-                <a:latin typeface="Calibri"/>
-              </a:rPr>
-              <a:t>Connect with God</a:t>
-            </a:r>
-            <a:r>
-              <a:rPr sz="1800" b="0">
-                <a:solidFill>
-                  <a:srgbClr val="222B22"/>
-                </a:solidFill>
-                <a:latin typeface="Calibri"/>
-              </a:rPr>
-              <a:t> — walked again, teen-led. Each connection makes the next one real (Matt. 22:37–40).</a:t>
-            </a:r>
-          </a:p>
-        </p:txBody>
-      </p:sp>
-      <p:sp>
-        <p:nvSpPr>
-          <p:cNvPr id="90" name="SlideNum"/>
-          <p:cNvSpPr txBox="1"/>
-          <p:nvPr/>
-        </p:nvSpPr>
-        <p:spPr>
-          <a:xfrm>
-            <a:off x="11384280" y="6446520"/>
-            <a:ext cx="640080" cy="292608"/>
-          </a:xfrm>
-          <a:prstGeom prst="rect">
-            <a:avLst/>
-          </a:prstGeom>
-          <a:noFill/>
-        </p:spPr>
-        <p:txBody>
-          <a:bodyPr wrap="none" lIns="0" tIns="0" rIns="45720" bIns="0" anchor="ctr"/>
-          <a:lstStyle/>
-          <a:p>
-            <a:pPr algn="r"/>
-            <a:r>
-              <a:t>101a</a:t>
-            </a:r>
-            <a:endParaRPr sz="1000" b="1">
-              <a:solidFill>
-                <a:srgbClr val="7A8A6E"/>
-              </a:solidFill>
-              <a:latin typeface="Calibri"/>
-            </a:endParaRPr>
-          </a:p>
-        </p:txBody>
-      </p:sp>
-    </p:spTree>
-  </p:cSld>
-  <p:clrMapOvr>
-    <a:masterClrMapping/>
-  </p:clrMapOvr>
-</p:sld>
-</file>
-
-<file path=ppt/slides/slide16.xml><?xml version="1.0" encoding="utf-8"?>
-<p:sld xmlns:a="http://schemas.openxmlformats.org/drawingml/2006/main" xmlns:p="http://schemas.openxmlformats.org/presentationml/2006/main" xmlns:r="http://schemas.openxmlformats.org/officeDocument/2006/relationships">
-  <p:cSld>
-    <p:spTree>
-      <p:nvGrpSpPr>
-        <p:cNvPr id="1" name=""/>
-        <p:cNvGrpSpPr/>
-        <p:nvPr/>
-      </p:nvGrpSpPr>
-      <p:grpSpPr/>
-      <p:sp>
-        <p:nvSpPr>
-          <p:cNvPr id="2" name="Rectangle 1"/>
-          <p:cNvSpPr/>
-          <p:nvPr/>
-        </p:nvSpPr>
-        <p:spPr>
-          <a:xfrm>
-            <a:off x="0" y="0"/>
-            <a:ext cx="12192000" cy="6858000"/>
-          </a:xfrm>
-          <a:prstGeom prst="rect">
-            <a:avLst/>
-          </a:prstGeom>
-          <a:solidFill>
-            <a:srgbClr val="FFFFFF"/>
-          </a:solidFill>
-          <a:ln>
-            <a:noFill/>
-          </a:ln>
-          <a:effectLst/>
-        </p:spPr>
-        <p:style>
-          <a:lnRef idx="1">
-            <a:schemeClr val="accent1"/>
-          </a:lnRef>
-          <a:fillRef idx="3">
-            <a:schemeClr val="accent1"/>
-          </a:fillRef>
-          <a:effectRef idx="2">
-            <a:schemeClr val="accent1"/>
-          </a:effectRef>
-          <a:fontRef idx="minor">
-            <a:schemeClr val="lt1"/>
-          </a:fontRef>
-        </p:style>
-        <p:txBody>
-          <a:bodyPr rtlCol="0" anchor="ctr"/>
-          <a:lstStyle/>
-          <a:p>
-            <a:pPr algn="ctr"/>
-          </a:p>
-        </p:txBody>
-      </p:sp>
-      <p:sp>
-        <p:nvSpPr>
-          <p:cNvPr id="3" name="TextBox 2"/>
-          <p:cNvSpPr txBox="1"/>
-          <p:nvPr/>
-        </p:nvSpPr>
-        <p:spPr>
-          <a:xfrm>
-            <a:off x="822960" y="502920"/>
-            <a:ext cx="10515600" cy="822960"/>
-          </a:xfrm>
-          <a:prstGeom prst="rect">
-            <a:avLst/>
-          </a:prstGeom>
-          <a:noFill/>
-        </p:spPr>
-        <p:txBody>
-          <a:bodyPr wrap="square">
-            <a:spAutoFit/>
-          </a:bodyPr>
-          <a:lstStyle/>
-          <a:p>
-            <a:r>
-              <a:rPr sz="2800" b="1">
-                <a:solidFill>
-                  <a:srgbClr val="2C5F2D"/>
-                </a:solidFill>
-                <a:latin typeface="Cambria"/>
-              </a:rPr>
-              <a:t>The Take-Home Sheet — the Daily Rhythm</a:t>
-            </a:r>
-          </a:p>
-        </p:txBody>
-      </p:sp>
-      <p:pic>
-        <p:nvPicPr>
-          <p:cNvPr id="4" name="Picture 3" descr="s8_part1.png"/>
-          <p:cNvPicPr>
-            <a:picLocks noChangeAspect="1"/>
-          </p:cNvPicPr>
-          <p:nvPr/>
-        </p:nvPicPr>
-        <p:blipFill>
-          <a:blip r:embed="rId2"/>
-          <a:stretch>
-            <a:fillRect/>
-          </a:stretch>
-        </p:blipFill>
-        <p:spPr>
-          <a:xfrm>
-            <a:off x="1798167" y="1463040"/>
-            <a:ext cx="8595360" cy="4039819"/>
-          </a:xfrm>
-          <a:prstGeom prst="rect">
-            <a:avLst/>
-          </a:prstGeom>
-          <a:ln w="12700">
-            <a:solidFill>
-              <a:srgbClr val="C8C8C8"/>
-            </a:solidFill>
-          </a:ln>
-        </p:spPr>
-      </p:pic>
-      <p:sp>
-        <p:nvSpPr>
-          <p:cNvPr id="5" name="TextBox 4"/>
-          <p:cNvSpPr txBox="1"/>
-          <p:nvPr/>
-        </p:nvSpPr>
-        <p:spPr>
-          <a:xfrm>
-            <a:off x="822960" y="6355080"/>
-            <a:ext cx="10515600" cy="411480"/>
-          </a:xfrm>
-          <a:prstGeom prst="rect">
-            <a:avLst/>
-          </a:prstGeom>
-          <a:noFill/>
-        </p:spPr>
-        <p:txBody>
-          <a:bodyPr wrap="square">
-            <a:spAutoFit/>
-          </a:bodyPr>
-          <a:lstStyle/>
-          <a:p>
-            <a:r>
-              <a:rPr sz="1400" i="1">
-                <a:solidFill>
-                  <a:srgbClr val="595959"/>
-                </a:solidFill>
-                <a:latin typeface="Calibri"/>
-              </a:rPr>
-              <a:t>Handed out now — this is the sheet in your hands.</a:t>
-            </a:r>
-          </a:p>
-        </p:txBody>
-      </p:sp>
-      <p:sp>
-        <p:nvSpPr>
-          <p:cNvPr id="90" name="SlideNum"/>
-          <p:cNvSpPr txBox="1"/>
-          <p:nvPr/>
-        </p:nvSpPr>
-        <p:spPr>
-          <a:xfrm>
-            <a:off x="11384280" y="6446520"/>
-            <a:ext cx="640080" cy="292608"/>
-          </a:xfrm>
-          <a:prstGeom prst="rect">
-            <a:avLst/>
-          </a:prstGeom>
-          <a:noFill/>
-        </p:spPr>
-        <p:txBody>
-          <a:bodyPr wrap="none" lIns="0" tIns="0" rIns="45720" bIns="0" anchor="ctr"/>
-          <a:lstStyle/>
-          <a:p>
-            <a:pPr algn="r"/>
-            <a:r>
-              <a:t>111</a:t>
-            </a:r>
-            <a:endParaRPr sz="1000" b="1">
-              <a:solidFill>
-                <a:srgbClr val="7A8A6E"/>
-              </a:solidFill>
-              <a:latin typeface="Calibri"/>
-            </a:endParaRPr>
-          </a:p>
-        </p:txBody>
-      </p:sp>
-    </p:spTree>
-  </p:cSld>
-  <p:clrMapOvr>
-    <a:masterClrMapping/>
-  </p:clrMapOvr>
-</p:sld>
-</file>
-
-<file path=ppt/slides/slide17.xml><?xml version="1.0" encoding="utf-8"?>
-<p:sld xmlns:a="http://schemas.openxmlformats.org/drawingml/2006/main" xmlns:p="http://schemas.openxmlformats.org/presentationml/2006/main" xmlns:r="http://schemas.openxmlformats.org/officeDocument/2006/relationships">
-  <p:cSld>
-    <p:spTree>
-      <p:nvGrpSpPr>
-        <p:cNvPr id="1" name=""/>
-        <p:cNvGrpSpPr/>
-        <p:nvPr/>
-      </p:nvGrpSpPr>
-      <p:grpSpPr/>
-      <p:sp>
-        <p:nvSpPr>
-          <p:cNvPr id="2" name="Rectangle 1"/>
-          <p:cNvSpPr/>
-          <p:nvPr/>
-        </p:nvSpPr>
-        <p:spPr>
-          <a:xfrm>
-            <a:off x="0" y="0"/>
-            <a:ext cx="12192000" cy="6858000"/>
-          </a:xfrm>
-          <a:prstGeom prst="rect">
-            <a:avLst/>
-          </a:prstGeom>
-          <a:solidFill>
-            <a:srgbClr val="FFFFFF"/>
-          </a:solidFill>
-          <a:ln>
-            <a:noFill/>
-          </a:ln>
-          <a:effectLst/>
-        </p:spPr>
-        <p:style>
-          <a:lnRef idx="1">
-            <a:schemeClr val="accent1"/>
-          </a:lnRef>
-          <a:fillRef idx="3">
-            <a:schemeClr val="accent1"/>
-          </a:fillRef>
-          <a:effectRef idx="2">
-            <a:schemeClr val="accent1"/>
-          </a:effectRef>
-          <a:fontRef idx="minor">
-            <a:schemeClr val="lt1"/>
-          </a:fontRef>
-        </p:style>
-        <p:txBody>
-          <a:bodyPr rtlCol="0" anchor="ctr"/>
-          <a:lstStyle/>
-          <a:p>
-            <a:pPr algn="ctr"/>
-          </a:p>
-        </p:txBody>
-      </p:sp>
-      <p:sp>
-        <p:nvSpPr>
-          <p:cNvPr id="3" name="TextBox 2"/>
-          <p:cNvSpPr txBox="1"/>
-          <p:nvPr/>
-        </p:nvSpPr>
-        <p:spPr>
-          <a:xfrm>
-            <a:off x="822960" y="502920"/>
-            <a:ext cx="10515600" cy="822960"/>
-          </a:xfrm>
-          <a:prstGeom prst="rect">
-            <a:avLst/>
-          </a:prstGeom>
-          <a:noFill/>
-        </p:spPr>
-        <p:txBody>
-          <a:bodyPr wrap="square">
-            <a:spAutoFit/>
-          </a:bodyPr>
-          <a:lstStyle/>
-          <a:p>
-            <a:r>
-              <a:rPr sz="2800" b="1">
-                <a:solidFill>
-                  <a:srgbClr val="2C5F2D"/>
-                </a:solidFill>
-                <a:latin typeface="Cambria"/>
-              </a:rPr>
-              <a:t>The Take-Home Sheet — the Four Parts</a:t>
-            </a:r>
-          </a:p>
-        </p:txBody>
-      </p:sp>
-      <p:pic>
-        <p:nvPicPr>
-          <p:cNvPr id="4" name="Picture 3" descr="s8_part2.png"/>
-          <p:cNvPicPr>
-            <a:picLocks noChangeAspect="1"/>
-          </p:cNvPicPr>
-          <p:nvPr/>
-        </p:nvPicPr>
-        <p:blipFill>
-          <a:blip r:embed="rId2"/>
-          <a:stretch>
-            <a:fillRect/>
-          </a:stretch>
-        </p:blipFill>
-        <p:spPr>
-          <a:xfrm>
-            <a:off x="1858814" y="1463040"/>
-            <a:ext cx="8474066" cy="4709160"/>
-          </a:xfrm>
-          <a:prstGeom prst="rect">
-            <a:avLst/>
-          </a:prstGeom>
-          <a:ln w="12700">
-            <a:solidFill>
-              <a:srgbClr val="C8C8C8"/>
-            </a:solidFill>
-          </a:ln>
-        </p:spPr>
-      </p:pic>
-      <p:sp>
-        <p:nvSpPr>
-          <p:cNvPr id="5" name="TextBox 4"/>
-          <p:cNvSpPr txBox="1"/>
-          <p:nvPr/>
-        </p:nvSpPr>
-        <p:spPr>
-          <a:xfrm>
-            <a:off x="822960" y="6355080"/>
-            <a:ext cx="10515600" cy="411480"/>
-          </a:xfrm>
-          <a:prstGeom prst="rect">
-            <a:avLst/>
-          </a:prstGeom>
-          <a:noFill/>
-        </p:spPr>
-        <p:txBody>
-          <a:bodyPr wrap="square">
-            <a:spAutoFit/>
-          </a:bodyPr>
-          <a:lstStyle/>
-          <a:p>
-            <a:r>
-              <a:rPr sz="1400" i="1">
-                <a:solidFill>
-                  <a:srgbClr val="595959"/>
-                </a:solidFill>
-                <a:latin typeface="Calibri"/>
-              </a:rPr>
-              <a:t>One practice at a time — and a partner expecting you at the end of week one.</a:t>
-            </a:r>
-          </a:p>
-        </p:txBody>
-      </p:sp>
-      <p:sp>
-        <p:nvSpPr>
-          <p:cNvPr id="90" name="SlideNum"/>
-          <p:cNvSpPr txBox="1"/>
-          <p:nvPr/>
-        </p:nvSpPr>
-        <p:spPr>
-          <a:xfrm>
-            <a:off x="11384280" y="6446520"/>
-            <a:ext cx="640080" cy="292608"/>
-          </a:xfrm>
-          <a:prstGeom prst="rect">
-            <a:avLst/>
-          </a:prstGeom>
-          <a:noFill/>
-        </p:spPr>
-        <p:txBody>
-          <a:bodyPr wrap="none" lIns="0" tIns="0" rIns="45720" bIns="0" anchor="ctr"/>
-          <a:lstStyle/>
-          <a:p>
-            <a:pPr algn="r"/>
-            <a:r>
-              <a:t>111a</a:t>
             </a:r>
             <a:endParaRPr sz="1000" b="1">
               <a:solidFill>
@@ -6976,6 +7068,211 @@
 </file>
 
 <file path=ppt/slides/slide3.xml><?xml version="1.0" encoding="utf-8"?>
+<p:sld xmlns:a="http://schemas.openxmlformats.org/drawingml/2006/main" xmlns:p="http://schemas.openxmlformats.org/presentationml/2006/main" xmlns:r="http://schemas.openxmlformats.org/officeDocument/2006/relationships">
+  <p:cSld>
+    <p:spTree>
+      <p:nvGrpSpPr>
+        <p:cNvPr id="1" name=""/>
+        <p:cNvGrpSpPr/>
+        <p:nvPr/>
+      </p:nvGrpSpPr>
+      <p:grpSpPr/>
+      <p:sp>
+        <p:nvSpPr>
+          <p:cNvPr id="2" name="Rectangle 1"/>
+          <p:cNvSpPr/>
+          <p:nvPr/>
+        </p:nvSpPr>
+        <p:spPr>
+          <a:xfrm>
+            <a:off x="0" y="0"/>
+            <a:ext cx="12192000" cy="6858000"/>
+          </a:xfrm>
+          <a:prstGeom prst="rect">
+            <a:avLst/>
+          </a:prstGeom>
+          <a:solidFill>
+            <a:srgbClr val="FFFFFF"/>
+          </a:solidFill>
+          <a:ln>
+            <a:noFill/>
+          </a:ln>
+          <a:effectLst/>
+        </p:spPr>
+        <p:style>
+          <a:lnRef idx="1">
+            <a:schemeClr val="accent1"/>
+          </a:lnRef>
+          <a:fillRef idx="3">
+            <a:schemeClr val="accent1"/>
+          </a:fillRef>
+          <a:effectRef idx="2">
+            <a:schemeClr val="accent1"/>
+          </a:effectRef>
+          <a:fontRef idx="minor">
+            <a:schemeClr val="lt1"/>
+          </a:fontRef>
+        </p:style>
+        <p:txBody>
+          <a:bodyPr rtlCol="0" anchor="ctr"/>
+          <a:lstStyle/>
+          <a:p>
+            <a:pPr algn="ctr"/>
+          </a:p>
+        </p:txBody>
+      </p:sp>
+      <p:sp>
+        <p:nvSpPr>
+          <p:cNvPr id="3" name="TextBox 2"/>
+          <p:cNvSpPr txBox="1"/>
+          <p:nvPr/>
+        </p:nvSpPr>
+        <p:spPr>
+          <a:xfrm>
+            <a:off x="822960" y="502920"/>
+            <a:ext cx="10515600" cy="822960"/>
+          </a:xfrm>
+          <a:prstGeom prst="rect">
+            <a:avLst/>
+          </a:prstGeom>
+          <a:noFill/>
+        </p:spPr>
+        <p:txBody>
+          <a:bodyPr wrap="square">
+            <a:spAutoFit/>
+          </a:bodyPr>
+          <a:lstStyle/>
+          <a:p>
+            <a:r>
+              <a:rPr sz="2800" b="1">
+                <a:solidFill>
+                  <a:srgbClr val="2C5F2D"/>
+                </a:solidFill>
+                <a:latin typeface="Cambria"/>
+              </a:rPr>
+              <a:t>Where We Are — the Four Connects</a:t>
+            </a:r>
+          </a:p>
+        </p:txBody>
+      </p:sp>
+      <p:sp>
+        <p:nvSpPr>
+          <p:cNvPr id="5" name="TextBox 4"/>
+          <p:cNvSpPr txBox="1"/>
+          <p:nvPr/>
+        </p:nvSpPr>
+        <p:spPr>
+          <a:xfrm>
+            <a:off x="822960" y="5623560"/>
+            <a:ext cx="10515600" cy="914400"/>
+          </a:xfrm>
+          <a:prstGeom prst="rect">
+            <a:avLst/>
+          </a:prstGeom>
+          <a:noFill/>
+        </p:spPr>
+        <p:txBody>
+          <a:bodyPr wrap="square">
+            <a:spAutoFit/>
+          </a:bodyPr>
+          <a:lstStyle/>
+          <a:p>
+            <a:r>
+              <a:rPr sz="1800" b="0">
+                <a:solidFill>
+                  <a:srgbClr val="222B22"/>
+                </a:solidFill>
+                <a:latin typeface="Calibri"/>
+              </a:rPr>
+              <a:t>Session 8 stands in the third box — </a:t>
+            </a:r>
+            <a:r>
+              <a:rPr sz="1800" b="1">
+                <a:solidFill>
+                  <a:srgbClr val="2C5F2D"/>
+                </a:solidFill>
+                <a:latin typeface="Calibri"/>
+              </a:rPr>
+              <a:t>Connect with God</a:t>
+            </a:r>
+            <a:r>
+              <a:rPr sz="1800" b="0">
+                <a:solidFill>
+                  <a:srgbClr val="222B22"/>
+                </a:solidFill>
+                <a:latin typeface="Calibri"/>
+              </a:rPr>
+              <a:t> — walked again, teen-led. Each connection makes the next one real (Matt. 22:37–40).</a:t>
+            </a:r>
+          </a:p>
+        </p:txBody>
+      </p:sp>
+      <p:sp>
+        <p:nvSpPr>
+          <p:cNvPr id="90" name="SlideNum"/>
+          <p:cNvSpPr txBox="1"/>
+          <p:nvPr/>
+        </p:nvSpPr>
+        <p:spPr>
+          <a:xfrm>
+            <a:off x="11384280" y="6446520"/>
+            <a:ext cx="640080" cy="292608"/>
+          </a:xfrm>
+          <a:prstGeom prst="rect">
+            <a:avLst/>
+          </a:prstGeom>
+          <a:noFill/>
+        </p:spPr>
+        <p:txBody>
+          <a:bodyPr wrap="none" lIns="0" tIns="0" rIns="45720" bIns="0" anchor="ctr"/>
+          <a:lstStyle/>
+          <a:p>
+            <a:pPr algn="r"/>
+            <a:r>
+              <a:t>101a</a:t>
+            </a:r>
+            <a:endParaRPr sz="1000" b="1">
+              <a:solidFill>
+                <a:srgbClr val="7A8A6E"/>
+              </a:solidFill>
+              <a:latin typeface="Calibri"/>
+            </a:endParaRPr>
+          </a:p>
+        </p:txBody>
+      </p:sp>
+      <p:pic>
+        <p:nvPicPr>
+          <p:cNvPr id="91" name="Picture 90" descr="four-connects.png"/>
+          <p:cNvPicPr>
+            <a:picLocks noChangeAspect="1"/>
+          </p:cNvPicPr>
+          <p:nvPr/>
+        </p:nvPicPr>
+        <p:blipFill>
+          <a:blip r:embed="rId4"/>
+          <a:stretch>
+            <a:fillRect/>
+          </a:stretch>
+        </p:blipFill>
+        <p:spPr>
+          <a:xfrm>
+            <a:off x="932688" y="1645920"/>
+            <a:ext cx="10332720" cy="3708663"/>
+          </a:xfrm>
+          <a:prstGeom prst="rect">
+            <a:avLst/>
+          </a:prstGeom>
+        </p:spPr>
+      </p:pic>
+    </p:spTree>
+  </p:cSld>
+  <p:clrMapOvr>
+    <a:masterClrMapping/>
+  </p:clrMapOvr>
+</p:sld>
+</file>
+
+<file path=ppt/slides/slide4.xml><?xml version="1.0" encoding="utf-8"?>
 <p:sld xmlns:a="http://schemas.openxmlformats.org/drawingml/2006/main" xmlns:r="http://schemas.openxmlformats.org/officeDocument/2006/relationships" xmlns:p="http://schemas.openxmlformats.org/presentationml/2006/main">
   <p:cSld>
     <p:spTree>
@@ -7426,7 +7723,7 @@
 </p:sld>
 </file>
 
-<file path=ppt/slides/slide4.xml><?xml version="1.0" encoding="utf-8"?>
+<file path=ppt/slides/slide5.xml><?xml version="1.0" encoding="utf-8"?>
 <p:sld xmlns:a="http://schemas.openxmlformats.org/drawingml/2006/main" xmlns:r="http://schemas.openxmlformats.org/officeDocument/2006/relationships" xmlns:p="http://schemas.openxmlformats.org/presentationml/2006/main">
   <p:cSld>
     <p:spTree>
@@ -7773,7 +8070,7 @@
 </p:sld>
 </file>
 
-<file path=ppt/slides/slide5.xml><?xml version="1.0" encoding="utf-8"?>
+<file path=ppt/slides/slide6.xml><?xml version="1.0" encoding="utf-8"?>
 <p:sld xmlns:a="http://schemas.openxmlformats.org/drawingml/2006/main" xmlns:r="http://schemas.openxmlformats.org/officeDocument/2006/relationships" xmlns:p="http://schemas.openxmlformats.org/presentationml/2006/main">
   <p:cSld>
     <p:spTree>
@@ -8081,7 +8378,7 @@
 </p:sld>
 </file>
 
-<file path=ppt/slides/slide6.xml><?xml version="1.0" encoding="utf-8"?>
+<file path=ppt/slides/slide7.xml><?xml version="1.0" encoding="utf-8"?>
 <p:sld xmlns:a="http://schemas.openxmlformats.org/drawingml/2006/main" xmlns:r="http://schemas.openxmlformats.org/officeDocument/2006/relationships" xmlns:p="http://schemas.openxmlformats.org/presentationml/2006/main">
   <p:cSld>
     <p:spTree>
@@ -8408,7 +8705,7 @@
 </p:sld>
 </file>
 
-<file path=ppt/slides/slide7.xml><?xml version="1.0" encoding="utf-8"?>
+<file path=ppt/slides/slide8.xml><?xml version="1.0" encoding="utf-8"?>
 <p:sld xmlns:a="http://schemas.openxmlformats.org/drawingml/2006/main" xmlns:r="http://schemas.openxmlformats.org/officeDocument/2006/relationships" xmlns:p="http://schemas.openxmlformats.org/presentationml/2006/main">
   <p:cSld>
     <p:spTree>
@@ -8741,278 +9038,6 @@
 </p:sld>
 </file>
 
-<file path=ppt/slides/slide8.xml><?xml version="1.0" encoding="utf-8"?>
-<p:sld xmlns:a="http://schemas.openxmlformats.org/drawingml/2006/main" xmlns:r="http://schemas.openxmlformats.org/officeDocument/2006/relationships" xmlns:p="http://schemas.openxmlformats.org/presentationml/2006/main">
-  <p:cSld>
-    <p:spTree>
-      <p:nvGrpSpPr>
-        <p:cNvPr id="1" name=""/>
-        <p:cNvGrpSpPr/>
-        <p:nvPr/>
-      </p:nvGrpSpPr>
-      <p:grpSpPr>
-        <a:xfrm>
-          <a:off x="0" y="0"/>
-          <a:ext cx="0" cy="0"/>
-          <a:chOff x="0" y="0"/>
-          <a:chExt cx="0" cy="0"/>
-        </a:xfrm>
-      </p:grpSpPr>
-      <p:sp>
-        <p:nvSpPr>
-          <p:cNvPr id="2" name="Rectangle 1"/>
-          <p:cNvSpPr/>
-          <p:nvPr/>
-        </p:nvSpPr>
-        <p:spPr>
-          <a:xfrm>
-            <a:off x="0" y="0"/>
-            <a:ext cx="12191695" cy="6858000"/>
-          </a:xfrm>
-          <a:prstGeom prst="rect">
-            <a:avLst/>
-          </a:prstGeom>
-          <a:solidFill>
-            <a:srgbClr val="FFFFFF"/>
-          </a:solidFill>
-          <a:ln>
-            <a:noFill/>
-          </a:ln>
-        </p:spPr>
-        <p:txBody>
-          <a:bodyPr/>
-          <a:lstStyle/>
-          <a:p>
-            <a:endParaRPr/>
-          </a:p>
-        </p:txBody>
-      </p:sp>
-      <p:sp>
-        <p:nvSpPr>
-          <p:cNvPr id="3" name="TextBox 2"/>
-          <p:cNvSpPr txBox="1"/>
-          <p:nvPr/>
-        </p:nvSpPr>
-        <p:spPr>
-          <a:xfrm>
-            <a:off x="822960" y="502920"/>
-            <a:ext cx="10515600" cy="822960"/>
-          </a:xfrm>
-          <a:prstGeom prst="rect">
-            <a:avLst/>
-          </a:prstGeom>
-          <a:noFill/>
-        </p:spPr>
-        <p:txBody>
-          <a:bodyPr wrap="square">
-            <a:spAutoFit/>
-          </a:bodyPr>
-          <a:lstStyle/>
-          <a:p>
-            <a:pPr algn="l">
-              <a:spcAft>
-                <a:spcPts val="600"/>
-              </a:spcAft>
-            </a:pPr>
-            <a:r>
-              <a:rPr sz="2800" b="1" i="0">
-                <a:solidFill>
-                  <a:srgbClr val="2C5F2D"/>
-                </a:solidFill>
-                <a:latin typeface="Cambria"/>
-              </a:rPr>
-              <a:t>Bridge to the pairs — Pair Structure</a:t>
-            </a:r>
-          </a:p>
-        </p:txBody>
-      </p:sp>
-      <p:sp>
-        <p:nvSpPr>
-          <p:cNvPr id="4" name="TextBox 4"/>
-          <p:cNvSpPr txBox="1"/>
-          <p:nvPr/>
-        </p:nvSpPr>
-        <p:spPr>
-          <a:xfrm>
-            <a:off x="822960" y="1554480"/>
-            <a:ext cx="10515600" cy="4892040"/>
-          </a:xfrm>
-          <a:prstGeom prst="rect">
-            <a:avLst/>
-          </a:prstGeom>
-          <a:noFill/>
-        </p:spPr>
-        <p:txBody>
-          <a:bodyPr wrap="square" lIns="91440" tIns="91440" rIns="91440" bIns="91440"/>
-          <a:lstStyle/>
-          <a:p>
-            <a:pPr marL="274320" indent="-274320">
-              <a:spcAft>
-                <a:spcPts val="900"/>
-              </a:spcAft>
-            </a:pPr>
-            <a:r>
-              <a:rPr sz="2400" b="1" i="0">
-                <a:solidFill>
-                  <a:srgbClr val="97BC62"/>
-                </a:solidFill>
-                <a:latin typeface="Calibri"/>
-              </a:rPr>
-              <a:t>•  </a:t>
-            </a:r>
-            <a:r>
-              <a:rPr sz="2400" b="0" i="0">
-                <a:solidFill>
-                  <a:srgbClr val="222B22"/>
-                </a:solidFill>
-                <a:latin typeface="Calibri"/>
-              </a:rPr>
-              <a:t>Same pair structure as last week — parent with teen, from your own family, by default</a:t>
-            </a:r>
-          </a:p>
-          <a:p>
-            <a:pPr marL="274320" indent="-274320">
-              <a:spcAft>
-                <a:spcPts val="900"/>
-              </a:spcAft>
-            </a:pPr>
-            <a:r>
-              <a:rPr sz="2400" b="1" i="0">
-                <a:solidFill>
-                  <a:srgbClr val="97BC62"/>
-                </a:solidFill>
-                <a:latin typeface="Calibri"/>
-              </a:rPr>
-              <a:t>•  </a:t>
-            </a:r>
-            <a:r>
-              <a:rPr sz="2400" b="0" i="0">
-                <a:solidFill>
-                  <a:srgbClr val="222B22"/>
-                </a:solidFill>
-                <a:latin typeface="Calibri"/>
-              </a:rPr>
-              <a:t>One Reader, one Listener — after thirteen minutes, switch; stay with Mark 2 or take a fresh passage</a:t>
-            </a:r>
-          </a:p>
-          <a:p>
-            <a:pPr marL="274320" indent="-274320">
-              <a:spcAft>
-                <a:spcPts val="900"/>
-              </a:spcAft>
-            </a:pPr>
-            <a:r>
-              <a:rPr sz="2400" b="1" i="0">
-                <a:solidFill>
-                  <a:srgbClr val="97BC62"/>
-                </a:solidFill>
-                <a:latin typeface="Calibri"/>
-              </a:rPr>
-              <a:t>•  </a:t>
-            </a:r>
-            <a:r>
-              <a:rPr sz="2400" b="0" i="0">
-                <a:solidFill>
-                  <a:srgbClr val="222B22"/>
-                </a:solidFill>
-                <a:latin typeface="Calibri"/>
-              </a:rPr>
-              <a:t>“Same pair as last week is not a rerun — a parent and a teen telling each other what they heard, a second week running, is the design working.”</a:t>
-            </a:r>
-          </a:p>
-          <a:p>
-            <a:pPr marL="274320" indent="-274320">
-              <a:spcAft>
-                <a:spcPts val="900"/>
-              </a:spcAft>
-            </a:pPr>
-            <a:r>
-              <a:rPr sz="2400" b="1" i="0">
-                <a:solidFill>
-                  <a:srgbClr val="97BC62"/>
-                </a:solidFill>
-                <a:latin typeface="Calibri"/>
-              </a:rPr>
-              <a:t>•  </a:t>
-            </a:r>
-            <a:r>
-              <a:rPr sz="2400" b="0" i="0">
-                <a:solidFill>
-                  <a:srgbClr val="222B22"/>
-                </a:solidFill>
-                <a:latin typeface="Calibri"/>
-              </a:rPr>
-              <a:t>Your leadsanion settles any odd numbers; a small room stays as one circle</a:t>
-            </a:r>
-          </a:p>
-          <a:p>
-            <a:pPr marL="274320" indent="-274320">
-              <a:spcAft>
-                <a:spcPts val="900"/>
-              </a:spcAft>
-            </a:pPr>
-            <a:r>
-              <a:rPr sz="2400" b="1" i="0">
-                <a:solidFill>
-                  <a:srgbClr val="97BC62"/>
-                </a:solidFill>
-                <a:latin typeface="Calibri"/>
-              </a:rPr>
-              <a:t>•  </a:t>
-            </a:r>
-            <a:r>
-              <a:rPr sz="2400" b="0" i="0">
-                <a:solidFill>
-                  <a:srgbClr val="222B22"/>
-                </a:solidFill>
-                <a:latin typeface="Calibri"/>
-              </a:rPr>
-              <a:t>“Father, You’ve already spoken tonight. Speak again in the pairs — something specific, something each of us can hear.”</a:t>
-            </a:r>
-          </a:p>
-        </p:txBody>
-      </p:sp>
-      <p:sp>
-        <p:nvSpPr>
-          <p:cNvPr id="90" name="SlideNum"/>
-          <p:cNvSpPr txBox="1"/>
-          <p:nvPr/>
-        </p:nvSpPr>
-        <p:spPr>
-          <a:xfrm>
-            <a:off x="11384280" y="6446520"/>
-            <a:ext cx="640080" cy="292608"/>
-          </a:xfrm>
-          <a:prstGeom prst="rect">
-            <a:avLst/>
-          </a:prstGeom>
-          <a:noFill/>
-        </p:spPr>
-        <p:txBody>
-          <a:bodyPr wrap="none" lIns="0" tIns="0" rIns="45720" bIns="0" anchor="ctr"/>
-          <a:lstStyle/>
-          <a:p>
-            <a:pPr algn="r"/>
-            <a:r>
-              <a:t>107</a:t>
-            </a:r>
-            <a:endParaRPr sz="1000" b="1">
-              <a:solidFill>
-                <a:srgbClr val="7A8A6E"/>
-              </a:solidFill>
-              <a:latin typeface="Calibri"/>
-            </a:endParaRPr>
-          </a:p>
-        </p:txBody>
-      </p:sp>
-    </p:spTree>
-  </p:cSld>
-  <p:clrMapOvr>
-    <a:masterClrMapping/>
-  </p:clrMapOvr>
-</p:sld>
-</file>
-
 <file path=ppt/slides/slide9.xml><?xml version="1.0" encoding="utf-8"?>
 <p:sld xmlns:a="http://schemas.openxmlformats.org/drawingml/2006/main" xmlns:r="http://schemas.openxmlformats.org/officeDocument/2006/relationships" xmlns:p="http://schemas.openxmlformats.org/presentationml/2006/main">
   <p:cSld>
@@ -9093,7 +9118,7 @@
                 </a:solidFill>
                 <a:latin typeface="Cambria"/>
               </a:rPr>
-              <a:t>PROAPT in Family Pairs</a:t>
+              <a:t>Bridge to the pairs — Pair Structure</a:t>
             </a:r>
           </a:p>
         </p:txBody>
@@ -9118,9 +9143,9 @@
           <a:bodyPr wrap="square" lIns="91440" tIns="91440" rIns="91440" bIns="91440"/>
           <a:lstStyle/>
           <a:p>
-            <a:pPr marL="342900" indent="-342900">
+            <a:pPr marL="274320" indent="-274320">
               <a:spcAft>
-                <a:spcPts val="750"/>
+                <a:spcPts val="900"/>
               </a:spcAft>
             </a:pPr>
             <a:r>
@@ -9130,7 +9155,7 @@
                 </a:solidFill>
                 <a:latin typeface="Calibri"/>
               </a:rPr>
-              <a:t>1   </a:t>
+              <a:t>•  </a:t>
             </a:r>
             <a:r>
               <a:rPr sz="2400" b="0" i="0">
@@ -9139,13 +9164,13 @@
                 </a:solidFill>
                 <a:latin typeface="Calibri"/>
               </a:rPr>
-              <a:t>First pass (13 min) — Reader leads PROAPT; Listener works alongside without interrupting</a:t>
-            </a:r>
-          </a:p>
-          <a:p>
-            <a:pPr marL="342900" indent="-342900">
+              <a:t>Same pair structure as last week — parent with teen, from your own family, by default</a:t>
+            </a:r>
+          </a:p>
+          <a:p>
+            <a:pPr marL="274320" indent="-274320">
               <a:spcAft>
-                <a:spcPts val="750"/>
+                <a:spcPts val="900"/>
               </a:spcAft>
             </a:pPr>
             <a:r>
@@ -9155,7 +9180,7 @@
                 </a:solidFill>
                 <a:latin typeface="Calibri"/>
               </a:rPr>
-              <a:t>2   </a:t>
+              <a:t>•  </a:t>
             </a:r>
             <a:r>
               <a:rPr sz="2400" b="0" i="0">
@@ -9164,13 +9189,13 @@
                 </a:solidFill>
                 <a:latin typeface="Calibri"/>
               </a:rPr>
-              <a:t>Reader’s Tell at the end goes to the Listener — one sentence</a:t>
-            </a:r>
-          </a:p>
-          <a:p>
-            <a:pPr marL="342900" indent="-342900">
+              <a:t>One Reader, one Listener — after thirteen minutes, switch; stay with Mark 2 or take a fresh passage</a:t>
+            </a:r>
+          </a:p>
+          <a:p>
+            <a:pPr marL="274320" indent="-274320">
               <a:spcAft>
-                <a:spcPts val="750"/>
+                <a:spcPts val="900"/>
               </a:spcAft>
             </a:pPr>
             <a:r>
@@ -9180,7 +9205,7 @@
                 </a:solidFill>
                 <a:latin typeface="Calibri"/>
               </a:rPr>
-              <a:t>3   </a:t>
+              <a:t>•  </a:t>
             </a:r>
             <a:r>
               <a:rPr sz="2400" b="0" i="0">
@@ -9189,13 +9214,13 @@
                 </a:solidFill>
                 <a:latin typeface="Calibri"/>
               </a:rPr>
-              <a:t>Switch — roles reverse; same passage or new</a:t>
-            </a:r>
-          </a:p>
-          <a:p>
-            <a:pPr marL="342900" indent="-342900">
+              <a:t>“Same pair as last week is not a rerun — a parent and a teen telling each other what they heard, a second week running, is the design working.”</a:t>
+            </a:r>
+          </a:p>
+          <a:p>
+            <a:pPr marL="274320" indent="-274320">
               <a:spcAft>
-                <a:spcPts val="750"/>
+                <a:spcPts val="900"/>
               </a:spcAft>
             </a:pPr>
             <a:r>
@@ -9205,7 +9230,7 @@
                 </a:solidFill>
                 <a:latin typeface="Calibri"/>
               </a:rPr>
-              <a:t>4   </a:t>
+              <a:t>•  </a:t>
             </a:r>
             <a:r>
               <a:rPr sz="2400" b="0" i="0">
@@ -9214,13 +9239,13 @@
                 </a:solidFill>
                 <a:latin typeface="Calibri"/>
               </a:rPr>
-              <a:t>Second pass (13 min) — same structure, roles reversed</a:t>
+              <a:t>Your leadsanion settles any odd numbers; a small room stays as one circle</a:t>
             </a:r>
           </a:p>
           <a:p>
             <a:pPr marL="274320" indent="-274320">
               <a:spcAft>
-                <a:spcPts val="750"/>
+                <a:spcPts val="900"/>
               </a:spcAft>
             </a:pPr>
             <a:r>
@@ -9239,32 +9264,7 @@
                 </a:solidFill>
                 <a:latin typeface="Calibri"/>
               </a:rPr>
-              <a:t>Same unstick prompts as Week 7 — “one specific word or phrase that caught you” / “one situation in your life right now — be specific”</a:t>
-            </a:r>
-          </a:p>
-          <a:p>
-            <a:pPr marL="274320" indent="-274320">
-              <a:spcAft>
-                <a:spcPts val="750"/>
-              </a:spcAft>
-            </a:pPr>
-            <a:r>
-              <a:rPr sz="2400" b="1" i="0">
-                <a:solidFill>
-                  <a:srgbClr val="97BC62"/>
-                </a:solidFill>
-                <a:latin typeface="Calibri"/>
-              </a:rPr>
-              <a:t>•  </a:t>
-            </a:r>
-            <a:r>
-              <a:rPr sz="2400" b="0" i="0">
-                <a:solidFill>
-                  <a:srgbClr val="222B22"/>
-                </a:solidFill>
-                <a:latin typeface="Calibri"/>
-              </a:rPr>
-              <a:t>Feels like a rerun? “Then you know what it said Thursday. What is it saying tonight? Second hearings are where the specific word comes.”</a:t>
+              <a:t>“Father, You’ve already spoken tonight. Speak again in the pairs — something specific, something each of us can hear.”</a:t>
             </a:r>
           </a:p>
         </p:txBody>
@@ -9291,7 +9291,7 @@
           <a:p>
             <a:pPr algn="r"/>
             <a:r>
-              <a:t>108</a:t>
+              <a:t>107</a:t>
             </a:r>
             <a:endParaRPr sz="1000" b="1">
               <a:solidFill>

--- a/_implementation-notes/evening-series/FotH Evening Session 8 Slides DRAFT v1.pptx
+++ b/_implementation-notes/evening-series/FotH Evening Session 8 Slides DRAFT v1.pptx
@@ -7249,7 +7249,7 @@
           <p:nvPr/>
         </p:nvPicPr>
         <p:blipFill>
-          <a:blip r:embed="rId4"/>
+          <a:blip r:embed="rId5"/>
           <a:stretch>
             <a:fillRect/>
           </a:stretch>

--- a/_implementation-notes/evening-series/FotH Evening Session 8 Slides DRAFT v1.pptx
+++ b/_implementation-notes/evening-series/FotH Evening Session 8 Slides DRAFT v1.pptx
@@ -5118,7 +5118,7 @@
           <a:p>
             <a:pPr algn="r"/>
             <a:r>
-              <a:t>108</a:t>
+              <a:t>123</a:t>
             </a:r>
             <a:endParaRPr sz="1000" b="1">
               <a:solidFill>
@@ -5415,7 +5415,7 @@
           <a:p>
             <a:pPr algn="r"/>
             <a:r>
-              <a:t>109</a:t>
+              <a:t>124</a:t>
             </a:r>
             <a:endParaRPr sz="1000" b="1">
               <a:solidFill>
@@ -5637,7 +5637,7 @@
           <a:p>
             <a:pPr algn="r"/>
             <a:r>
-              <a:t>110</a:t>
+              <a:t>125</a:t>
             </a:r>
             <a:endParaRPr sz="1000" b="1">
               <a:solidFill>
@@ -5865,7 +5865,7 @@
           <a:p>
             <a:pPr algn="r"/>
             <a:r>
-              <a:t>111</a:t>
+              <a:t>126</a:t>
             </a:r>
             <a:endParaRPr sz="1000" b="1">
               <a:solidFill>
@@ -6057,7 +6057,7 @@
           <a:p>
             <a:pPr algn="r"/>
             <a:r>
-              <a:t>111a</a:t>
+              <a:t>127</a:t>
             </a:r>
             <a:endParaRPr sz="1000" b="1">
               <a:solidFill>
@@ -6354,7 +6354,7 @@
           <a:p>
             <a:pPr algn="r"/>
             <a:r>
-              <a:t>112</a:t>
+              <a:t>128</a:t>
             </a:r>
             <a:endParaRPr sz="1000" b="1">
               <a:solidFill>
@@ -6799,7 +6799,7 @@
           <a:p>
             <a:pPr algn="r"/>
             <a:r>
-              <a:t>113</a:t>
+              <a:t>129</a:t>
             </a:r>
             <a:endParaRPr sz="1000" b="1">
               <a:solidFill>
@@ -7048,7 +7048,7 @@
           <a:p>
             <a:pPr algn="r"/>
             <a:r>
-              <a:t>101</a:t>
+              <a:t>115</a:t>
             </a:r>
             <a:endParaRPr sz="1000" b="1">
               <a:solidFill>
@@ -7229,7 +7229,7 @@
           <a:p>
             <a:pPr algn="r"/>
             <a:r>
-              <a:t>101a</a:t>
+              <a:t>116</a:t>
             </a:r>
             <a:endParaRPr sz="1000" b="1">
               <a:solidFill>
@@ -7668,7 +7668,7 @@
           <a:p>
             <a:pPr algn="r"/>
             <a:r>
-              <a:t>102</a:t>
+              <a:t>117</a:t>
             </a:r>
             <a:endParaRPr sz="1000" b="1">
               <a:solidFill>
@@ -8051,7 +8051,7 @@
           <a:p>
             <a:pPr algn="r"/>
             <a:r>
-              <a:t>103</a:t>
+              <a:t>118</a:t>
             </a:r>
             <a:endParaRPr sz="1000" b="1">
               <a:solidFill>
@@ -8323,7 +8323,7 @@
           <a:p>
             <a:pPr algn="r"/>
             <a:r>
-              <a:t>104</a:t>
+              <a:t>119</a:t>
             </a:r>
             <a:endParaRPr sz="1000" b="1">
               <a:solidFill>
@@ -8686,7 +8686,7 @@
           <a:p>
             <a:pPr algn="r"/>
             <a:r>
-              <a:t>105</a:t>
+              <a:t>120</a:t>
             </a:r>
             <a:endParaRPr sz="1000" b="1">
               <a:solidFill>
@@ -8983,7 +8983,7 @@
           <a:p>
             <a:pPr algn="r"/>
             <a:r>
-              <a:t>106</a:t>
+              <a:t>121</a:t>
             </a:r>
             <a:endParaRPr sz="1000" b="1">
               <a:solidFill>
@@ -9291,7 +9291,7 @@
           <a:p>
             <a:pPr algn="r"/>
             <a:r>
-              <a:t>107</a:t>
+              <a:t>122</a:t>
             </a:r>
             <a:endParaRPr sz="1000" b="1">
               <a:solidFill>

--- a/_implementation-notes/evening-series/FotH Evening Session 8 Slides DRAFT v1.pptx
+++ b/_implementation-notes/evening-series/FotH Evening Session 8 Slides DRAFT v1.pptx
@@ -7249,7 +7249,7 @@
           <p:nvPr/>
         </p:nvPicPr>
         <p:blipFill>
-          <a:blip r:embed="rId5"/>
+          <a:blip r:embed="rId6"/>
           <a:stretch>
             <a:fillRect/>
           </a:stretch>

--- a/_implementation-notes/evening-series/FotH Evening Session 8 Slides DRAFT v1.pptx
+++ b/_implementation-notes/evening-series/FotH Evening Session 8 Slides DRAFT v1.pptx
@@ -1143,7 +1143,7 @@
           <a:p>
             <a:r>
               <a:rPr lang="en-US" sz="1200"/>
-              <a:t>CUES: leadsanions settle odd numbers. Room about ten or fewer: stay as one circle, pair in place.</a:t>
+              <a:t>CUES: Lead Companions settle odd numbers. Room about ten or fewer: stay as one circle, pair in place.</a:t>
             </a:r>
           </a:p>
         </p:txBody>
@@ -9239,7 +9239,7 @@
                 </a:solidFill>
                 <a:latin typeface="Calibri"/>
               </a:rPr>
-              <a:t>Your leadsanion settles any odd numbers; a small room stays as one circle</a:t>
+              <a:t>Your Lead Companion settles any odd numbers; a small room stays as one circle</a:t>
             </a:r>
           </a:p>
           <a:p>

--- a/_implementation-notes/evening-series/FotH Evening Session 8 Slides DRAFT v1.pptx
+++ b/_implementation-notes/evening-series/FotH Evening Session 8 Slides DRAFT v1.pptx
@@ -1308,7 +1308,7 @@
           <a:p>
             <a:r>
               <a:rPr lang="en-US" sz="1200"/>
-              <a:t>S8 · 8:17–8:20 · LEAD: CONTENT PRESENTER</a:t>
+              <a:t>S8 · 8:17–8:20 · LEAD: CONTAINER HOLDER</a:t>
             </a:r>
           </a:p>
           <a:p>

--- a/_implementation-notes/evening-series/FotH Evening Session 8 Slides DRAFT v1.pptx
+++ b/_implementation-notes/evening-series/FotH Evening Session 8 Slides DRAFT v1.pptx
@@ -5118,7 +5118,7 @@
           <a:p>
             <a:pPr algn="r"/>
             <a:r>
-              <a:t>123</a:t>
+              <a:t>124</a:t>
             </a:r>
             <a:endParaRPr sz="1000" b="1">
               <a:solidFill>
@@ -5415,7 +5415,7 @@
           <a:p>
             <a:pPr algn="r"/>
             <a:r>
-              <a:t>124</a:t>
+              <a:t>125</a:t>
             </a:r>
             <a:endParaRPr sz="1000" b="1">
               <a:solidFill>
@@ -5637,7 +5637,7 @@
           <a:p>
             <a:pPr algn="r"/>
             <a:r>
-              <a:t>125</a:t>
+              <a:t>126</a:t>
             </a:r>
             <a:endParaRPr sz="1000" b="1">
               <a:solidFill>
@@ -5865,7 +5865,7 @@
           <a:p>
             <a:pPr algn="r"/>
             <a:r>
-              <a:t>126</a:t>
+              <a:t>127</a:t>
             </a:r>
             <a:endParaRPr sz="1000" b="1">
               <a:solidFill>
@@ -6057,7 +6057,7 @@
           <a:p>
             <a:pPr algn="r"/>
             <a:r>
-              <a:t>127</a:t>
+              <a:t>128</a:t>
             </a:r>
             <a:endParaRPr sz="1000" b="1">
               <a:solidFill>
@@ -6354,7 +6354,7 @@
           <a:p>
             <a:pPr algn="r"/>
             <a:r>
-              <a:t>128</a:t>
+              <a:t>129</a:t>
             </a:r>
             <a:endParaRPr sz="1000" b="1">
               <a:solidFill>
@@ -6799,7 +6799,7 @@
           <a:p>
             <a:pPr algn="r"/>
             <a:r>
-              <a:t>129</a:t>
+              <a:t>130</a:t>
             </a:r>
             <a:endParaRPr sz="1000" b="1">
               <a:solidFill>
@@ -7048,7 +7048,7 @@
           <a:p>
             <a:pPr algn="r"/>
             <a:r>
-              <a:t>115</a:t>
+              <a:t>116</a:t>
             </a:r>
             <a:endParaRPr sz="1000" b="1">
               <a:solidFill>
@@ -7229,7 +7229,7 @@
           <a:p>
             <a:pPr algn="r"/>
             <a:r>
-              <a:t>116</a:t>
+              <a:t>117</a:t>
             </a:r>
             <a:endParaRPr sz="1000" b="1">
               <a:solidFill>
@@ -7668,7 +7668,7 @@
           <a:p>
             <a:pPr algn="r"/>
             <a:r>
-              <a:t>117</a:t>
+              <a:t>118</a:t>
             </a:r>
             <a:endParaRPr sz="1000" b="1">
               <a:solidFill>
@@ -8051,7 +8051,7 @@
           <a:p>
             <a:pPr algn="r"/>
             <a:r>
-              <a:t>118</a:t>
+              <a:t>119</a:t>
             </a:r>
             <a:endParaRPr sz="1000" b="1">
               <a:solidFill>
@@ -8323,7 +8323,7 @@
           <a:p>
             <a:pPr algn="r"/>
             <a:r>
-              <a:t>119</a:t>
+              <a:t>120</a:t>
             </a:r>
             <a:endParaRPr sz="1000" b="1">
               <a:solidFill>
@@ -8686,7 +8686,7 @@
           <a:p>
             <a:pPr algn="r"/>
             <a:r>
-              <a:t>120</a:t>
+              <a:t>121</a:t>
             </a:r>
             <a:endParaRPr sz="1000" b="1">
               <a:solidFill>
@@ -8983,7 +8983,7 @@
           <a:p>
             <a:pPr algn="r"/>
             <a:r>
-              <a:t>121</a:t>
+              <a:t>122</a:t>
             </a:r>
             <a:endParaRPr sz="1000" b="1">
               <a:solidFill>
@@ -9291,7 +9291,7 @@
           <a:p>
             <a:pPr algn="r"/>
             <a:r>
-              <a:t>122</a:t>
+              <a:t>123</a:t>
             </a:r>
             <a:endParaRPr sz="1000" b="1">
               <a:solidFill>

--- a/_implementation-notes/evening-series/FotH Evening Session 8 Slides DRAFT v1.pptx
+++ b/_implementation-notes/evening-series/FotH Evening Session 8 Slides DRAFT v1.pptx
@@ -5981,15 +5981,15 @@
           <p:nvPr/>
         </p:nvPicPr>
         <p:blipFill>
-          <a:blip r:embed="rId2"/>
+          <a:blip r:embed="rId4"/>
           <a:stretch>
             <a:fillRect/>
           </a:stretch>
         </p:blipFill>
         <p:spPr>
           <a:xfrm>
-            <a:off x="1858814" y="1463040"/>
-            <a:ext cx="8474066" cy="4709160"/>
+            <a:off x="2574039" y="1463040"/>
+            <a:ext cx="7043615" cy="4709160"/>
           </a:xfrm>
           <a:prstGeom prst="rect">
             <a:avLst/>

--- a/_implementation-notes/evening-series/FotH Evening Session 8 Slides DRAFT v1.pptx
+++ b/_implementation-notes/evening-series/FotH Evening Session 8 Slides DRAFT v1.pptx
@@ -1413,14 +1413,17 @@
           <a:lstStyle/>
           <a:p>
             <a:r>
-              <a:rPr lang="en-US" sz="1200"/>
               <a:t>S8 · 8:28–8:30 · LEAD: CONTAINER HOLDER</a:t>
             </a:r>
           </a:p>
           <a:p>
             <a:r>
-              <a:rPr lang="en-US" sz="1200"/>
               <a:t>BEATS: 1. The senior closes: seven weeks ago none of us had done this; when we gather we go deeper, into the Garden — today's skill of hearing Him is what the Garden depends on. 2. 'Keep the daily practice alive this week. It's the hinge.' 3. Aaronic blessing, spoken by the senior — its own quiet milestone. 4. 'PROAPT one passage tomorrow. See you evenings.'</a:t>
+            </a:r>
+          </a:p>
+          <a:p>
+            <a:r>
+              <a:t>BLESSINGS: eyes on the person, not the screen — nothing to read; say what is on your heart for them, specific and short.</a:t>
             </a:r>
           </a:p>
         </p:txBody>
@@ -6660,7 +6663,7 @@
                 </a:solidFill>
                 <a:latin typeface="Calibri"/>
               </a:rPr>
-              <a:t>Blessings — specific, witnessed, short</a:t>
+              <a:t>Blessings — eyes on the person, not the screen: say what is on your heart for them. Specific, witnessed, short</a:t>
             </a:r>
           </a:p>
           <a:p>
